--- a/presentacion/Presentacion_Medical_Health.pptx
+++ b/presentacion/Presentacion_Medical_Health.pptx
@@ -27,6 +27,8 @@
     <p:sldId id="275" r:id="rId27"/>
     <p:sldId id="276" r:id="rId28"/>
     <p:sldId id="277" r:id="rId29"/>
+    <p:sldId id="278" r:id="rId30"/>
+    <p:sldId id="279" r:id="rId31"/>
   </p:sldIdLst>
   <p:sldSz cx="12191695" cy="6858000" type="screen4x3"/>
   <p:notesSz cx="6858000" cy="9144000"/>
@@ -192,25 +194,25 @@
                 <c:formatCode>General</c:formatCode>
                 <c:ptCount val="7"/>
                 <c:pt idx="0">
-                  <c:v>1195.88</c:v>
+                  <c:v>3.91</c:v>
                 </c:pt>
                 <c:pt idx="1">
-                  <c:v>1510.12</c:v>
+                  <c:v>4.94</c:v>
                 </c:pt>
                 <c:pt idx="2">
-                  <c:v>1886.34</c:v>
+                  <c:v>6.17</c:v>
                 </c:pt>
                 <c:pt idx="3">
-                  <c:v>197.86</c:v>
+                  <c:v>0.65</c:v>
                 </c:pt>
                 <c:pt idx="4">
-                  <c:v>636.2</c:v>
+                  <c:v>2.08</c:v>
                 </c:pt>
                 <c:pt idx="5">
-                  <c:v>2018.28</c:v>
+                  <c:v>6.61</c:v>
                 </c:pt>
                 <c:pt idx="6">
-                  <c:v>477.87</c:v>
+                  <c:v>1.56</c:v>
                 </c:pt>
               </c:numCache>
             </c:numRef>
@@ -271,25 +273,25 @@
                 <c:formatCode>General</c:formatCode>
                 <c:ptCount val="7"/>
                 <c:pt idx="0">
-                  <c:v>1058.4</c:v>
+                  <c:v>3.46</c:v>
                 </c:pt>
                 <c:pt idx="1">
-                  <c:v>1455.33</c:v>
+                  <c:v>4.76</c:v>
                 </c:pt>
                 <c:pt idx="2">
-                  <c:v>331.01</c:v>
+                  <c:v>1.08</c:v>
                 </c:pt>
                 <c:pt idx="3">
-                  <c:v>82.94</c:v>
+                  <c:v>0.27</c:v>
                 </c:pt>
                 <c:pt idx="4">
-                  <c:v>313</c:v>
+                  <c:v>1.02</c:v>
                 </c:pt>
                 <c:pt idx="5">
-                  <c:v>1570.19</c:v>
+                  <c:v>5.14</c:v>
                 </c:pt>
                 <c:pt idx="6">
-                  <c:v>310.09</c:v>
+                  <c:v>1.02</c:v>
                 </c:pt>
               </c:numCache>
             </c:numRef>
@@ -313,7 +315,7 @@
           <a:lstStyle/>
           <a:p>
             <a:pPr>
-              <a:defRPr sz="1100"/>
+              <a:defRPr sz="1300"/>
             </a:pPr>
           </a:p>
         </c:txPr>
@@ -330,7 +332,7 @@
         <c:delete val="0"/>
         <c:axPos val="b"/>
         <c:majorGridlines/>
-        <c:numFmt formatCode="&quot;$&quot;#,##0" sourceLinked="0"/>
+        <c:numFmt formatCode="&quot;$&quot;0&quot; M&quot;" sourceLinked="0"/>
         <c:majorTickMark val="out"/>
         <c:minorTickMark val="none"/>
         <c:tickLblPos val="nextTo"/>
@@ -339,7 +341,7 @@
           <a:lstStyle/>
           <a:p>
             <a:pPr>
-              <a:defRPr sz="1000"/>
+              <a:defRPr sz="1200"/>
             </a:pPr>
           </a:p>
         </c:txPr>
@@ -355,7 +357,7 @@
         <a:lstStyle/>
         <a:p>
           <a:pPr>
-            <a:defRPr sz="1200"/>
+            <a:defRPr sz="1400"/>
           </a:pPr>
         </a:p>
       </c:txPr>
@@ -396,7 +398,7 @@
               <c:strCache>
                 <c:ptCount val="1"/>
                 <c:pt idx="0">
-                  <c:v>USD / mes</c:v>
+                  <c:v>Millones COP / mes</c:v>
                 </c:pt>
               </c:strCache>
             </c:strRef>
@@ -415,10 +417,10 @@
                   <c:v>Pago por uso</c:v>
                 </c:pt>
                 <c:pt idx="1">
-                  <c:v>Reserva 1 año</c:v>
+                  <c:v>Reservas 1 año</c:v>
                 </c:pt>
                 <c:pt idx="2">
-                  <c:v>Reserva 3 años</c:v>
+                  <c:v>Reservas 3 años</c:v>
                 </c:pt>
               </c:strCache>
             </c:strRef>
@@ -430,26 +432,26 @@
                 <c:formatCode>General</c:formatCode>
                 <c:ptCount val="3"/>
                 <c:pt idx="0">
-                  <c:v>7922.55</c:v>
+                  <c:v>25.93</c:v>
                 </c:pt>
                 <c:pt idx="1">
-                  <c:v>6669.03</c:v>
+                  <c:v>21.83</c:v>
                 </c:pt>
                 <c:pt idx="2">
-                  <c:v>6245.17</c:v>
+                  <c:v>20.44</c:v>
                 </c:pt>
               </c:numCache>
             </c:numRef>
           </c:val>
         </c:ser>
         <c:dLbls>
-          <c:numFmt formatCode="&quot;$&quot;#,##0" sourceLinked="0"/>
+          <c:numFmt formatCode="&quot;$&quot;0.0&quot; M&quot;" sourceLinked="0"/>
           <c:txPr>
             <a:bodyPr/>
             <a:lstStyle/>
             <a:p>
               <a:pPr>
-                <a:defRPr sz="1400" b="1"/>
+                <a:defRPr sz="1800" b="1"/>
               </a:pPr>
             </a:p>
           </c:txPr>
@@ -480,7 +482,7 @@
           <a:lstStyle/>
           <a:p>
             <a:pPr>
-              <a:defRPr sz="1300"/>
+              <a:defRPr sz="1500"/>
             </a:pPr>
           </a:p>
         </c:txPr>
@@ -986,7 +988,7 @@
           <a:lstStyle/>
           <a:p>
             <a:r>
-              <a:t>Aquí los otros tres servicios. Historia clínica consulta FHIR, resume y audita cada acceso. Centros médicos geocodifica la dirección, busca en PostGIS y ordena por tiempo de llegada con Azure Maps. Remisión registra, publica un evento y un procesador avisa al centro por llamada, SMS o correo, con reintentos automáticos. Los diagramas completos están en el documento.</a:t>
+              <a:t>Este es el servicio más delicado. Se validan los síntomas y un motor de reglas clínicas detecta signos de alarma. En paralelo, los datos se anonimizan y se consulta el motor de apoyo. El agregador combina ambos en un nivel de urgencia. El sistema sugiere, pero la decisión clínica siempre es de la enfermera.</a:t>
             </a:r>
           </a:p>
         </p:txBody>
@@ -1056,7 +1058,7 @@
           <a:lstStyle/>
           <a:p>
             <a:r>
-              <a:t>Este diagrama recorre una atención completa. La enfermera inicia sesión con el sistema corporativo, recibe la llamada, consulta la historia, registra síntomas y obtiene el nivel de urgencia. Si el paciente debe ir a un centro, busca el más cercano, confirma la remisión y el sistema avisa al centro de forma automática. Si no, da indicaciones de autocuidado y cierra el caso.</a:t>
+              <a:t>El servicio convierte la dirección del paciente en coordenadas, busca en la base de datos geoespacial los centros cercanos con la especialidad requerida y los ordena por tiempo estimado de llegada usando Azure Maps.</a:t>
             </a:r>
           </a:p>
         </p:txBody>
@@ -1126,7 +1128,7 @@
           <a:lstStyle/>
           <a:p>
             <a:r>
-              <a:t>Este es el diagrama de la nube. El tráfico entra por Azure Front Door con firewall de aplicaciones. La región principal, East US 2, tiene Kubernetes repartido en tres zonas y las bases de datos con alta disponibilidad. Central US mantiene réplicas y capacidad mínima; si la región principal falla, Front Door redirige el tráfico automáticamente. Las bases de datos solo son accesibles por red privada.</a:t>
+              <a:t>La remisión se guarda y se publica como evento. Un procesador independiente avisa al centro por llamada, SMS o correo y reintenta si falla. Así la enfermera no espera y ningún aviso se pierde.</a:t>
             </a:r>
           </a:p>
         </p:txBody>
@@ -1196,7 +1198,7 @@
           <a:lstStyle/>
           <a:p>
             <a:r>
-              <a:t>La seguridad empieza por la identidad. La enfermera inicia sesión contra el sistema de seguridad centralizado de la compañía a través de Entra ID, con OpenID Connect y MFA. Recibe un token con su rol, que el gateway y cada servicio validan. Los datos viajan cifrados, las bases de datos no están expuestas a internet y cada acceso a una historia clínica queda auditado.</a:t>
+              <a:t>Así se ve una atención completa. La enfermera inicia sesión con el sistema corporativo, recibe la llamada, consulta la historia clínica y registra los síntomas. El sistema le sugiere el nivel de urgencia. Si el paciente debe ir a un centro, busca el más cercano, confirma la remisión y el sistema avisa al centro automáticamente. Si no, da indicaciones de autocuidado. En ambos casos el caso queda registrado.</a:t>
             </a:r>
           </a:p>
         </p:txBody>
@@ -1266,7 +1268,7 @@
           <a:lstStyle/>
           <a:p>
             <a:r>
-              <a:t>Para la disponibilidad combinamos zonas y regiones: si falla un centro de datos, las otras zonas siguen; si falla toda la región, pasamos a Central US en menos de una hora perdiendo como máximo cinco minutos de datos. Todo se monitorea en Azure Monitor con alertas que avisan al equipo antes de que la enfermera note un problema.</a:t>
+              <a:t>El tráfico entra por Azure Front Door con firewall. La región principal, East US 2, tiene Kubernetes en tres zonas y bases de datos con alta disponibilidad. Central US mantiene una réplica y capacidad mínima; si la región principal falla, Front Door redirige el tráfico automáticamente. Las bases de datos solo son accesibles por red privada.</a:t>
             </a:r>
           </a:p>
         </p:txBody>
@@ -1336,7 +1338,7 @@
           <a:lstStyle/>
           <a:p>
             <a:r>
-              <a:t>Resumimos las decisiones principales. Microservicios en Kubernetes para escalar por separado. Web más Electron para cubrir los tres sistemas operativos con un solo código. OpenID Connect para integrarnos con la seguridad corporativa. FHIR porque es el estándar de salud. Eventos para que la remisión sea confiable. Activo-pasivo por equilibrio entre costo y resiliencia. Y el asistente de diagnóstico siempre con supervisión humana.</a:t>
+              <a:t>La seguridad empieza por la identidad. La enfermera inicia sesión contra el sistema de seguridad centralizado de la compañía a través de Entra ID, con OpenID Connect y MFA. Recibe un token con su rol, que el gateway y cada servicio validan. Los datos viajan cifrados, las bases de datos no están expuestas a internet y cada acceso a una historia clínica queda auditado.</a:t>
             </a:r>
           </a:p>
         </p:txBody>
@@ -1406,7 +1408,7 @@
           <a:lstStyle/>
           <a:p>
             <a:r>
-              <a:t>Comparamos Azure y AWS con siete criterios ponderados. AWS gana en costo de lista, y lo reconocemos. Pero Azure gana en lo que más pesa para un hospital: integración con el sistema de seguridad corporativo, servicios de salud como FHIR, inteligencia con red privada y compatibilidad con nuestras herramientas. Por eso elegimos Azure, con 4,6 puntos frente a 4,3.</a:t>
+              <a:t>Para la disponibilidad combinamos zonas y regiones: si falla un centro de datos, las otras zonas siguen; si falla toda la región, pasamos a Central US en menos de una hora perdiendo como máximo cinco minutos de datos. Todo se monitorea en Azure Monitor con alertas que avisan al equipo antes de que la enfermera note un problema.</a:t>
             </a:r>
           </a:p>
         </p:txBody>
@@ -1476,7 +1478,7 @@
           <a:lstStyle/>
           <a:p>
             <a:r>
-              <a:t>El costo mensual estimado en Azure, a precio de lista y sin descuentos, es de $7.923 dólares, incluyendo producción en dos regiones y un ambiente de desarrollo. En AWS sería $5.121. La mayor diferencia está en redes, por API Management, y en mensajería y logs. Todo el detalle, con fórmulas y enlaces a las páginas oficiales de precios, está en el Excel.</a:t>
+              <a:t>Resumimos las decisiones principales. Microservicios en Kubernetes para escalar por separado. Web más Electron para cubrir los tres sistemas operativos con un solo código. OpenID Connect para integrarnos con la seguridad corporativa. FHIR porque es el estándar de salud. Eventos para que la remisión sea confiable. Activo-pasivo por equilibrio entre costo y resiliencia. Y el asistente de diagnóstico siempre con supervisión humana.</a:t>
             </a:r>
           </a:p>
         </p:txBody>
@@ -1546,7 +1548,7 @@
           <a:lstStyle/>
           <a:p>
             <a:r>
-              <a:t>Con compromisos de uso a un año el costo baja a $6.669 mensuales, un 16% menos, y a tres años a $6.245. Sumamos medidas como logs más económicos, apagar desarrollo fuera de horario y autoescalado. En términos del hospital, esto equivale a unos $27 dólares por enfermera al mes.</a:t>
+              <a:t>Comparamos Azure y AWS con siete criterios ponderados. AWS gana en costo de lista, y lo reconocemos. Pero Azure gana en lo que más pesa para un hospital: integración con el sistema de seguridad corporativo, servicios de salud como FHIR, inteligencia con red privada y compatibilidad con nuestras herramientas. Por eso elegimos Azure, con 4,6 puntos frente a 4,3.</a:t>
             </a:r>
           </a:p>
         </p:txBody>
@@ -1616,7 +1618,7 @@
           <a:lstStyle/>
           <a:p>
             <a:r>
-              <a:t>Proponemos seis meses. Primero la base: redes, infraestructura como código y la integración con la seguridad corporativa. Luego las historias de usuario en dos bloques, con la asistencia al diagnóstico validada por médicos. Después pruebas de carga, seguridad, un simulacro de caída de región y un piloto con 25 enfermeras, antes de pasar a las 250.</a:t>
+              <a:t>El costo mensual estimado en Azure, a precio de lista y sin descuentos, es de unos $25,9 millones de pesos, incluyendo producción en dos regiones y un ambiente de desarrollo. En AWS serían unos $16,8 millones. Convertimos los precios oficiales en dólares con la TRM de 3.273 pesos. La mayor diferencia está en redes, por API Management, y en mensajería y logs. El detalle con fórmulas y enlaces está en el Excel.</a:t>
             </a:r>
           </a:p>
         </p:txBody>
@@ -1756,7 +1758,7 @@
           <a:lstStyle/>
           <a:p>
             <a:r>
-              <a:t>Identificamos los riesgos principales y cómo los mitigamos. El más sensible es una sugerencia de diagnóstico incorrecta: por eso las reglas son validadas por médicos, todo se audita y la decisión es siempre de la enfermera.</a:t>
+              <a:t>Con reservas a un año el costo baja a unos $21,8 millones de pesos al mes, un 16% menos, y a tres años a unos $20,4 millones. Sumamos logs más económicos, apagar desarrollo fuera de horario y autoescalado. Para el hospital equivale a unos $87.324 pesos por enfermera al mes.</a:t>
             </a:r>
           </a:p>
         </p:txBody>
@@ -1826,7 +1828,7 @@
           <a:lstStyle/>
           <a:p>
             <a:r>
-              <a:t>En conclusión: la arquitectura cubre las cuatro historias de usuario, es segura, está disponible todo el día, tiene un costo controlado y está preparada para la segunda fase con pacientes. Recomendamos aprobar el inicio de la fase de preparación.</a:t>
+              <a:t>Proponemos seis meses. Primero la base: redes, infraestructura como código y la integración con la seguridad corporativa. Luego las historias de usuario en dos bloques, con la asistencia al diagnóstico validada por médicos. Después pruebas de carga y seguridad, un simulacro de caída de región y un piloto con 25 enfermeras, antes de pasar a las 250.</a:t>
             </a:r>
           </a:p>
         </p:txBody>
@@ -1896,6 +1898,146 @@
           <a:lstStyle/>
           <a:p>
             <a:r>
+              <a:t>Identificamos los riesgos principales y cómo los mitigamos. El más sensible es una sugerencia de diagnóstico incorrecta: por eso las reglas son validadas por médicos, todo se audita y la decisión es siempre de la enfermera.</a:t>
+            </a:r>
+          </a:p>
+        </p:txBody>
+      </p:sp>
+      <p:sp>
+        <p:nvSpPr>
+          <p:cNvPr id="4" name="Slide Number Placeholder 3"/>
+          <p:cNvSpPr>
+            <a:spLocks noGrp="1"/>
+          </p:cNvSpPr>
+          <p:nvPr>
+            <p:ph type="sldNum" idx="5" sz="quarter"/>
+          </p:nvPr>
+        </p:nvSpPr>
+        <p:spPr/>
+      </p:sp>
+    </p:spTree>
+  </p:cSld>
+  <p:clrMapOvr>
+    <a:masterClrMapping/>
+  </p:clrMapOvr>
+</p:notes>
+</file>
+
+<file path=ppt/notesSlides/notesSlide23.xml><?xml version="1.0" encoding="utf-8"?>
+<p:notes xmlns:a="http://schemas.openxmlformats.org/drawingml/2006/main" xmlns:p="http://schemas.openxmlformats.org/presentationml/2006/main" xmlns:r="http://schemas.openxmlformats.org/officeDocument/2006/relationships">
+  <p:cSld>
+    <p:spTree>
+      <p:nvGrpSpPr>
+        <p:cNvPr id="1" name=""/>
+        <p:cNvGrpSpPr/>
+        <p:nvPr/>
+      </p:nvGrpSpPr>
+      <p:grpSpPr>
+        <a:xfrm>
+          <a:off x="0" y="0"/>
+          <a:ext cx="0" cy="0"/>
+          <a:chOff x="0" y="0"/>
+          <a:chExt cx="0" cy="0"/>
+        </a:xfrm>
+      </p:grpSpPr>
+      <p:sp>
+        <p:nvSpPr>
+          <p:cNvPr id="2" name="Slide Image Placeholder 1"/>
+          <p:cNvSpPr>
+            <a:spLocks noGrp="1"/>
+          </p:cNvSpPr>
+          <p:nvPr>
+            <p:ph type="sldImg" idx="2"/>
+          </p:nvPr>
+        </p:nvSpPr>
+        <p:spPr/>
+      </p:sp>
+      <p:sp>
+        <p:nvSpPr>
+          <p:cNvPr id="3" name="Notes Placeholder 2"/>
+          <p:cNvSpPr>
+            <a:spLocks noGrp="1"/>
+          </p:cNvSpPr>
+          <p:nvPr>
+            <p:ph type="body" idx="3" sz="quarter"/>
+          </p:nvPr>
+        </p:nvSpPr>
+        <p:spPr/>
+        <p:txBody>
+          <a:bodyPr/>
+          <a:lstStyle/>
+          <a:p>
+            <a:r>
+              <a:t>En conclusión: la arquitectura cubre las cuatro historias de usuario, es segura, está disponible todo el día, tiene un costo controlado y está preparada para la segunda fase con pacientes. Recomendamos aprobar el inicio de la fase de preparación.</a:t>
+            </a:r>
+          </a:p>
+        </p:txBody>
+      </p:sp>
+      <p:sp>
+        <p:nvSpPr>
+          <p:cNvPr id="4" name="Slide Number Placeholder 3"/>
+          <p:cNvSpPr>
+            <a:spLocks noGrp="1"/>
+          </p:cNvSpPr>
+          <p:nvPr>
+            <p:ph type="sldNum" idx="5" sz="quarter"/>
+          </p:nvPr>
+        </p:nvSpPr>
+        <p:spPr/>
+      </p:sp>
+    </p:spTree>
+  </p:cSld>
+  <p:clrMapOvr>
+    <a:masterClrMapping/>
+  </p:clrMapOvr>
+</p:notes>
+</file>
+
+<file path=ppt/notesSlides/notesSlide24.xml><?xml version="1.0" encoding="utf-8"?>
+<p:notes xmlns:a="http://schemas.openxmlformats.org/drawingml/2006/main" xmlns:p="http://schemas.openxmlformats.org/presentationml/2006/main" xmlns:r="http://schemas.openxmlformats.org/officeDocument/2006/relationships">
+  <p:cSld>
+    <p:spTree>
+      <p:nvGrpSpPr>
+        <p:cNvPr id="1" name=""/>
+        <p:cNvGrpSpPr/>
+        <p:nvPr/>
+      </p:nvGrpSpPr>
+      <p:grpSpPr>
+        <a:xfrm>
+          <a:off x="0" y="0"/>
+          <a:ext cx="0" cy="0"/>
+          <a:chOff x="0" y="0"/>
+          <a:chExt cx="0" cy="0"/>
+        </a:xfrm>
+      </p:grpSpPr>
+      <p:sp>
+        <p:nvSpPr>
+          <p:cNvPr id="2" name="Slide Image Placeholder 1"/>
+          <p:cNvSpPr>
+            <a:spLocks noGrp="1"/>
+          </p:cNvSpPr>
+          <p:nvPr>
+            <p:ph type="sldImg" idx="2"/>
+          </p:nvPr>
+        </p:nvSpPr>
+        <p:spPr/>
+      </p:sp>
+      <p:sp>
+        <p:nvSpPr>
+          <p:cNvPr id="3" name="Notes Placeholder 2"/>
+          <p:cNvSpPr>
+            <a:spLocks noGrp="1"/>
+          </p:cNvSpPr>
+          <p:nvPr>
+            <p:ph type="body" idx="3" sz="quarter"/>
+          </p:nvPr>
+        </p:nvSpPr>
+        <p:spPr/>
+        <p:txBody>
+          <a:bodyPr/>
+          <a:lstStyle/>
+          <a:p>
+            <a:r>
               <a:t>Muchas gracias. Quedamos atentos a sus preguntas. Tenemos los anexos con el detalle de cada diagrama y de los costos.</a:t>
             </a:r>
           </a:p>
@@ -2246,7 +2388,7 @@
           <a:lstStyle/>
           <a:p>
             <a:r>
-              <a:t>El primer nivel del modelo C4 muestra el sistema como una caja. La enfermera y la supervisora lo usan; el paciente llama a la enfermera y en la fase 2 usará la app. El sistema se integra con el sistema de seguridad corporativo, las historias clínicas, el motor de apoyo al diagnóstico, los mapas y el servicio de comunicaciones para avisar a los centros médicos.</a:t>
+              <a:t>El primer nivel del modelo C4 muestra el sistema como una caja. La enfermera y la supervisora lo usan; el paciente llama a la enfermera y en la fase 2 usará la app. El sistema se integra con la seguridad corporativa, las historias clínicas, el motor de apoyo al diagnóstico, los mapas y el servicio de comunicaciones que avisa a los centros médicos.</a:t>
             </a:r>
           </a:p>
         </p:txBody>
@@ -2316,7 +2458,7 @@
           <a:lstStyle/>
           <a:p>
             <a:r>
-              <a:t>El segundo nivel abre la caja. Tenemos la app web y la de escritorio, que llaman al API Gateway. El gateway valida el token y enruta a cinco microservicios: historia clínica, diagnóstico, centros médicos, remisión y casos. Cada uno tiene su propio almacén de datos, y la remisión se comunica por eventos para no bloquear a la enfermera si un centro tarda en responder.</a:t>
+              <a:t>El segundo nivel abre la caja. La app web y la de escritorio llaman al API Gateway, que valida el token y enruta a cinco microservicios: historia clínica, diagnóstico, centros médicos, remisión y casos. Cada uno tiene su propio almacén de datos. La remisión usa Service Bus para no bloquear a la enfermera si un centro tarda en responder.</a:t>
             </a:r>
           </a:p>
         </p:txBody>
@@ -2386,7 +2528,7 @@
           <a:lstStyle/>
           <a:p>
             <a:r>
-              <a:t>En el nivel de componentes mostramos el servicio más delicado: el asistente de diagnóstico. Primero se validan los síntomas, luego un motor de reglas clínicas detecta signos de alarma. En paralelo, los datos se anonimizan y se consulta al motor de apoyo. El agregador combina ambos resultados. Es importante: el sistema sugiere, pero la decisión clínica siempre es de la enfermera.</a:t>
+              <a:t>El servicio de historia clínica valida que quien consulta sea enfermera, obtiene los datos del repositorio FHIR, arma un resumen con alergias, medicación y diagnósticos, usa caché para responder rápido y deja registro de cada consulta.</a:t>
             </a:r>
           </a:p>
         </p:txBody>
@@ -5644,13 +5786,13 @@
           <a:p>
             <a:pPr algn="l"/>
             <a:r>
-              <a:rPr sz="1600" b="0">
+              <a:rPr sz="1800" b="0">
                 <a:solidFill>
                   <a:srgbClr val="FFFFFF"/>
                 </a:solidFill>
                 <a:latin typeface="Calibri"/>
               </a:rPr>
-              <a:t>Equipo: ____________________________________________</a:t>
+              <a:t>Equipo: Yomaira Pardo Pajaro · Sebastian Aparicio · Liris Castillo</a:t>
             </a:r>
           </a:p>
         </p:txBody>
@@ -5826,7 +5968,7 @@
                 </a:solidFill>
                 <a:latin typeface="Calibri"/>
               </a:rPr>
-              <a:t>C4 · Nivel 3: Componentes de HU01, HU03 y HU04</a:t>
+              <a:t>C4 · Nivel 3: Asistencia al Diagnóstico (HU02)</a:t>
             </a:r>
           </a:p>
         </p:txBody>
@@ -5834,6 +5976,41 @@
       <p:sp>
         <p:nvSpPr>
           <p:cNvPr id="5" name="TextBox 4"/>
+          <p:cNvSpPr txBox="1"/>
+          <p:nvPr/>
+        </p:nvSpPr>
+        <p:spPr>
+          <a:xfrm>
+            <a:off x="658368" y="987552"/>
+            <a:ext cx="10789920" cy="457200"/>
+          </a:xfrm>
+          <a:prstGeom prst="rect">
+            <a:avLst/>
+          </a:prstGeom>
+          <a:noFill/>
+        </p:spPr>
+        <p:txBody>
+          <a:bodyPr wrap="square" anchor="t" lIns="45720" rIns="45720">
+            <a:spAutoFit/>
+          </a:bodyPr>
+          <a:lstStyle/>
+          <a:p>
+            <a:pPr algn="l"/>
+            <a:r>
+              <a:rPr sz="1500" b="0">
+                <a:solidFill>
+                  <a:srgbClr val="595959"/>
+                </a:solidFill>
+                <a:latin typeface="Calibri"/>
+              </a:rPr>
+              <a:t>Reglas clínicas + motor de apoyo, siempre con supervisión de la enfermera</a:t>
+            </a:r>
+          </a:p>
+        </p:txBody>
+      </p:sp>
+      <p:sp>
+        <p:nvSpPr>
+          <p:cNvPr id="6" name="TextBox 5"/>
           <p:cNvSpPr txBox="1"/>
           <p:nvPr/>
         </p:nvSpPr>
@@ -5868,7 +6045,7 @@
       </p:sp>
       <p:sp>
         <p:nvSpPr>
-          <p:cNvPr id="6" name="TextBox 5"/>
+          <p:cNvPr id="7" name="TextBox 6"/>
           <p:cNvSpPr txBox="1"/>
           <p:nvPr/>
         </p:nvSpPr>
@@ -5901,44 +6078,9 @@
           </a:p>
         </p:txBody>
       </p:sp>
-      <p:sp>
-        <p:nvSpPr>
-          <p:cNvPr id="7" name="TextBox 6"/>
-          <p:cNvSpPr txBox="1"/>
-          <p:nvPr/>
-        </p:nvSpPr>
-        <p:spPr>
-          <a:xfrm>
-            <a:off x="365760" y="1234440"/>
-            <a:ext cx="3657600" cy="365760"/>
-          </a:xfrm>
-          <a:prstGeom prst="rect">
-            <a:avLst/>
-          </a:prstGeom>
-          <a:noFill/>
-        </p:spPr>
-        <p:txBody>
-          <a:bodyPr wrap="square" anchor="t" lIns="45720" rIns="45720">
-            <a:spAutoFit/>
-          </a:bodyPr>
-          <a:lstStyle/>
-          <a:p>
-            <a:pPr algn="ctr"/>
-            <a:r>
-              <a:rPr sz="1600" b="1">
-                <a:solidFill>
-                  <a:srgbClr val="0B3C5D"/>
-                </a:solidFill>
-                <a:latin typeface="Calibri"/>
-              </a:rPr>
-              <a:t>HU01 · Historia Clínica</a:t>
-            </a:r>
-          </a:p>
-        </p:txBody>
-      </p:sp>
       <p:pic>
         <p:nvPicPr>
-          <p:cNvPr id="8" name="Picture 7" descr="03a-componentes-historia-clinica.png"/>
+          <p:cNvPr id="8" name="Picture 7" descr="03b-componentes-diagnostico.png"/>
           <p:cNvPicPr>
             <a:picLocks noChangeAspect="1"/>
           </p:cNvPicPr>
@@ -5952,8 +6094,8 @@
         </p:blipFill>
         <p:spPr>
           <a:xfrm>
-            <a:off x="365760" y="2337785"/>
-            <a:ext cx="3657600" cy="3279710"/>
+            <a:off x="365760" y="2145049"/>
+            <a:ext cx="11430000" cy="2522181"/>
           </a:xfrm>
           <a:prstGeom prst="rect">
             <a:avLst/>
@@ -5962,122 +6104,241 @@
       </p:pic>
       <p:sp>
         <p:nvSpPr>
-          <p:cNvPr id="9" name="TextBox 8"/>
-          <p:cNvSpPr txBox="1"/>
-          <p:nvPr/>
-        </p:nvSpPr>
-        <p:spPr>
-          <a:xfrm>
-            <a:off x="4206240" y="1234440"/>
-            <a:ext cx="3657600" cy="365760"/>
-          </a:xfrm>
-          <a:prstGeom prst="rect">
-            <a:avLst/>
-          </a:prstGeom>
-          <a:noFill/>
-        </p:spPr>
-        <p:txBody>
-          <a:bodyPr wrap="square" anchor="t" lIns="45720" rIns="45720">
-            <a:spAutoFit/>
-          </a:bodyPr>
+          <p:cNvPr id="9" name="Rectangle 8"/>
+          <p:cNvSpPr/>
+          <p:nvPr/>
+        </p:nvSpPr>
+        <p:spPr>
+          <a:xfrm>
+            <a:off x="594360" y="5577840"/>
+            <a:ext cx="3596640" cy="731520"/>
+          </a:xfrm>
+          <a:prstGeom prst="rect">
+            <a:avLst/>
+          </a:prstGeom>
+          <a:solidFill>
+            <a:srgbClr val="EAF2FB"/>
+          </a:solidFill>
+          <a:ln>
+            <a:noFill/>
+          </a:ln>
+          <a:effectLst/>
+        </p:spPr>
+        <p:style>
+          <a:lnRef idx="1">
+            <a:schemeClr val="accent1"/>
+          </a:lnRef>
+          <a:fillRef idx="3">
+            <a:schemeClr val="accent1"/>
+          </a:fillRef>
+          <a:effectRef idx="2">
+            <a:schemeClr val="accent1"/>
+          </a:effectRef>
+          <a:fontRef idx="minor">
+            <a:schemeClr val="lt1"/>
+          </a:fontRef>
+        </p:style>
+        <p:txBody>
+          <a:bodyPr rtlCol="0" anchor="ctr"/>
           <a:lstStyle/>
           <a:p>
             <a:pPr algn="ctr"/>
-            <a:r>
-              <a:rPr sz="1600" b="1">
+          </a:p>
+        </p:txBody>
+      </p:sp>
+      <p:sp>
+        <p:nvSpPr>
+          <p:cNvPr id="10" name="TextBox 9"/>
+          <p:cNvSpPr txBox="1"/>
+          <p:nvPr/>
+        </p:nvSpPr>
+        <p:spPr>
+          <a:xfrm>
+            <a:off x="685800" y="5577840"/>
+            <a:ext cx="3413760" cy="731520"/>
+          </a:xfrm>
+          <a:prstGeom prst="rect">
+            <a:avLst/>
+          </a:prstGeom>
+          <a:noFill/>
+        </p:spPr>
+        <p:txBody>
+          <a:bodyPr wrap="square" anchor="ctr" lIns="45720" rIns="45720">
+            <a:spAutoFit/>
+          </a:bodyPr>
+          <a:lstStyle/>
+          <a:p>
+            <a:pPr algn="ctr"/>
+            <a:r>
+              <a:rPr sz="1500" b="1">
                 <a:solidFill>
                   <a:srgbClr val="0B3C5D"/>
                 </a:solidFill>
                 <a:latin typeface="Calibri"/>
               </a:rPr>
-              <a:t>HU03 · Centros Médicos</a:t>
-            </a:r>
-          </a:p>
-        </p:txBody>
-      </p:sp>
-      <p:pic>
-        <p:nvPicPr>
-          <p:cNvPr id="10" name="Picture 9" descr="03c-componentes-centros-medicos.png"/>
-          <p:cNvPicPr>
-            <a:picLocks noChangeAspect="1"/>
-          </p:cNvPicPr>
-          <p:nvPr/>
-        </p:nvPicPr>
-        <p:blipFill>
-          <a:blip r:embed="rId3"/>
-          <a:stretch>
-            <a:fillRect/>
-          </a:stretch>
-        </p:blipFill>
-        <p:spPr>
-          <a:xfrm>
-            <a:off x="4206240" y="2377440"/>
-            <a:ext cx="3657600" cy="3200400"/>
-          </a:xfrm>
-          <a:prstGeom prst="rect">
-            <a:avLst/>
-          </a:prstGeom>
-        </p:spPr>
-      </p:pic>
-      <p:sp>
-        <p:nvSpPr>
-          <p:cNvPr id="11" name="TextBox 10"/>
-          <p:cNvSpPr txBox="1"/>
-          <p:nvPr/>
-        </p:nvSpPr>
-        <p:spPr>
-          <a:xfrm>
-            <a:off x="8046720" y="1234440"/>
-            <a:ext cx="3657600" cy="365760"/>
-          </a:xfrm>
-          <a:prstGeom prst="rect">
-            <a:avLst/>
-          </a:prstGeom>
-          <a:noFill/>
-        </p:spPr>
-        <p:txBody>
-          <a:bodyPr wrap="square" anchor="t" lIns="45720" rIns="45720">
-            <a:spAutoFit/>
-          </a:bodyPr>
+              <a:t>Reglas detectan signos de alarma</a:t>
+            </a:r>
+          </a:p>
+        </p:txBody>
+      </p:sp>
+      <p:sp>
+        <p:nvSpPr>
+          <p:cNvPr id="11" name="Rectangle 10"/>
+          <p:cNvSpPr/>
+          <p:nvPr/>
+        </p:nvSpPr>
+        <p:spPr>
+          <a:xfrm>
+            <a:off x="4282440" y="5577840"/>
+            <a:ext cx="3596640" cy="731520"/>
+          </a:xfrm>
+          <a:prstGeom prst="rect">
+            <a:avLst/>
+          </a:prstGeom>
+          <a:solidFill>
+            <a:srgbClr val="EAF2FB"/>
+          </a:solidFill>
+          <a:ln>
+            <a:noFill/>
+          </a:ln>
+          <a:effectLst/>
+        </p:spPr>
+        <p:style>
+          <a:lnRef idx="1">
+            <a:schemeClr val="accent1"/>
+          </a:lnRef>
+          <a:fillRef idx="3">
+            <a:schemeClr val="accent1"/>
+          </a:fillRef>
+          <a:effectRef idx="2">
+            <a:schemeClr val="accent1"/>
+          </a:effectRef>
+          <a:fontRef idx="minor">
+            <a:schemeClr val="lt1"/>
+          </a:fontRef>
+        </p:style>
+        <p:txBody>
+          <a:bodyPr rtlCol="0" anchor="ctr"/>
           <a:lstStyle/>
           <a:p>
             <a:pPr algn="ctr"/>
-            <a:r>
-              <a:rPr sz="1600" b="1">
+          </a:p>
+        </p:txBody>
+      </p:sp>
+      <p:sp>
+        <p:nvSpPr>
+          <p:cNvPr id="12" name="TextBox 11"/>
+          <p:cNvSpPr txBox="1"/>
+          <p:nvPr/>
+        </p:nvSpPr>
+        <p:spPr>
+          <a:xfrm>
+            <a:off x="4373880" y="5577840"/>
+            <a:ext cx="3413760" cy="731520"/>
+          </a:xfrm>
+          <a:prstGeom prst="rect">
+            <a:avLst/>
+          </a:prstGeom>
+          <a:noFill/>
+        </p:spPr>
+        <p:txBody>
+          <a:bodyPr wrap="square" anchor="ctr" lIns="45720" rIns="45720">
+            <a:spAutoFit/>
+          </a:bodyPr>
+          <a:lstStyle/>
+          <a:p>
+            <a:pPr algn="ctr"/>
+            <a:r>
+              <a:rPr sz="1500" b="1">
                 <a:solidFill>
                   <a:srgbClr val="0B3C5D"/>
                 </a:solidFill>
                 <a:latin typeface="Calibri"/>
               </a:rPr>
-              <a:t>HU04 · Remisión y Notificación</a:t>
-            </a:r>
-          </a:p>
-        </p:txBody>
-      </p:sp>
-      <p:pic>
-        <p:nvPicPr>
-          <p:cNvPr id="12" name="Picture 11" descr="03d-componentes-remision.png"/>
-          <p:cNvPicPr>
-            <a:picLocks noChangeAspect="1"/>
-          </p:cNvPicPr>
-          <p:nvPr/>
-        </p:nvPicPr>
-        <p:blipFill>
-          <a:blip r:embed="rId4"/>
-          <a:stretch>
-            <a:fillRect/>
-          </a:stretch>
-        </p:blipFill>
-        <p:spPr>
-          <a:xfrm>
-            <a:off x="8046720" y="2011213"/>
-            <a:ext cx="3657600" cy="3932853"/>
-          </a:xfrm>
-          <a:prstGeom prst="rect">
-            <a:avLst/>
-          </a:prstGeom>
-        </p:spPr>
-      </p:pic>
+              <a:t>Datos anonimizados</a:t>
+            </a:r>
+          </a:p>
+        </p:txBody>
+      </p:sp>
+      <p:sp>
+        <p:nvSpPr>
+          <p:cNvPr id="13" name="Rectangle 12"/>
+          <p:cNvSpPr/>
+          <p:nvPr/>
+        </p:nvSpPr>
+        <p:spPr>
+          <a:xfrm>
+            <a:off x="7970519" y="5577840"/>
+            <a:ext cx="3596640" cy="731520"/>
+          </a:xfrm>
+          <a:prstGeom prst="rect">
+            <a:avLst/>
+          </a:prstGeom>
+          <a:solidFill>
+            <a:srgbClr val="EAF2FB"/>
+          </a:solidFill>
+          <a:ln>
+            <a:noFill/>
+          </a:ln>
+          <a:effectLst/>
+        </p:spPr>
+        <p:style>
+          <a:lnRef idx="1">
+            <a:schemeClr val="accent1"/>
+          </a:lnRef>
+          <a:fillRef idx="3">
+            <a:schemeClr val="accent1"/>
+          </a:fillRef>
+          <a:effectRef idx="2">
+            <a:schemeClr val="accent1"/>
+          </a:effectRef>
+          <a:fontRef idx="minor">
+            <a:schemeClr val="lt1"/>
+          </a:fontRef>
+        </p:style>
+        <p:txBody>
+          <a:bodyPr rtlCol="0" anchor="ctr"/>
+          <a:lstStyle/>
+          <a:p>
+            <a:pPr algn="ctr"/>
+          </a:p>
+        </p:txBody>
+      </p:sp>
+      <p:sp>
+        <p:nvSpPr>
+          <p:cNvPr id="14" name="TextBox 13"/>
+          <p:cNvSpPr txBox="1"/>
+          <p:nvPr/>
+        </p:nvSpPr>
+        <p:spPr>
+          <a:xfrm>
+            <a:off x="8061959" y="5577840"/>
+            <a:ext cx="3413760" cy="731520"/>
+          </a:xfrm>
+          <a:prstGeom prst="rect">
+            <a:avLst/>
+          </a:prstGeom>
+          <a:noFill/>
+        </p:spPr>
+        <p:txBody>
+          <a:bodyPr wrap="square" anchor="ctr" lIns="45720" rIns="45720">
+            <a:spAutoFit/>
+          </a:bodyPr>
+          <a:lstStyle/>
+          <a:p>
+            <a:pPr algn="ctr"/>
+            <a:r>
+              <a:rPr sz="1500" b="1">
+                <a:solidFill>
+                  <a:srgbClr val="0B3C5D"/>
+                </a:solidFill>
+                <a:latin typeface="Calibri"/>
+              </a:rPr>
+              <a:t>La enfermera decide</a:t>
+            </a:r>
+          </a:p>
+        </p:txBody>
+      </p:sp>
     </p:spTree>
   </p:cSld>
   <p:clrMapOvr>
@@ -6214,7 +6475,7 @@
                 </a:solidFill>
                 <a:latin typeface="Calibri"/>
               </a:rPr>
-              <a:t>Flujo de una atención</a:t>
+              <a:t>C4 · Nivel 3: Centros Médicos (HU03)</a:t>
             </a:r>
           </a:p>
         </p:txBody>
@@ -6249,7 +6510,7 @@
                 </a:solidFill>
                 <a:latin typeface="Calibri"/>
               </a:rPr>
-              <a:t>De la llamada a la remisión, paso a paso</a:t>
+              <a:t>Encontrar el centro más cercano al paciente</a:t>
             </a:r>
           </a:p>
         </p:txBody>
@@ -6326,7 +6587,7 @@
       </p:sp>
       <p:pic>
         <p:nvPicPr>
-          <p:cNvPr id="8" name="Picture 7" descr="06-secuencia-atencion.png"/>
+          <p:cNvPr id="8" name="Picture 7" descr="03c-componentes-centros-medicos.png"/>
           <p:cNvPicPr>
             <a:picLocks noChangeAspect="1"/>
           </p:cNvPicPr>
@@ -6340,14 +6601,251 @@
         </p:blipFill>
         <p:spPr>
           <a:xfrm>
-            <a:off x="1463790" y="1371600"/>
-            <a:ext cx="9233940" cy="5029200"/>
+            <a:off x="868082" y="1371600"/>
+            <a:ext cx="10425355" cy="4069080"/>
           </a:xfrm>
           <a:prstGeom prst="rect">
             <a:avLst/>
           </a:prstGeom>
         </p:spPr>
       </p:pic>
+      <p:sp>
+        <p:nvSpPr>
+          <p:cNvPr id="9" name="Rectangle 8"/>
+          <p:cNvSpPr/>
+          <p:nvPr/>
+        </p:nvSpPr>
+        <p:spPr>
+          <a:xfrm>
+            <a:off x="594360" y="5577840"/>
+            <a:ext cx="3596640" cy="731520"/>
+          </a:xfrm>
+          <a:prstGeom prst="rect">
+            <a:avLst/>
+          </a:prstGeom>
+          <a:solidFill>
+            <a:srgbClr val="EAF2FB"/>
+          </a:solidFill>
+          <a:ln>
+            <a:noFill/>
+          </a:ln>
+          <a:effectLst/>
+        </p:spPr>
+        <p:style>
+          <a:lnRef idx="1">
+            <a:schemeClr val="accent1"/>
+          </a:lnRef>
+          <a:fillRef idx="3">
+            <a:schemeClr val="accent1"/>
+          </a:fillRef>
+          <a:effectRef idx="2">
+            <a:schemeClr val="accent1"/>
+          </a:effectRef>
+          <a:fontRef idx="minor">
+            <a:schemeClr val="lt1"/>
+          </a:fontRef>
+        </p:style>
+        <p:txBody>
+          <a:bodyPr rtlCol="0" anchor="ctr"/>
+          <a:lstStyle/>
+          <a:p>
+            <a:pPr algn="ctr"/>
+          </a:p>
+        </p:txBody>
+      </p:sp>
+      <p:sp>
+        <p:nvSpPr>
+          <p:cNvPr id="10" name="TextBox 9"/>
+          <p:cNvSpPr txBox="1"/>
+          <p:nvPr/>
+        </p:nvSpPr>
+        <p:spPr>
+          <a:xfrm>
+            <a:off x="685800" y="5577840"/>
+            <a:ext cx="3413760" cy="731520"/>
+          </a:xfrm>
+          <a:prstGeom prst="rect">
+            <a:avLst/>
+          </a:prstGeom>
+          <a:noFill/>
+        </p:spPr>
+        <p:txBody>
+          <a:bodyPr wrap="square" anchor="ctr" lIns="45720" rIns="45720">
+            <a:spAutoFit/>
+          </a:bodyPr>
+          <a:lstStyle/>
+          <a:p>
+            <a:pPr algn="ctr"/>
+            <a:r>
+              <a:rPr sz="1500" b="1">
+                <a:solidFill>
+                  <a:srgbClr val="0B3C5D"/>
+                </a:solidFill>
+                <a:latin typeface="Calibri"/>
+              </a:rPr>
+              <a:t>Dirección a coordenadas</a:t>
+            </a:r>
+          </a:p>
+        </p:txBody>
+      </p:sp>
+      <p:sp>
+        <p:nvSpPr>
+          <p:cNvPr id="11" name="Rectangle 10"/>
+          <p:cNvSpPr/>
+          <p:nvPr/>
+        </p:nvSpPr>
+        <p:spPr>
+          <a:xfrm>
+            <a:off x="4282440" y="5577840"/>
+            <a:ext cx="3596640" cy="731520"/>
+          </a:xfrm>
+          <a:prstGeom prst="rect">
+            <a:avLst/>
+          </a:prstGeom>
+          <a:solidFill>
+            <a:srgbClr val="EAF2FB"/>
+          </a:solidFill>
+          <a:ln>
+            <a:noFill/>
+          </a:ln>
+          <a:effectLst/>
+        </p:spPr>
+        <p:style>
+          <a:lnRef idx="1">
+            <a:schemeClr val="accent1"/>
+          </a:lnRef>
+          <a:fillRef idx="3">
+            <a:schemeClr val="accent1"/>
+          </a:fillRef>
+          <a:effectRef idx="2">
+            <a:schemeClr val="accent1"/>
+          </a:effectRef>
+          <a:fontRef idx="minor">
+            <a:schemeClr val="lt1"/>
+          </a:fontRef>
+        </p:style>
+        <p:txBody>
+          <a:bodyPr rtlCol="0" anchor="ctr"/>
+          <a:lstStyle/>
+          <a:p>
+            <a:pPr algn="ctr"/>
+          </a:p>
+        </p:txBody>
+      </p:sp>
+      <p:sp>
+        <p:nvSpPr>
+          <p:cNvPr id="12" name="TextBox 11"/>
+          <p:cNvSpPr txBox="1"/>
+          <p:nvPr/>
+        </p:nvSpPr>
+        <p:spPr>
+          <a:xfrm>
+            <a:off x="4373880" y="5577840"/>
+            <a:ext cx="3413760" cy="731520"/>
+          </a:xfrm>
+          <a:prstGeom prst="rect">
+            <a:avLst/>
+          </a:prstGeom>
+          <a:noFill/>
+        </p:spPr>
+        <p:txBody>
+          <a:bodyPr wrap="square" anchor="ctr" lIns="45720" rIns="45720">
+            <a:spAutoFit/>
+          </a:bodyPr>
+          <a:lstStyle/>
+          <a:p>
+            <a:pPr algn="ctr"/>
+            <a:r>
+              <a:rPr sz="1500" b="1">
+                <a:solidFill>
+                  <a:srgbClr val="0B3C5D"/>
+                </a:solidFill>
+                <a:latin typeface="Calibri"/>
+              </a:rPr>
+              <a:t>Centros en un radio (PostGIS)</a:t>
+            </a:r>
+          </a:p>
+        </p:txBody>
+      </p:sp>
+      <p:sp>
+        <p:nvSpPr>
+          <p:cNvPr id="13" name="Rectangle 12"/>
+          <p:cNvSpPr/>
+          <p:nvPr/>
+        </p:nvSpPr>
+        <p:spPr>
+          <a:xfrm>
+            <a:off x="7970519" y="5577840"/>
+            <a:ext cx="3596640" cy="731520"/>
+          </a:xfrm>
+          <a:prstGeom prst="rect">
+            <a:avLst/>
+          </a:prstGeom>
+          <a:solidFill>
+            <a:srgbClr val="EAF2FB"/>
+          </a:solidFill>
+          <a:ln>
+            <a:noFill/>
+          </a:ln>
+          <a:effectLst/>
+        </p:spPr>
+        <p:style>
+          <a:lnRef idx="1">
+            <a:schemeClr val="accent1"/>
+          </a:lnRef>
+          <a:fillRef idx="3">
+            <a:schemeClr val="accent1"/>
+          </a:fillRef>
+          <a:effectRef idx="2">
+            <a:schemeClr val="accent1"/>
+          </a:effectRef>
+          <a:fontRef idx="minor">
+            <a:schemeClr val="lt1"/>
+          </a:fontRef>
+        </p:style>
+        <p:txBody>
+          <a:bodyPr rtlCol="0" anchor="ctr"/>
+          <a:lstStyle/>
+          <a:p>
+            <a:pPr algn="ctr"/>
+          </a:p>
+        </p:txBody>
+      </p:sp>
+      <p:sp>
+        <p:nvSpPr>
+          <p:cNvPr id="14" name="TextBox 13"/>
+          <p:cNvSpPr txBox="1"/>
+          <p:nvPr/>
+        </p:nvSpPr>
+        <p:spPr>
+          <a:xfrm>
+            <a:off x="8061959" y="5577840"/>
+            <a:ext cx="3413760" cy="731520"/>
+          </a:xfrm>
+          <a:prstGeom prst="rect">
+            <a:avLst/>
+          </a:prstGeom>
+          <a:noFill/>
+        </p:spPr>
+        <p:txBody>
+          <a:bodyPr wrap="square" anchor="ctr" lIns="45720" rIns="45720">
+            <a:spAutoFit/>
+          </a:bodyPr>
+          <a:lstStyle/>
+          <a:p>
+            <a:pPr algn="ctr"/>
+            <a:r>
+              <a:rPr sz="1500" b="1">
+                <a:solidFill>
+                  <a:srgbClr val="0B3C5D"/>
+                </a:solidFill>
+                <a:latin typeface="Calibri"/>
+              </a:rPr>
+              <a:t>Ordenados por tiempo de llegada</a:t>
+            </a:r>
+          </a:p>
+        </p:txBody>
+      </p:sp>
     </p:spTree>
   </p:cSld>
   <p:clrMapOvr>
@@ -6484,7 +6982,7 @@
                 </a:solidFill>
                 <a:latin typeface="Calibri"/>
               </a:rPr>
-              <a:t>Arquitectura en la nube · Microsoft Azure</a:t>
+              <a:t>C4 · Nivel 3: Remisión y Notificación (HU04)</a:t>
             </a:r>
           </a:p>
         </p:txBody>
@@ -6519,7 +7017,7 @@
                 </a:solidFill>
                 <a:latin typeface="Calibri"/>
               </a:rPr>
-              <a:t>Activo/pasivo en dos regiones con tres zonas de disponibilidad</a:t>
+              <a:t>Avisar al centro médico que el paciente va en camino</a:t>
             </a:r>
           </a:p>
         </p:txBody>
@@ -6596,7 +7094,7 @@
       </p:sp>
       <p:pic>
         <p:nvPicPr>
-          <p:cNvPr id="8" name="Picture 7" descr="05-nube-azure.png"/>
+          <p:cNvPr id="8" name="Picture 7" descr="03d-componentes-remision.png"/>
           <p:cNvPicPr>
             <a:picLocks noChangeAspect="1"/>
           </p:cNvPicPr>
@@ -6610,8 +7108,8 @@
         </p:blipFill>
         <p:spPr>
           <a:xfrm>
-            <a:off x="1295139" y="1325880"/>
-            <a:ext cx="4907801" cy="5120640"/>
+            <a:off x="561454" y="1371600"/>
+            <a:ext cx="11038611" cy="4069080"/>
           </a:xfrm>
           <a:prstGeom prst="rect">
             <a:avLst/>
@@ -6620,198 +7118,237 @@
       </p:pic>
       <p:sp>
         <p:nvSpPr>
-          <p:cNvPr id="9" name="TextBox 8"/>
-          <p:cNvSpPr txBox="1"/>
-          <p:nvPr/>
-        </p:nvSpPr>
-        <p:spPr>
-          <a:xfrm>
-            <a:off x="7315200" y="1554480"/>
-            <a:ext cx="4572000" cy="4846320"/>
-          </a:xfrm>
-          <a:prstGeom prst="rect">
-            <a:avLst/>
-          </a:prstGeom>
-          <a:noFill/>
-        </p:spPr>
-        <p:txBody>
-          <a:bodyPr wrap="square">
-            <a:spAutoFit/>
-          </a:bodyPr>
-          <a:lstStyle/>
-          <a:p>
-            <a:pPr>
-              <a:spcAft>
-                <a:spcPts val="600"/>
-              </a:spcAft>
-            </a:pPr>
-            <a:r>
-              <a:rPr b="1" sz="1500">
+          <p:cNvPr id="9" name="Rectangle 8"/>
+          <p:cNvSpPr/>
+          <p:nvPr/>
+        </p:nvSpPr>
+        <p:spPr>
+          <a:xfrm>
+            <a:off x="594360" y="5577840"/>
+            <a:ext cx="3596640" cy="731520"/>
+          </a:xfrm>
+          <a:prstGeom prst="rect">
+            <a:avLst/>
+          </a:prstGeom>
+          <a:solidFill>
+            <a:srgbClr val="EAF2FB"/>
+          </a:solidFill>
+          <a:ln>
+            <a:noFill/>
+          </a:ln>
+          <a:effectLst/>
+        </p:spPr>
+        <p:style>
+          <a:lnRef idx="1">
+            <a:schemeClr val="accent1"/>
+          </a:lnRef>
+          <a:fillRef idx="3">
+            <a:schemeClr val="accent1"/>
+          </a:fillRef>
+          <a:effectRef idx="2">
+            <a:schemeClr val="accent1"/>
+          </a:effectRef>
+          <a:fontRef idx="minor">
+            <a:schemeClr val="lt1"/>
+          </a:fontRef>
+        </p:style>
+        <p:txBody>
+          <a:bodyPr rtlCol="0" anchor="ctr"/>
+          <a:lstStyle/>
+          <a:p>
+            <a:pPr algn="ctr"/>
+          </a:p>
+        </p:txBody>
+      </p:sp>
+      <p:sp>
+        <p:nvSpPr>
+          <p:cNvPr id="10" name="TextBox 9"/>
+          <p:cNvSpPr txBox="1"/>
+          <p:nvPr/>
+        </p:nvSpPr>
+        <p:spPr>
+          <a:xfrm>
+            <a:off x="685800" y="5577840"/>
+            <a:ext cx="3413760" cy="731520"/>
+          </a:xfrm>
+          <a:prstGeom prst="rect">
+            <a:avLst/>
+          </a:prstGeom>
+          <a:noFill/>
+        </p:spPr>
+        <p:txBody>
+          <a:bodyPr wrap="square" anchor="ctr" lIns="45720" rIns="45720">
+            <a:spAutoFit/>
+          </a:bodyPr>
+          <a:lstStyle/>
+          <a:p>
+            <a:pPr algn="ctr"/>
+            <a:r>
+              <a:rPr sz="1500" b="1">
                 <a:solidFill>
                   <a:srgbClr val="0B3C5D"/>
                 </a:solidFill>
                 <a:latin typeface="Calibri"/>
               </a:rPr>
-              <a:t>▸ Front Door + WAF: </a:t>
-            </a:r>
-            <a:r>
-              <a:rPr sz="1500">
-                <a:solidFill>
-                  <a:srgbClr val="262626"/>
-                </a:solidFill>
-                <a:latin typeface="Calibri"/>
-              </a:rPr>
-              <a:t>entrada global y failover</a:t>
-            </a:r>
-          </a:p>
-          <a:p>
-            <a:pPr>
-              <a:spcAft>
-                <a:spcPts val="600"/>
-              </a:spcAft>
-            </a:pPr>
-            <a:r>
-              <a:rPr b="1" sz="1500">
+              <a:t>Registra la remisión</a:t>
+            </a:r>
+          </a:p>
+        </p:txBody>
+      </p:sp>
+      <p:sp>
+        <p:nvSpPr>
+          <p:cNvPr id="11" name="Rectangle 10"/>
+          <p:cNvSpPr/>
+          <p:nvPr/>
+        </p:nvSpPr>
+        <p:spPr>
+          <a:xfrm>
+            <a:off x="4282440" y="5577840"/>
+            <a:ext cx="3596640" cy="731520"/>
+          </a:xfrm>
+          <a:prstGeom prst="rect">
+            <a:avLst/>
+          </a:prstGeom>
+          <a:solidFill>
+            <a:srgbClr val="EAF2FB"/>
+          </a:solidFill>
+          <a:ln>
+            <a:noFill/>
+          </a:ln>
+          <a:effectLst/>
+        </p:spPr>
+        <p:style>
+          <a:lnRef idx="1">
+            <a:schemeClr val="accent1"/>
+          </a:lnRef>
+          <a:fillRef idx="3">
+            <a:schemeClr val="accent1"/>
+          </a:fillRef>
+          <a:effectRef idx="2">
+            <a:schemeClr val="accent1"/>
+          </a:effectRef>
+          <a:fontRef idx="minor">
+            <a:schemeClr val="lt1"/>
+          </a:fontRef>
+        </p:style>
+        <p:txBody>
+          <a:bodyPr rtlCol="0" anchor="ctr"/>
+          <a:lstStyle/>
+          <a:p>
+            <a:pPr algn="ctr"/>
+          </a:p>
+        </p:txBody>
+      </p:sp>
+      <p:sp>
+        <p:nvSpPr>
+          <p:cNvPr id="12" name="TextBox 11"/>
+          <p:cNvSpPr txBox="1"/>
+          <p:nvPr/>
+        </p:nvSpPr>
+        <p:spPr>
+          <a:xfrm>
+            <a:off x="4373880" y="5577840"/>
+            <a:ext cx="3413760" cy="731520"/>
+          </a:xfrm>
+          <a:prstGeom prst="rect">
+            <a:avLst/>
+          </a:prstGeom>
+          <a:noFill/>
+        </p:spPr>
+        <p:txBody>
+          <a:bodyPr wrap="square" anchor="ctr" lIns="45720" rIns="45720">
+            <a:spAutoFit/>
+          </a:bodyPr>
+          <a:lstStyle/>
+          <a:p>
+            <a:pPr algn="ctr"/>
+            <a:r>
+              <a:rPr sz="1500" b="1">
                 <a:solidFill>
                   <a:srgbClr val="0B3C5D"/>
                 </a:solidFill>
                 <a:latin typeface="Calibri"/>
               </a:rPr>
-              <a:t>▸ East US 2: </a:t>
-            </a:r>
-            <a:r>
-              <a:rPr sz="1500">
-                <a:solidFill>
-                  <a:srgbClr val="262626"/>
-                </a:solidFill>
-                <a:latin typeface="Calibri"/>
-              </a:rPr>
-              <a:t>región activa, 3 zonas</a:t>
-            </a:r>
-          </a:p>
-          <a:p>
-            <a:pPr>
-              <a:spcAft>
-                <a:spcPts val="600"/>
-              </a:spcAft>
-            </a:pPr>
-            <a:r>
-              <a:rPr b="1" sz="1500">
+              <a:t>Evento en Service Bus</a:t>
+            </a:r>
+          </a:p>
+        </p:txBody>
+      </p:sp>
+      <p:sp>
+        <p:nvSpPr>
+          <p:cNvPr id="13" name="Rectangle 12"/>
+          <p:cNvSpPr/>
+          <p:nvPr/>
+        </p:nvSpPr>
+        <p:spPr>
+          <a:xfrm>
+            <a:off x="7970519" y="5577840"/>
+            <a:ext cx="3596640" cy="731520"/>
+          </a:xfrm>
+          <a:prstGeom prst="rect">
+            <a:avLst/>
+          </a:prstGeom>
+          <a:solidFill>
+            <a:srgbClr val="EAF2FB"/>
+          </a:solidFill>
+          <a:ln>
+            <a:noFill/>
+          </a:ln>
+          <a:effectLst/>
+        </p:spPr>
+        <p:style>
+          <a:lnRef idx="1">
+            <a:schemeClr val="accent1"/>
+          </a:lnRef>
+          <a:fillRef idx="3">
+            <a:schemeClr val="accent1"/>
+          </a:fillRef>
+          <a:effectRef idx="2">
+            <a:schemeClr val="accent1"/>
+          </a:effectRef>
+          <a:fontRef idx="minor">
+            <a:schemeClr val="lt1"/>
+          </a:fontRef>
+        </p:style>
+        <p:txBody>
+          <a:bodyPr rtlCol="0" anchor="ctr"/>
+          <a:lstStyle/>
+          <a:p>
+            <a:pPr algn="ctr"/>
+          </a:p>
+        </p:txBody>
+      </p:sp>
+      <p:sp>
+        <p:nvSpPr>
+          <p:cNvPr id="14" name="TextBox 13"/>
+          <p:cNvSpPr txBox="1"/>
+          <p:nvPr/>
+        </p:nvSpPr>
+        <p:spPr>
+          <a:xfrm>
+            <a:off x="8061959" y="5577840"/>
+            <a:ext cx="3413760" cy="731520"/>
+          </a:xfrm>
+          <a:prstGeom prst="rect">
+            <a:avLst/>
+          </a:prstGeom>
+          <a:noFill/>
+        </p:spPr>
+        <p:txBody>
+          <a:bodyPr wrap="square" anchor="ctr" lIns="45720" rIns="45720">
+            <a:spAutoFit/>
+          </a:bodyPr>
+          <a:lstStyle/>
+          <a:p>
+            <a:pPr algn="ctr"/>
+            <a:r>
+              <a:rPr sz="1500" b="1">
                 <a:solidFill>
                   <a:srgbClr val="0B3C5D"/>
                 </a:solidFill>
                 <a:latin typeface="Calibri"/>
               </a:rPr>
-              <a:t>▸ Central US: </a:t>
-            </a:r>
-            <a:r>
-              <a:rPr sz="1500">
-                <a:solidFill>
-                  <a:srgbClr val="262626"/>
-                </a:solidFill>
-                <a:latin typeface="Calibri"/>
-              </a:rPr>
-              <a:t>región de recuperación</a:t>
-            </a:r>
-          </a:p>
-          <a:p>
-            <a:pPr>
-              <a:spcAft>
-                <a:spcPts val="600"/>
-              </a:spcAft>
-            </a:pPr>
-            <a:r>
-              <a:rPr b="1" sz="1500">
-                <a:solidFill>
-                  <a:srgbClr val="0B3C5D"/>
-                </a:solidFill>
-                <a:latin typeface="Calibri"/>
-              </a:rPr>
-              <a:t>▸ AKS: </a:t>
-            </a:r>
-            <a:r>
-              <a:rPr sz="1500">
-                <a:solidFill>
-                  <a:srgbClr val="262626"/>
-                </a:solidFill>
-                <a:latin typeface="Calibri"/>
-              </a:rPr>
-              <a:t>3 a 12 nodos con autoescalado</a:t>
-            </a:r>
-          </a:p>
-          <a:p>
-            <a:pPr>
-              <a:spcAft>
-                <a:spcPts val="600"/>
-              </a:spcAft>
-            </a:pPr>
-            <a:r>
-              <a:rPr b="1" sz="1500">
-                <a:solidFill>
-                  <a:srgbClr val="0B3C5D"/>
-                </a:solidFill>
-                <a:latin typeface="Calibri"/>
-              </a:rPr>
-              <a:t>▸ PostgreSQL: </a:t>
-            </a:r>
-            <a:r>
-              <a:rPr sz="1500">
-                <a:solidFill>
-                  <a:srgbClr val="262626"/>
-                </a:solidFill>
-                <a:latin typeface="Calibri"/>
-              </a:rPr>
-              <a:t>HA zona-redundante + réplica geo</a:t>
-            </a:r>
-          </a:p>
-          <a:p>
-            <a:pPr>
-              <a:spcAft>
-                <a:spcPts val="600"/>
-              </a:spcAft>
-            </a:pPr>
-            <a:r>
-              <a:rPr b="1" sz="1500">
-                <a:solidFill>
-                  <a:srgbClr val="0B3C5D"/>
-                </a:solidFill>
-                <a:latin typeface="Calibri"/>
-              </a:rPr>
-              <a:t>▸ Private Endpoints: </a:t>
-            </a:r>
-            <a:r>
-              <a:rPr sz="1500">
-                <a:solidFill>
-                  <a:srgbClr val="262626"/>
-                </a:solidFill>
-                <a:latin typeface="Calibri"/>
-              </a:rPr>
-              <a:t>datos fuera de internet</a:t>
-            </a:r>
-          </a:p>
-          <a:p>
-            <a:pPr>
-              <a:spcAft>
-                <a:spcPts val="600"/>
-              </a:spcAft>
-            </a:pPr>
-            <a:r>
-              <a:rPr b="1" sz="1500">
-                <a:solidFill>
-                  <a:srgbClr val="0B3C5D"/>
-                </a:solidFill>
-                <a:latin typeface="Calibri"/>
-              </a:rPr>
-              <a:t>▸ Azure Monitor: </a:t>
-            </a:r>
-            <a:r>
-              <a:rPr sz="1500">
-                <a:solidFill>
-                  <a:srgbClr val="262626"/>
-                </a:solidFill>
-                <a:latin typeface="Calibri"/>
-              </a:rPr>
-              <a:t>logs, métricas y alertas</a:t>
+              <a:t>Aviso por voz, SMS o correo</a:t>
             </a:r>
           </a:p>
         </p:txBody>
@@ -6952,7 +7489,7 @@
                 </a:solidFill>
                 <a:latin typeface="Calibri"/>
               </a:rPr>
-              <a:t>Seguridad</a:t>
+              <a:t>Flujo de una atención</a:t>
             </a:r>
           </a:p>
         </p:txBody>
@@ -6987,7 +7524,7 @@
                 </a:solidFill>
                 <a:latin typeface="Calibri"/>
               </a:rPr>
-              <a:t>Autenticación centralizada y protección de datos clínicos</a:t>
+              <a:t>De la llamada a la remisión en 7 pasos</a:t>
             </a:r>
           </a:p>
         </p:txBody>
@@ -7071,7 +7608,121 @@
         <p:spPr>
           <a:xfrm>
             <a:off x="548640" y="1600200"/>
-            <a:ext cx="1874519" cy="1051560"/>
+            <a:ext cx="2423160" cy="1325880"/>
+          </a:xfrm>
+          <a:prstGeom prst="roundRect">
+            <a:avLst/>
+          </a:prstGeom>
+          <a:solidFill>
+            <a:srgbClr val="0B3C5D"/>
+          </a:solidFill>
+          <a:ln>
+            <a:noFill/>
+          </a:ln>
+          <a:effectLst/>
+        </p:spPr>
+        <p:style>
+          <a:lnRef idx="1">
+            <a:schemeClr val="accent1"/>
+          </a:lnRef>
+          <a:fillRef idx="3">
+            <a:schemeClr val="accent1"/>
+          </a:fillRef>
+          <a:effectRef idx="2">
+            <a:schemeClr val="accent1"/>
+          </a:effectRef>
+          <a:fontRef idx="minor">
+            <a:schemeClr val="lt1"/>
+          </a:fontRef>
+        </p:style>
+        <p:txBody>
+          <a:bodyPr rtlCol="0" anchor="ctr"/>
+          <a:lstStyle/>
+          <a:p>
+            <a:pPr algn="ctr"/>
+          </a:p>
+        </p:txBody>
+      </p:sp>
+      <p:sp>
+        <p:nvSpPr>
+          <p:cNvPr id="9" name="TextBox 8"/>
+          <p:cNvSpPr txBox="1"/>
+          <p:nvPr/>
+        </p:nvSpPr>
+        <p:spPr>
+          <a:xfrm>
+            <a:off x="548640" y="1709928"/>
+            <a:ext cx="2423160" cy="685800"/>
+          </a:xfrm>
+          <a:prstGeom prst="rect">
+            <a:avLst/>
+          </a:prstGeom>
+          <a:noFill/>
+        </p:spPr>
+        <p:txBody>
+          <a:bodyPr wrap="square" anchor="ctr" lIns="45720" rIns="45720">
+            <a:spAutoFit/>
+          </a:bodyPr>
+          <a:lstStyle/>
+          <a:p>
+            <a:pPr algn="ctr"/>
+            <a:r>
+              <a:rPr sz="1900" b="1">
+                <a:solidFill>
+                  <a:srgbClr val="FFFFFF"/>
+                </a:solidFill>
+                <a:latin typeface="Calibri"/>
+              </a:rPr>
+              <a:t>1. Inicia sesión</a:t>
+            </a:r>
+          </a:p>
+        </p:txBody>
+      </p:sp>
+      <p:sp>
+        <p:nvSpPr>
+          <p:cNvPr id="10" name="TextBox 9"/>
+          <p:cNvSpPr txBox="1"/>
+          <p:nvPr/>
+        </p:nvSpPr>
+        <p:spPr>
+          <a:xfrm>
+            <a:off x="548640" y="2350008"/>
+            <a:ext cx="2423160" cy="457200"/>
+          </a:xfrm>
+          <a:prstGeom prst="rect">
+            <a:avLst/>
+          </a:prstGeom>
+          <a:noFill/>
+        </p:spPr>
+        <p:txBody>
+          <a:bodyPr wrap="square" anchor="t" lIns="45720" rIns="45720">
+            <a:spAutoFit/>
+          </a:bodyPr>
+          <a:lstStyle/>
+          <a:p>
+            <a:pPr algn="ctr"/>
+            <a:r>
+              <a:rPr sz="1500" b="0">
+                <a:solidFill>
+                  <a:srgbClr val="DDEAF7"/>
+                </a:solidFill>
+                <a:latin typeface="Calibri"/>
+              </a:rPr>
+              <a:t>Sistema corporativo</a:t>
+            </a:r>
+          </a:p>
+        </p:txBody>
+      </p:sp>
+      <p:sp>
+        <p:nvSpPr>
+          <p:cNvPr id="11" name="Rounded Rectangle 10"/>
+          <p:cNvSpPr/>
+          <p:nvPr/>
+        </p:nvSpPr>
+        <p:spPr>
+          <a:xfrm>
+            <a:off x="3429000" y="1600200"/>
+            <a:ext cx="2423160" cy="1325880"/>
           </a:xfrm>
           <a:prstGeom prst="roundRect">
             <a:avLst/>
@@ -7108,14 +7759,14 @@
       </p:sp>
       <p:sp>
         <p:nvSpPr>
-          <p:cNvPr id="9" name="TextBox 8"/>
-          <p:cNvSpPr txBox="1"/>
-          <p:nvPr/>
-        </p:nvSpPr>
-        <p:spPr>
-          <a:xfrm>
-            <a:off x="621792" y="1600200"/>
-            <a:ext cx="1728216" cy="1051560"/>
+          <p:cNvPr id="12" name="TextBox 11"/>
+          <p:cNvSpPr txBox="1"/>
+          <p:nvPr/>
+        </p:nvSpPr>
+        <p:spPr>
+          <a:xfrm>
+            <a:off x="3429000" y="1709928"/>
+            <a:ext cx="2423160" cy="685800"/>
           </a:xfrm>
           <a:prstGeom prst="rect">
             <a:avLst/>
@@ -7130,27 +7781,290 @@
           <a:p>
             <a:pPr algn="ctr"/>
             <a:r>
-              <a:rPr sz="1400" b="1">
+              <a:rPr sz="1900" b="1">
                 <a:solidFill>
                   <a:srgbClr val="FFFFFF"/>
                 </a:solidFill>
                 <a:latin typeface="Calibri"/>
               </a:rPr>
-              <a:t>Enfermera abre la app</a:t>
-            </a:r>
-          </a:p>
-        </p:txBody>
-      </p:sp>
-      <p:sp>
-        <p:nvSpPr>
-          <p:cNvPr id="10" name="Right Arrow 9"/>
+              <a:t>2. Recibe la llamada</a:t>
+            </a:r>
+          </a:p>
+        </p:txBody>
+      </p:sp>
+      <p:sp>
+        <p:nvSpPr>
+          <p:cNvPr id="13" name="TextBox 12"/>
+          <p:cNvSpPr txBox="1"/>
+          <p:nvPr/>
+        </p:nvSpPr>
+        <p:spPr>
+          <a:xfrm>
+            <a:off x="3429000" y="2350008"/>
+            <a:ext cx="2423160" cy="457200"/>
+          </a:xfrm>
+          <a:prstGeom prst="rect">
+            <a:avLst/>
+          </a:prstGeom>
+          <a:noFill/>
+        </p:spPr>
+        <p:txBody>
+          <a:bodyPr wrap="square" anchor="t" lIns="45720" rIns="45720">
+            <a:spAutoFit/>
+          </a:bodyPr>
+          <a:lstStyle/>
+          <a:p>
+            <a:pPr algn="ctr"/>
+            <a:r>
+              <a:rPr sz="1500" b="0">
+                <a:solidFill>
+                  <a:srgbClr val="DDEAF7"/>
+                </a:solidFill>
+                <a:latin typeface="Calibri"/>
+              </a:rPr>
+              <a:t>Abre un caso</a:t>
+            </a:r>
+          </a:p>
+        </p:txBody>
+      </p:sp>
+      <p:sp>
+        <p:nvSpPr>
+          <p:cNvPr id="14" name="Rounded Rectangle 13"/>
           <p:cNvSpPr/>
           <p:nvPr/>
         </p:nvSpPr>
         <p:spPr>
           <a:xfrm>
-            <a:off x="2468880" y="1984248"/>
-            <a:ext cx="329184" cy="292608"/>
+            <a:off x="6309360" y="1600200"/>
+            <a:ext cx="2423160" cy="1325880"/>
+          </a:xfrm>
+          <a:prstGeom prst="roundRect">
+            <a:avLst/>
+          </a:prstGeom>
+          <a:solidFill>
+            <a:srgbClr val="1168BD"/>
+          </a:solidFill>
+          <a:ln>
+            <a:noFill/>
+          </a:ln>
+          <a:effectLst/>
+        </p:spPr>
+        <p:style>
+          <a:lnRef idx="1">
+            <a:schemeClr val="accent1"/>
+          </a:lnRef>
+          <a:fillRef idx="3">
+            <a:schemeClr val="accent1"/>
+          </a:fillRef>
+          <a:effectRef idx="2">
+            <a:schemeClr val="accent1"/>
+          </a:effectRef>
+          <a:fontRef idx="minor">
+            <a:schemeClr val="lt1"/>
+          </a:fontRef>
+        </p:style>
+        <p:txBody>
+          <a:bodyPr rtlCol="0" anchor="ctr"/>
+          <a:lstStyle/>
+          <a:p>
+            <a:pPr algn="ctr"/>
+          </a:p>
+        </p:txBody>
+      </p:sp>
+      <p:sp>
+        <p:nvSpPr>
+          <p:cNvPr id="15" name="TextBox 14"/>
+          <p:cNvSpPr txBox="1"/>
+          <p:nvPr/>
+        </p:nvSpPr>
+        <p:spPr>
+          <a:xfrm>
+            <a:off x="6309360" y="1709928"/>
+            <a:ext cx="2423160" cy="685800"/>
+          </a:xfrm>
+          <a:prstGeom prst="rect">
+            <a:avLst/>
+          </a:prstGeom>
+          <a:noFill/>
+        </p:spPr>
+        <p:txBody>
+          <a:bodyPr wrap="square" anchor="ctr" lIns="45720" rIns="45720">
+            <a:spAutoFit/>
+          </a:bodyPr>
+          <a:lstStyle/>
+          <a:p>
+            <a:pPr algn="ctr"/>
+            <a:r>
+              <a:rPr sz="1900" b="1">
+                <a:solidFill>
+                  <a:srgbClr val="FFFFFF"/>
+                </a:solidFill>
+                <a:latin typeface="Calibri"/>
+              </a:rPr>
+              <a:t>3. Consulta la historia</a:t>
+            </a:r>
+          </a:p>
+        </p:txBody>
+      </p:sp>
+      <p:sp>
+        <p:nvSpPr>
+          <p:cNvPr id="16" name="TextBox 15"/>
+          <p:cNvSpPr txBox="1"/>
+          <p:nvPr/>
+        </p:nvSpPr>
+        <p:spPr>
+          <a:xfrm>
+            <a:off x="6309360" y="2350008"/>
+            <a:ext cx="2423160" cy="457200"/>
+          </a:xfrm>
+          <a:prstGeom prst="rect">
+            <a:avLst/>
+          </a:prstGeom>
+          <a:noFill/>
+        </p:spPr>
+        <p:txBody>
+          <a:bodyPr wrap="square" anchor="t" lIns="45720" rIns="45720">
+            <a:spAutoFit/>
+          </a:bodyPr>
+          <a:lstStyle/>
+          <a:p>
+            <a:pPr algn="ctr"/>
+            <a:r>
+              <a:rPr sz="1500" b="0">
+                <a:solidFill>
+                  <a:srgbClr val="DDEAF7"/>
+                </a:solidFill>
+                <a:latin typeface="Calibri"/>
+              </a:rPr>
+              <a:t>HU01</a:t>
+            </a:r>
+          </a:p>
+        </p:txBody>
+      </p:sp>
+      <p:sp>
+        <p:nvSpPr>
+          <p:cNvPr id="17" name="Rounded Rectangle 16"/>
+          <p:cNvSpPr/>
+          <p:nvPr/>
+        </p:nvSpPr>
+        <p:spPr>
+          <a:xfrm>
+            <a:off x="9189720" y="1600200"/>
+            <a:ext cx="2423160" cy="1325880"/>
+          </a:xfrm>
+          <a:prstGeom prst="roundRect">
+            <a:avLst/>
+          </a:prstGeom>
+          <a:solidFill>
+            <a:srgbClr val="1168BD"/>
+          </a:solidFill>
+          <a:ln>
+            <a:noFill/>
+          </a:ln>
+          <a:effectLst/>
+        </p:spPr>
+        <p:style>
+          <a:lnRef idx="1">
+            <a:schemeClr val="accent1"/>
+          </a:lnRef>
+          <a:fillRef idx="3">
+            <a:schemeClr val="accent1"/>
+          </a:fillRef>
+          <a:effectRef idx="2">
+            <a:schemeClr val="accent1"/>
+          </a:effectRef>
+          <a:fontRef idx="minor">
+            <a:schemeClr val="lt1"/>
+          </a:fontRef>
+        </p:style>
+        <p:txBody>
+          <a:bodyPr rtlCol="0" anchor="ctr"/>
+          <a:lstStyle/>
+          <a:p>
+            <a:pPr algn="ctr"/>
+          </a:p>
+        </p:txBody>
+      </p:sp>
+      <p:sp>
+        <p:nvSpPr>
+          <p:cNvPr id="18" name="TextBox 17"/>
+          <p:cNvSpPr txBox="1"/>
+          <p:nvPr/>
+        </p:nvSpPr>
+        <p:spPr>
+          <a:xfrm>
+            <a:off x="9189720" y="1709928"/>
+            <a:ext cx="2423160" cy="685800"/>
+          </a:xfrm>
+          <a:prstGeom prst="rect">
+            <a:avLst/>
+          </a:prstGeom>
+          <a:noFill/>
+        </p:spPr>
+        <p:txBody>
+          <a:bodyPr wrap="square" anchor="ctr" lIns="45720" rIns="45720">
+            <a:spAutoFit/>
+          </a:bodyPr>
+          <a:lstStyle/>
+          <a:p>
+            <a:pPr algn="ctr"/>
+            <a:r>
+              <a:rPr sz="1900" b="1">
+                <a:solidFill>
+                  <a:srgbClr val="FFFFFF"/>
+                </a:solidFill>
+                <a:latin typeface="Calibri"/>
+              </a:rPr>
+              <a:t>4. Registra síntomas</a:t>
+            </a:r>
+          </a:p>
+        </p:txBody>
+      </p:sp>
+      <p:sp>
+        <p:nvSpPr>
+          <p:cNvPr id="19" name="TextBox 18"/>
+          <p:cNvSpPr txBox="1"/>
+          <p:nvPr/>
+        </p:nvSpPr>
+        <p:spPr>
+          <a:xfrm>
+            <a:off x="9189720" y="2350008"/>
+            <a:ext cx="2423160" cy="457200"/>
+          </a:xfrm>
+          <a:prstGeom prst="rect">
+            <a:avLst/>
+          </a:prstGeom>
+          <a:noFill/>
+        </p:spPr>
+        <p:txBody>
+          <a:bodyPr wrap="square" anchor="t" lIns="45720" rIns="45720">
+            <a:spAutoFit/>
+          </a:bodyPr>
+          <a:lstStyle/>
+          <a:p>
+            <a:pPr algn="ctr"/>
+            <a:r>
+              <a:rPr sz="1500" b="0">
+                <a:solidFill>
+                  <a:srgbClr val="DDEAF7"/>
+                </a:solidFill>
+                <a:latin typeface="Calibri"/>
+              </a:rPr>
+              <a:t>HU02 · urgencia</a:t>
+            </a:r>
+          </a:p>
+        </p:txBody>
+      </p:sp>
+      <p:sp>
+        <p:nvSpPr>
+          <p:cNvPr id="20" name="Right Arrow 19"/>
+          <p:cNvSpPr/>
+          <p:nvPr/>
+        </p:nvSpPr>
+        <p:spPr>
+          <a:xfrm>
+            <a:off x="3017520" y="2080260"/>
+            <a:ext cx="365760" cy="365760"/>
           </a:xfrm>
           <a:prstGeom prst="rightArrow">
             <a:avLst/>
@@ -7187,93 +8101,14 @@
       </p:sp>
       <p:sp>
         <p:nvSpPr>
-          <p:cNvPr id="11" name="Rounded Rectangle 10"/>
+          <p:cNvPr id="21" name="Right Arrow 20"/>
           <p:cNvSpPr/>
           <p:nvPr/>
         </p:nvSpPr>
         <p:spPr>
           <a:xfrm>
-            <a:off x="2834640" y="1600200"/>
-            <a:ext cx="1874519" cy="1051560"/>
-          </a:xfrm>
-          <a:prstGeom prst="roundRect">
-            <a:avLst/>
-          </a:prstGeom>
-          <a:solidFill>
-            <a:srgbClr val="0E9F8E"/>
-          </a:solidFill>
-          <a:ln>
-            <a:noFill/>
-          </a:ln>
-          <a:effectLst/>
-        </p:spPr>
-        <p:style>
-          <a:lnRef idx="1">
-            <a:schemeClr val="accent1"/>
-          </a:lnRef>
-          <a:fillRef idx="3">
-            <a:schemeClr val="accent1"/>
-          </a:fillRef>
-          <a:effectRef idx="2">
-            <a:schemeClr val="accent1"/>
-          </a:effectRef>
-          <a:fontRef idx="minor">
-            <a:schemeClr val="lt1"/>
-          </a:fontRef>
-        </p:style>
-        <p:txBody>
-          <a:bodyPr rtlCol="0" anchor="ctr"/>
-          <a:lstStyle/>
-          <a:p>
-            <a:pPr algn="ctr"/>
-          </a:p>
-        </p:txBody>
-      </p:sp>
-      <p:sp>
-        <p:nvSpPr>
-          <p:cNvPr id="12" name="TextBox 11"/>
-          <p:cNvSpPr txBox="1"/>
-          <p:nvPr/>
-        </p:nvSpPr>
-        <p:spPr>
-          <a:xfrm>
-            <a:off x="2907792" y="1600200"/>
-            <a:ext cx="1728216" cy="1051560"/>
-          </a:xfrm>
-          <a:prstGeom prst="rect">
-            <a:avLst/>
-          </a:prstGeom>
-          <a:noFill/>
-        </p:spPr>
-        <p:txBody>
-          <a:bodyPr wrap="square" anchor="ctr" lIns="45720" rIns="45720">
-            <a:spAutoFit/>
-          </a:bodyPr>
-          <a:lstStyle/>
-          <a:p>
-            <a:pPr algn="ctr"/>
-            <a:r>
-              <a:rPr sz="1400" b="1">
-                <a:solidFill>
-                  <a:srgbClr val="FFFFFF"/>
-                </a:solidFill>
-                <a:latin typeface="Calibri"/>
-              </a:rPr>
-              <a:t>Redirección a Entra ID</a:t>
-            </a:r>
-          </a:p>
-        </p:txBody>
-      </p:sp>
-      <p:sp>
-        <p:nvSpPr>
-          <p:cNvPr id="13" name="Right Arrow 12"/>
-          <p:cNvSpPr/>
-          <p:nvPr/>
-        </p:nvSpPr>
-        <p:spPr>
-          <a:xfrm>
-            <a:off x="4754880" y="1984248"/>
-            <a:ext cx="329184" cy="292608"/>
+            <a:off x="5897880" y="2080260"/>
+            <a:ext cx="365760" cy="365760"/>
           </a:xfrm>
           <a:prstGeom prst="rightArrow">
             <a:avLst/>
@@ -7310,14 +8145,193 @@
       </p:sp>
       <p:sp>
         <p:nvSpPr>
-          <p:cNvPr id="14" name="Rounded Rectangle 13"/>
+          <p:cNvPr id="22" name="Right Arrow 21"/>
           <p:cNvSpPr/>
           <p:nvPr/>
         </p:nvSpPr>
         <p:spPr>
           <a:xfrm>
-            <a:off x="5120640" y="1600200"/>
-            <a:ext cx="1874519" cy="1051560"/>
+            <a:off x="8778240" y="2080260"/>
+            <a:ext cx="365760" cy="365760"/>
+          </a:xfrm>
+          <a:prstGeom prst="rightArrow">
+            <a:avLst/>
+          </a:prstGeom>
+          <a:solidFill>
+            <a:srgbClr val="595959"/>
+          </a:solidFill>
+          <a:ln>
+            <a:noFill/>
+          </a:ln>
+          <a:effectLst/>
+        </p:spPr>
+        <p:style>
+          <a:lnRef idx="1">
+            <a:schemeClr val="accent1"/>
+          </a:lnRef>
+          <a:fillRef idx="3">
+            <a:schemeClr val="accent1"/>
+          </a:fillRef>
+          <a:effectRef idx="2">
+            <a:schemeClr val="accent1"/>
+          </a:effectRef>
+          <a:fontRef idx="minor">
+            <a:schemeClr val="lt1"/>
+          </a:fontRef>
+        </p:style>
+        <p:txBody>
+          <a:bodyPr rtlCol="0" anchor="ctr"/>
+          <a:lstStyle/>
+          <a:p>
+            <a:pPr algn="ctr"/>
+          </a:p>
+        </p:txBody>
+      </p:sp>
+      <p:sp>
+        <p:nvSpPr>
+          <p:cNvPr id="23" name="Down Arrow 22"/>
+          <p:cNvSpPr/>
+          <p:nvPr/>
+        </p:nvSpPr>
+        <p:spPr>
+          <a:xfrm>
+            <a:off x="10218420" y="2999232"/>
+            <a:ext cx="365760" cy="457200"/>
+          </a:xfrm>
+          <a:prstGeom prst="downArrow">
+            <a:avLst/>
+          </a:prstGeom>
+          <a:solidFill>
+            <a:srgbClr val="595959"/>
+          </a:solidFill>
+          <a:ln>
+            <a:noFill/>
+          </a:ln>
+          <a:effectLst/>
+        </p:spPr>
+        <p:style>
+          <a:lnRef idx="1">
+            <a:schemeClr val="accent1"/>
+          </a:lnRef>
+          <a:fillRef idx="3">
+            <a:schemeClr val="accent1"/>
+          </a:fillRef>
+          <a:effectRef idx="2">
+            <a:schemeClr val="accent1"/>
+          </a:effectRef>
+          <a:fontRef idx="minor">
+            <a:schemeClr val="lt1"/>
+          </a:fontRef>
+        </p:style>
+        <p:txBody>
+          <a:bodyPr rtlCol="0" anchor="ctr"/>
+          <a:lstStyle/>
+          <a:p>
+            <a:pPr algn="ctr"/>
+          </a:p>
+        </p:txBody>
+      </p:sp>
+      <p:sp>
+        <p:nvSpPr>
+          <p:cNvPr id="24" name="Diamond 23"/>
+          <p:cNvSpPr/>
+          <p:nvPr/>
+        </p:nvSpPr>
+        <p:spPr>
+          <a:xfrm>
+            <a:off x="9189720" y="3703320"/>
+            <a:ext cx="2423160" cy="1508760"/>
+          </a:xfrm>
+          <a:prstGeom prst="diamond">
+            <a:avLst/>
+          </a:prstGeom>
+          <a:solidFill>
+            <a:srgbClr val="D86C1F"/>
+          </a:solidFill>
+          <a:ln>
+            <a:noFill/>
+          </a:ln>
+          <a:effectLst/>
+        </p:spPr>
+        <p:style>
+          <a:lnRef idx="1">
+            <a:schemeClr val="accent1"/>
+          </a:lnRef>
+          <a:fillRef idx="3">
+            <a:schemeClr val="accent1"/>
+          </a:fillRef>
+          <a:effectRef idx="2">
+            <a:schemeClr val="accent1"/>
+          </a:effectRef>
+          <a:fontRef idx="minor">
+            <a:schemeClr val="lt1"/>
+          </a:fontRef>
+        </p:style>
+        <p:txBody>
+          <a:bodyPr rtlCol="0" anchor="ctr"/>
+          <a:lstStyle/>
+          <a:p>
+            <a:pPr algn="ctr"/>
+          </a:p>
+        </p:txBody>
+      </p:sp>
+      <p:sp>
+        <p:nvSpPr>
+          <p:cNvPr id="25" name="TextBox 24"/>
+          <p:cNvSpPr txBox="1"/>
+          <p:nvPr/>
+        </p:nvSpPr>
+        <p:spPr>
+          <a:xfrm>
+            <a:off x="9189720" y="3703320"/>
+            <a:ext cx="2423160" cy="1508760"/>
+          </a:xfrm>
+          <a:prstGeom prst="rect">
+            <a:avLst/>
+          </a:prstGeom>
+          <a:noFill/>
+        </p:spPr>
+        <p:txBody>
+          <a:bodyPr wrap="square" anchor="ctr" lIns="45720" rIns="45720">
+            <a:spAutoFit/>
+          </a:bodyPr>
+          <a:lstStyle/>
+          <a:p>
+            <a:pPr algn="ctr"/>
+            <a:r>
+              <a:rPr sz="1700" b="1">
+                <a:solidFill>
+                  <a:srgbClr val="FFFFFF"/>
+                </a:solidFill>
+                <a:latin typeface="Calibri"/>
+              </a:rPr>
+              <a:t>¿Debe ir a</a:t>
+            </a:r>
+          </a:p>
+          <a:p>
+            <a:pPr algn="ctr"/>
+            <a:r>
+              <a:rPr sz="1700" b="1">
+                <a:solidFill>
+                  <a:srgbClr val="FFFFFF"/>
+                </a:solidFill>
+                <a:latin typeface="Calibri"/>
+              </a:rPr>
+              <a:t>un centro?</a:t>
+            </a:r>
+          </a:p>
+        </p:txBody>
+      </p:sp>
+      <p:sp>
+        <p:nvSpPr>
+          <p:cNvPr id="26" name="Rounded Rectangle 25"/>
+          <p:cNvSpPr/>
+          <p:nvPr/>
+        </p:nvSpPr>
+        <p:spPr>
+          <a:xfrm>
+            <a:off x="6309360" y="3794760"/>
+            <a:ext cx="2423160" cy="1325880"/>
           </a:xfrm>
           <a:prstGeom prst="roundRect">
             <a:avLst/>
@@ -7354,14 +8368,14 @@
       </p:sp>
       <p:sp>
         <p:nvSpPr>
-          <p:cNvPr id="15" name="TextBox 14"/>
-          <p:cNvSpPr txBox="1"/>
-          <p:nvPr/>
-        </p:nvSpPr>
-        <p:spPr>
-          <a:xfrm>
-            <a:off x="5193792" y="1600200"/>
-            <a:ext cx="1728216" cy="1051560"/>
+          <p:cNvPr id="27" name="TextBox 26"/>
+          <p:cNvSpPr txBox="1"/>
+          <p:nvPr/>
+        </p:nvSpPr>
+        <p:spPr>
+          <a:xfrm>
+            <a:off x="6309360" y="3886200"/>
+            <a:ext cx="2423160" cy="731520"/>
           </a:xfrm>
           <a:prstGeom prst="rect">
             <a:avLst/>
@@ -7376,29 +8390,292 @@
           <a:p>
             <a:pPr algn="ctr"/>
             <a:r>
-              <a:rPr sz="1400" b="1">
+              <a:rPr sz="1800" b="1">
                 <a:solidFill>
                   <a:srgbClr val="FFFFFF"/>
                 </a:solidFill>
                 <a:latin typeface="Calibri"/>
               </a:rPr>
-              <a:t>Login en el sistema corporativo + MFA</a:t>
-            </a:r>
-          </a:p>
-        </p:txBody>
-      </p:sp>
-      <p:sp>
-        <p:nvSpPr>
-          <p:cNvPr id="16" name="Right Arrow 15"/>
+              <a:t>5. Busca el centro más cercano</a:t>
+            </a:r>
+          </a:p>
+        </p:txBody>
+      </p:sp>
+      <p:sp>
+        <p:nvSpPr>
+          <p:cNvPr id="28" name="TextBox 27"/>
+          <p:cNvSpPr txBox="1"/>
+          <p:nvPr/>
+        </p:nvSpPr>
+        <p:spPr>
+          <a:xfrm>
+            <a:off x="6309360" y="4572000"/>
+            <a:ext cx="2423160" cy="457200"/>
+          </a:xfrm>
+          <a:prstGeom prst="rect">
+            <a:avLst/>
+          </a:prstGeom>
+          <a:noFill/>
+        </p:spPr>
+        <p:txBody>
+          <a:bodyPr wrap="square" anchor="t" lIns="45720" rIns="45720">
+            <a:spAutoFit/>
+          </a:bodyPr>
+          <a:lstStyle/>
+          <a:p>
+            <a:pPr algn="ctr"/>
+            <a:r>
+              <a:rPr sz="1500" b="0">
+                <a:solidFill>
+                  <a:srgbClr val="DDEAF7"/>
+                </a:solidFill>
+                <a:latin typeface="Calibri"/>
+              </a:rPr>
+              <a:t>HU03</a:t>
+            </a:r>
+          </a:p>
+        </p:txBody>
+      </p:sp>
+      <p:sp>
+        <p:nvSpPr>
+          <p:cNvPr id="29" name="Rounded Rectangle 28"/>
           <p:cNvSpPr/>
           <p:nvPr/>
         </p:nvSpPr>
         <p:spPr>
           <a:xfrm>
-            <a:off x="7040880" y="1984248"/>
-            <a:ext cx="329184" cy="292608"/>
-          </a:xfrm>
-          <a:prstGeom prst="rightArrow">
+            <a:off x="3429000" y="3794760"/>
+            <a:ext cx="2423160" cy="1325880"/>
+          </a:xfrm>
+          <a:prstGeom prst="roundRect">
+            <a:avLst/>
+          </a:prstGeom>
+          <a:solidFill>
+            <a:srgbClr val="1168BD"/>
+          </a:solidFill>
+          <a:ln>
+            <a:noFill/>
+          </a:ln>
+          <a:effectLst/>
+        </p:spPr>
+        <p:style>
+          <a:lnRef idx="1">
+            <a:schemeClr val="accent1"/>
+          </a:lnRef>
+          <a:fillRef idx="3">
+            <a:schemeClr val="accent1"/>
+          </a:fillRef>
+          <a:effectRef idx="2">
+            <a:schemeClr val="accent1"/>
+          </a:effectRef>
+          <a:fontRef idx="minor">
+            <a:schemeClr val="lt1"/>
+          </a:fontRef>
+        </p:style>
+        <p:txBody>
+          <a:bodyPr rtlCol="0" anchor="ctr"/>
+          <a:lstStyle/>
+          <a:p>
+            <a:pPr algn="ctr"/>
+          </a:p>
+        </p:txBody>
+      </p:sp>
+      <p:sp>
+        <p:nvSpPr>
+          <p:cNvPr id="30" name="TextBox 29"/>
+          <p:cNvSpPr txBox="1"/>
+          <p:nvPr/>
+        </p:nvSpPr>
+        <p:spPr>
+          <a:xfrm>
+            <a:off x="3429000" y="3886200"/>
+            <a:ext cx="2423160" cy="731520"/>
+          </a:xfrm>
+          <a:prstGeom prst="rect">
+            <a:avLst/>
+          </a:prstGeom>
+          <a:noFill/>
+        </p:spPr>
+        <p:txBody>
+          <a:bodyPr wrap="square" anchor="ctr" lIns="45720" rIns="45720">
+            <a:spAutoFit/>
+          </a:bodyPr>
+          <a:lstStyle/>
+          <a:p>
+            <a:pPr algn="ctr"/>
+            <a:r>
+              <a:rPr sz="1800" b="1">
+                <a:solidFill>
+                  <a:srgbClr val="FFFFFF"/>
+                </a:solidFill>
+                <a:latin typeface="Calibri"/>
+              </a:rPr>
+              <a:t>6. Remite y avisa al centro</a:t>
+            </a:r>
+          </a:p>
+        </p:txBody>
+      </p:sp>
+      <p:sp>
+        <p:nvSpPr>
+          <p:cNvPr id="31" name="TextBox 30"/>
+          <p:cNvSpPr txBox="1"/>
+          <p:nvPr/>
+        </p:nvSpPr>
+        <p:spPr>
+          <a:xfrm>
+            <a:off x="3429000" y="4572000"/>
+            <a:ext cx="2423160" cy="457200"/>
+          </a:xfrm>
+          <a:prstGeom prst="rect">
+            <a:avLst/>
+          </a:prstGeom>
+          <a:noFill/>
+        </p:spPr>
+        <p:txBody>
+          <a:bodyPr wrap="square" anchor="t" lIns="45720" rIns="45720">
+            <a:spAutoFit/>
+          </a:bodyPr>
+          <a:lstStyle/>
+          <a:p>
+            <a:pPr algn="ctr"/>
+            <a:r>
+              <a:rPr sz="1500" b="0">
+                <a:solidFill>
+                  <a:srgbClr val="DDEAF7"/>
+                </a:solidFill>
+                <a:latin typeface="Calibri"/>
+              </a:rPr>
+              <a:t>HU04</a:t>
+            </a:r>
+          </a:p>
+        </p:txBody>
+      </p:sp>
+      <p:sp>
+        <p:nvSpPr>
+          <p:cNvPr id="32" name="Rounded Rectangle 31"/>
+          <p:cNvSpPr/>
+          <p:nvPr/>
+        </p:nvSpPr>
+        <p:spPr>
+          <a:xfrm>
+            <a:off x="548640" y="3794760"/>
+            <a:ext cx="2423160" cy="1325880"/>
+          </a:xfrm>
+          <a:prstGeom prst="roundRect">
+            <a:avLst/>
+          </a:prstGeom>
+          <a:solidFill>
+            <a:srgbClr val="107C10"/>
+          </a:solidFill>
+          <a:ln>
+            <a:noFill/>
+          </a:ln>
+          <a:effectLst/>
+        </p:spPr>
+        <p:style>
+          <a:lnRef idx="1">
+            <a:schemeClr val="accent1"/>
+          </a:lnRef>
+          <a:fillRef idx="3">
+            <a:schemeClr val="accent1"/>
+          </a:fillRef>
+          <a:effectRef idx="2">
+            <a:schemeClr val="accent1"/>
+          </a:effectRef>
+          <a:fontRef idx="minor">
+            <a:schemeClr val="lt1"/>
+          </a:fontRef>
+        </p:style>
+        <p:txBody>
+          <a:bodyPr rtlCol="0" anchor="ctr"/>
+          <a:lstStyle/>
+          <a:p>
+            <a:pPr algn="ctr"/>
+          </a:p>
+        </p:txBody>
+      </p:sp>
+      <p:sp>
+        <p:nvSpPr>
+          <p:cNvPr id="33" name="TextBox 32"/>
+          <p:cNvSpPr txBox="1"/>
+          <p:nvPr/>
+        </p:nvSpPr>
+        <p:spPr>
+          <a:xfrm>
+            <a:off x="548640" y="3886200"/>
+            <a:ext cx="2423160" cy="731520"/>
+          </a:xfrm>
+          <a:prstGeom prst="rect">
+            <a:avLst/>
+          </a:prstGeom>
+          <a:noFill/>
+        </p:spPr>
+        <p:txBody>
+          <a:bodyPr wrap="square" anchor="ctr" lIns="45720" rIns="45720">
+            <a:spAutoFit/>
+          </a:bodyPr>
+          <a:lstStyle/>
+          <a:p>
+            <a:pPr algn="ctr"/>
+            <a:r>
+              <a:rPr sz="1800" b="1">
+                <a:solidFill>
+                  <a:srgbClr val="FFFFFF"/>
+                </a:solidFill>
+                <a:latin typeface="Calibri"/>
+              </a:rPr>
+              <a:t>7. Cierra el caso</a:t>
+            </a:r>
+          </a:p>
+        </p:txBody>
+      </p:sp>
+      <p:sp>
+        <p:nvSpPr>
+          <p:cNvPr id="34" name="TextBox 33"/>
+          <p:cNvSpPr txBox="1"/>
+          <p:nvPr/>
+        </p:nvSpPr>
+        <p:spPr>
+          <a:xfrm>
+            <a:off x="548640" y="4572000"/>
+            <a:ext cx="2423160" cy="457200"/>
+          </a:xfrm>
+          <a:prstGeom prst="rect">
+            <a:avLst/>
+          </a:prstGeom>
+          <a:noFill/>
+        </p:spPr>
+        <p:txBody>
+          <a:bodyPr wrap="square" anchor="t" lIns="45720" rIns="45720">
+            <a:spAutoFit/>
+          </a:bodyPr>
+          <a:lstStyle/>
+          <a:p>
+            <a:pPr algn="ctr"/>
+            <a:r>
+              <a:rPr sz="1500" b="0">
+                <a:solidFill>
+                  <a:srgbClr val="DDEAF7"/>
+                </a:solidFill>
+                <a:latin typeface="Calibri"/>
+              </a:rPr>
+              <a:t>Queda registrado</a:t>
+            </a:r>
+          </a:p>
+        </p:txBody>
+      </p:sp>
+      <p:sp>
+        <p:nvSpPr>
+          <p:cNvPr id="35" name="Left Arrow 34"/>
+          <p:cNvSpPr/>
+          <p:nvPr/>
+        </p:nvSpPr>
+        <p:spPr>
+          <a:xfrm>
+            <a:off x="3017520" y="4274820"/>
+            <a:ext cx="365760" cy="365760"/>
+          </a:xfrm>
+          <a:prstGeom prst="leftArrow">
             <a:avLst/>
           </a:prstGeom>
           <a:solidFill>
@@ -7433,95 +8710,16 @@
       </p:sp>
       <p:sp>
         <p:nvSpPr>
-          <p:cNvPr id="17" name="Rounded Rectangle 16"/>
+          <p:cNvPr id="36" name="Left Arrow 35"/>
           <p:cNvSpPr/>
           <p:nvPr/>
         </p:nvSpPr>
         <p:spPr>
           <a:xfrm>
-            <a:off x="7406640" y="1600200"/>
-            <a:ext cx="1874519" cy="1051560"/>
-          </a:xfrm>
-          <a:prstGeom prst="roundRect">
-            <a:avLst/>
-          </a:prstGeom>
-          <a:solidFill>
-            <a:srgbClr val="0E9F8E"/>
-          </a:solidFill>
-          <a:ln>
-            <a:noFill/>
-          </a:ln>
-          <a:effectLst/>
-        </p:spPr>
-        <p:style>
-          <a:lnRef idx="1">
-            <a:schemeClr val="accent1"/>
-          </a:lnRef>
-          <a:fillRef idx="3">
-            <a:schemeClr val="accent1"/>
-          </a:fillRef>
-          <a:effectRef idx="2">
-            <a:schemeClr val="accent1"/>
-          </a:effectRef>
-          <a:fontRef idx="minor">
-            <a:schemeClr val="lt1"/>
-          </a:fontRef>
-        </p:style>
-        <p:txBody>
-          <a:bodyPr rtlCol="0" anchor="ctr"/>
-          <a:lstStyle/>
-          <a:p>
-            <a:pPr algn="ctr"/>
-          </a:p>
-        </p:txBody>
-      </p:sp>
-      <p:sp>
-        <p:nvSpPr>
-          <p:cNvPr id="18" name="TextBox 17"/>
-          <p:cNvSpPr txBox="1"/>
-          <p:nvPr/>
-        </p:nvSpPr>
-        <p:spPr>
-          <a:xfrm>
-            <a:off x="7479792" y="1600200"/>
-            <a:ext cx="1728216" cy="1051560"/>
-          </a:xfrm>
-          <a:prstGeom prst="rect">
-            <a:avLst/>
-          </a:prstGeom>
-          <a:noFill/>
-        </p:spPr>
-        <p:txBody>
-          <a:bodyPr wrap="square" anchor="ctr" lIns="45720" rIns="45720">
-            <a:spAutoFit/>
-          </a:bodyPr>
-          <a:lstStyle/>
-          <a:p>
-            <a:pPr algn="ctr"/>
-            <a:r>
-              <a:rPr sz="1400" b="1">
-                <a:solidFill>
-                  <a:srgbClr val="FFFFFF"/>
-                </a:solidFill>
-                <a:latin typeface="Calibri"/>
-              </a:rPr>
-              <a:t>Token JWT con rol</a:t>
-            </a:r>
-          </a:p>
-        </p:txBody>
-      </p:sp>
-      <p:sp>
-        <p:nvSpPr>
-          <p:cNvPr id="19" name="Right Arrow 18"/>
-          <p:cNvSpPr/>
-          <p:nvPr/>
-        </p:nvSpPr>
-        <p:spPr>
-          <a:xfrm>
-            <a:off x="9326880" y="1984248"/>
-            <a:ext cx="329184" cy="292608"/>
-          </a:xfrm>
-          <a:prstGeom prst="rightArrow">
+            <a:off x="5897880" y="4274820"/>
+            <a:ext cx="365760" cy="365760"/>
+          </a:xfrm>
+          <a:prstGeom prst="leftArrow">
             <a:avLst/>
           </a:prstGeom>
           <a:solidFill>
@@ -7556,20 +8754,20 @@
       </p:sp>
       <p:sp>
         <p:nvSpPr>
-          <p:cNvPr id="20" name="Rounded Rectangle 19"/>
+          <p:cNvPr id="37" name="Left Arrow 36"/>
           <p:cNvSpPr/>
           <p:nvPr/>
         </p:nvSpPr>
         <p:spPr>
           <a:xfrm>
-            <a:off x="9692640" y="1600200"/>
-            <a:ext cx="1874519" cy="1051560"/>
-          </a:xfrm>
-          <a:prstGeom prst="roundRect">
+            <a:off x="8778240" y="4274820"/>
+            <a:ext cx="365760" cy="365760"/>
+          </a:xfrm>
+          <a:prstGeom prst="leftArrow">
             <a:avLst/>
           </a:prstGeom>
           <a:solidFill>
-            <a:srgbClr val="1168BD"/>
+            <a:srgbClr val="595959"/>
           </a:solidFill>
           <a:ln>
             <a:noFill/>
@@ -7600,14 +8798,174 @@
       </p:sp>
       <p:sp>
         <p:nvSpPr>
-          <p:cNvPr id="21" name="TextBox 20"/>
-          <p:cNvSpPr txBox="1"/>
-          <p:nvPr/>
-        </p:nvSpPr>
-        <p:spPr>
-          <a:xfrm>
-            <a:off x="9765792" y="1600200"/>
-            <a:ext cx="1728216" cy="1051560"/>
+          <p:cNvPr id="38" name="TextBox 37"/>
+          <p:cNvSpPr txBox="1"/>
+          <p:nvPr/>
+        </p:nvSpPr>
+        <p:spPr>
+          <a:xfrm>
+            <a:off x="8641080" y="3890772"/>
+            <a:ext cx="548640" cy="347472"/>
+          </a:xfrm>
+          <a:prstGeom prst="rect">
+            <a:avLst/>
+          </a:prstGeom>
+          <a:noFill/>
+        </p:spPr>
+        <p:txBody>
+          <a:bodyPr wrap="square" anchor="t" lIns="45720" rIns="45720">
+            <a:spAutoFit/>
+          </a:bodyPr>
+          <a:lstStyle/>
+          <a:p>
+            <a:pPr algn="ctr"/>
+            <a:r>
+              <a:rPr sz="1600" b="1">
+                <a:solidFill>
+                  <a:srgbClr val="107C10"/>
+                </a:solidFill>
+                <a:latin typeface="Calibri"/>
+              </a:rPr>
+              <a:t>Sí</a:t>
+            </a:r>
+          </a:p>
+        </p:txBody>
+      </p:sp>
+      <p:sp>
+        <p:nvSpPr>
+          <p:cNvPr id="39" name="Down Arrow 38"/>
+          <p:cNvSpPr/>
+          <p:nvPr/>
+        </p:nvSpPr>
+        <p:spPr>
+          <a:xfrm>
+            <a:off x="10218420" y="5230368"/>
+            <a:ext cx="365760" cy="411480"/>
+          </a:xfrm>
+          <a:prstGeom prst="downArrow">
+            <a:avLst/>
+          </a:prstGeom>
+          <a:solidFill>
+            <a:srgbClr val="595959"/>
+          </a:solidFill>
+          <a:ln>
+            <a:noFill/>
+          </a:ln>
+          <a:effectLst/>
+        </p:spPr>
+        <p:style>
+          <a:lnRef idx="1">
+            <a:schemeClr val="accent1"/>
+          </a:lnRef>
+          <a:fillRef idx="3">
+            <a:schemeClr val="accent1"/>
+          </a:fillRef>
+          <a:effectRef idx="2">
+            <a:schemeClr val="accent1"/>
+          </a:effectRef>
+          <a:fontRef idx="minor">
+            <a:schemeClr val="lt1"/>
+          </a:fontRef>
+        </p:style>
+        <p:txBody>
+          <a:bodyPr rtlCol="0" anchor="ctr"/>
+          <a:lstStyle/>
+          <a:p>
+            <a:pPr algn="ctr"/>
+          </a:p>
+        </p:txBody>
+      </p:sp>
+      <p:sp>
+        <p:nvSpPr>
+          <p:cNvPr id="40" name="TextBox 39"/>
+          <p:cNvSpPr txBox="1"/>
+          <p:nvPr/>
+        </p:nvSpPr>
+        <p:spPr>
+          <a:xfrm>
+            <a:off x="10629900" y="5230368"/>
+            <a:ext cx="548640" cy="365760"/>
+          </a:xfrm>
+          <a:prstGeom prst="rect">
+            <a:avLst/>
+          </a:prstGeom>
+          <a:noFill/>
+        </p:spPr>
+        <p:txBody>
+          <a:bodyPr wrap="square" anchor="t" lIns="45720" rIns="45720">
+            <a:spAutoFit/>
+          </a:bodyPr>
+          <a:lstStyle/>
+          <a:p>
+            <a:pPr algn="l"/>
+            <a:r>
+              <a:rPr sz="1600" b="1">
+                <a:solidFill>
+                  <a:srgbClr val="D86C1F"/>
+                </a:solidFill>
+                <a:latin typeface="Calibri"/>
+              </a:rPr>
+              <a:t>No</a:t>
+            </a:r>
+          </a:p>
+        </p:txBody>
+      </p:sp>
+      <p:sp>
+        <p:nvSpPr>
+          <p:cNvPr id="41" name="Rounded Rectangle 40"/>
+          <p:cNvSpPr/>
+          <p:nvPr/>
+        </p:nvSpPr>
+        <p:spPr>
+          <a:xfrm>
+            <a:off x="8092440" y="5669280"/>
+            <a:ext cx="3520439" cy="658368"/>
+          </a:xfrm>
+          <a:prstGeom prst="roundRect">
+            <a:avLst/>
+          </a:prstGeom>
+          <a:solidFill>
+            <a:srgbClr val="EAF2FB"/>
+          </a:solidFill>
+          <a:ln w="12700">
+            <a:solidFill>
+              <a:srgbClr val="D86C1F"/>
+            </a:solidFill>
+          </a:ln>
+          <a:effectLst/>
+        </p:spPr>
+        <p:style>
+          <a:lnRef idx="1">
+            <a:schemeClr val="accent1"/>
+          </a:lnRef>
+          <a:fillRef idx="3">
+            <a:schemeClr val="accent1"/>
+          </a:fillRef>
+          <a:effectRef idx="2">
+            <a:schemeClr val="accent1"/>
+          </a:effectRef>
+          <a:fontRef idx="minor">
+            <a:schemeClr val="lt1"/>
+          </a:fontRef>
+        </p:style>
+        <p:txBody>
+          <a:bodyPr rtlCol="0" anchor="ctr"/>
+          <a:lstStyle/>
+          <a:p>
+            <a:pPr algn="ctr"/>
+          </a:p>
+        </p:txBody>
+      </p:sp>
+      <p:sp>
+        <p:nvSpPr>
+          <p:cNvPr id="42" name="TextBox 41"/>
+          <p:cNvSpPr txBox="1"/>
+          <p:nvPr/>
+        </p:nvSpPr>
+        <p:spPr>
+          <a:xfrm>
+            <a:off x="8092440" y="5669280"/>
+            <a:ext cx="3520439" cy="658368"/>
           </a:xfrm>
           <a:prstGeom prst="rect">
             <a:avLst/>
@@ -7622,190 +8980,13 @@
           <a:p>
             <a:pPr algn="ctr"/>
             <a:r>
-              <a:rPr sz="1400" b="1">
-                <a:solidFill>
-                  <a:srgbClr val="FFFFFF"/>
-                </a:solidFill>
-                <a:latin typeface="Calibri"/>
-              </a:rPr>
-              <a:t>API Management valida el token</a:t>
-            </a:r>
-          </a:p>
-        </p:txBody>
-      </p:sp>
-      <p:sp>
-        <p:nvSpPr>
-          <p:cNvPr id="22" name="TextBox 21"/>
-          <p:cNvSpPr txBox="1"/>
-          <p:nvPr/>
-        </p:nvSpPr>
-        <p:spPr>
-          <a:xfrm>
-            <a:off x="548640" y="2743200"/>
-            <a:ext cx="10972800" cy="365760"/>
-          </a:xfrm>
-          <a:prstGeom prst="rect">
-            <a:avLst/>
-          </a:prstGeom>
-          <a:noFill/>
-        </p:spPr>
-        <p:txBody>
-          <a:bodyPr wrap="square" anchor="t" lIns="45720" rIns="45720">
-            <a:spAutoFit/>
-          </a:bodyPr>
-          <a:lstStyle/>
-          <a:p>
-            <a:pPr algn="ctr"/>
-            <a:r>
-              <a:rPr sz="1400" b="0">
-                <a:solidFill>
-                  <a:srgbClr val="595959"/>
-                </a:solidFill>
-                <a:latin typeface="Calibri"/>
-              </a:rPr>
-              <a:t>OpenID Connect + OAuth 2.0 con PKCE · la aplicación nunca maneja contraseñas</a:t>
-            </a:r>
-          </a:p>
-        </p:txBody>
-      </p:sp>
-      <p:sp>
-        <p:nvSpPr>
-          <p:cNvPr id="23" name="TextBox 22"/>
-          <p:cNvSpPr txBox="1"/>
-          <p:nvPr/>
-        </p:nvSpPr>
-        <p:spPr>
-          <a:xfrm>
-            <a:off x="731520" y="3291840"/>
-            <a:ext cx="5303520" cy="3017520"/>
-          </a:xfrm>
-          <a:prstGeom prst="rect">
-            <a:avLst/>
-          </a:prstGeom>
-          <a:noFill/>
-        </p:spPr>
-        <p:txBody>
-          <a:bodyPr wrap="square">
-            <a:spAutoFit/>
-          </a:bodyPr>
-          <a:lstStyle/>
-          <a:p>
-            <a:pPr>
-              <a:spcAft>
-                <a:spcPts val="800"/>
-              </a:spcAft>
-            </a:pPr>
-            <a:r>
-              <a:rPr sz="1600">
+              <a:rPr sz="1500" b="1">
                 <a:solidFill>
                   <a:srgbClr val="262626"/>
                 </a:solidFill>
                 <a:latin typeface="Calibri"/>
               </a:rPr>
-              <a:t>▸ Cifrado TLS 1.2+ en tránsito y cifrado en reposo con llaves en Key Vault.</a:t>
-            </a:r>
-          </a:p>
-          <a:p>
-            <a:pPr>
-              <a:spcAft>
-                <a:spcPts val="800"/>
-              </a:spcAft>
-            </a:pPr>
-            <a:r>
-              <a:rPr sz="1600">
-                <a:solidFill>
-                  <a:srgbClr val="262626"/>
-                </a:solidFill>
-                <a:latin typeface="Calibri"/>
-              </a:rPr>
-              <a:t>▸ Bases de datos, FHIR y mensajería solo por red privada.</a:t>
-            </a:r>
-          </a:p>
-          <a:p>
-            <a:pPr>
-              <a:spcAft>
-                <a:spcPts val="800"/>
-              </a:spcAft>
-            </a:pPr>
-            <a:r>
-              <a:rPr sz="1600">
-                <a:solidFill>
-                  <a:srgbClr val="262626"/>
-                </a:solidFill>
-                <a:latin typeface="Calibri"/>
-              </a:rPr>
-              <a:t>▸ WAF con reglas OWASP en Front Door.</a:t>
-            </a:r>
-          </a:p>
-        </p:txBody>
-      </p:sp>
-      <p:sp>
-        <p:nvSpPr>
-          <p:cNvPr id="24" name="TextBox 23"/>
-          <p:cNvSpPr txBox="1"/>
-          <p:nvPr/>
-        </p:nvSpPr>
-        <p:spPr>
-          <a:xfrm>
-            <a:off x="6309360" y="3291840"/>
-            <a:ext cx="5394960" cy="3017520"/>
-          </a:xfrm>
-          <a:prstGeom prst="rect">
-            <a:avLst/>
-          </a:prstGeom>
-          <a:noFill/>
-        </p:spPr>
-        <p:txBody>
-          <a:bodyPr wrap="square">
-            <a:spAutoFit/>
-          </a:bodyPr>
-          <a:lstStyle/>
-          <a:p>
-            <a:pPr>
-              <a:spcAft>
-                <a:spcPts val="800"/>
-              </a:spcAft>
-            </a:pPr>
-            <a:r>
-              <a:rPr sz="1600">
-                <a:solidFill>
-                  <a:srgbClr val="262626"/>
-                </a:solidFill>
-                <a:latin typeface="Calibri"/>
-              </a:rPr>
-              <a:t>▸ Roles: enfermera, supervisora y administrador.</a:t>
-            </a:r>
-          </a:p>
-          <a:p>
-            <a:pPr>
-              <a:spcAft>
-                <a:spcPts val="800"/>
-              </a:spcAft>
-            </a:pPr>
-            <a:r>
-              <a:rPr sz="1600">
-                <a:solidFill>
-                  <a:srgbClr val="262626"/>
-                </a:solidFill>
-                <a:latin typeface="Calibri"/>
-              </a:rPr>
-              <a:t>▸ Auditoría de cada acceso a una historia clínica.</a:t>
-            </a:r>
-          </a:p>
-          <a:p>
-            <a:pPr>
-              <a:spcAft>
-                <a:spcPts val="800"/>
-              </a:spcAft>
-            </a:pPr>
-            <a:r>
-              <a:rPr sz="1600">
-                <a:solidFill>
-                  <a:srgbClr val="262626"/>
-                </a:solidFill>
-                <a:latin typeface="Calibri"/>
-              </a:rPr>
-              <a:t>▸ Cumplimiento HIPAA (BAA), ISO 27001 y normativa local de datos de salud.</a:t>
+              <a:t>Indicaciones de autocuidado y cierra el caso</a:t>
             </a:r>
           </a:p>
         </p:txBody>
@@ -7946,7 +9127,7 @@
                 </a:solidFill>
                 <a:latin typeface="Calibri"/>
               </a:rPr>
-              <a:t>Alta disponibilidad y monitoreo</a:t>
+              <a:t>Arquitectura en la nube · Microsoft Azure</a:t>
             </a:r>
           </a:p>
         </p:txBody>
@@ -7954,6 +9135,41 @@
       <p:sp>
         <p:nvSpPr>
           <p:cNvPr id="5" name="TextBox 4"/>
+          <p:cNvSpPr txBox="1"/>
+          <p:nvPr/>
+        </p:nvSpPr>
+        <p:spPr>
+          <a:xfrm>
+            <a:off x="658368" y="987552"/>
+            <a:ext cx="10789920" cy="457200"/>
+          </a:xfrm>
+          <a:prstGeom prst="rect">
+            <a:avLst/>
+          </a:prstGeom>
+          <a:noFill/>
+        </p:spPr>
+        <p:txBody>
+          <a:bodyPr wrap="square" anchor="t" lIns="45720" rIns="45720">
+            <a:spAutoFit/>
+          </a:bodyPr>
+          <a:lstStyle/>
+          <a:p>
+            <a:pPr algn="l"/>
+            <a:r>
+              <a:rPr sz="1500" b="0">
+                <a:solidFill>
+                  <a:srgbClr val="595959"/>
+                </a:solidFill>
+                <a:latin typeface="Calibri"/>
+              </a:rPr>
+              <a:t>Región principal activa en 3 zonas · región de respaldo lista para tomar el control · datos solo por red privada</a:t>
+            </a:r>
+          </a:p>
+        </p:txBody>
+      </p:sp>
+      <p:sp>
+        <p:nvSpPr>
+          <p:cNvPr id="6" name="TextBox 5"/>
           <p:cNvSpPr txBox="1"/>
           <p:nvPr/>
         </p:nvSpPr>
@@ -7988,7 +9204,7 @@
       </p:sp>
       <p:sp>
         <p:nvSpPr>
-          <p:cNvPr id="6" name="TextBox 5"/>
+          <p:cNvPr id="7" name="TextBox 6"/>
           <p:cNvSpPr txBox="1"/>
           <p:nvPr/>
         </p:nvSpPr>
@@ -8017,6 +9233,1235 @@
                 <a:latin typeface="Calibri"/>
               </a:rPr>
               <a:t>14</a:t>
+            </a:r>
+          </a:p>
+        </p:txBody>
+      </p:sp>
+      <p:pic>
+        <p:nvPicPr>
+          <p:cNvPr id="8" name="Picture 7" descr="05-nube-azure.png"/>
+          <p:cNvPicPr>
+            <a:picLocks noChangeAspect="1"/>
+          </p:cNvPicPr>
+          <p:nvPr/>
+        </p:nvPicPr>
+        <p:blipFill>
+          <a:blip r:embed="rId2"/>
+          <a:stretch>
+            <a:fillRect/>
+          </a:stretch>
+        </p:blipFill>
+        <p:spPr>
+          <a:xfrm>
+            <a:off x="775777" y="1325880"/>
+            <a:ext cx="10609966" cy="5074920"/>
+          </a:xfrm>
+          <a:prstGeom prst="rect">
+            <a:avLst/>
+          </a:prstGeom>
+        </p:spPr>
+      </p:pic>
+    </p:spTree>
+  </p:cSld>
+  <p:clrMapOvr>
+    <a:masterClrMapping/>
+  </p:clrMapOvr>
+</p:sld>
+</file>
+
+<file path=ppt/slides/slide15.xml><?xml version="1.0" encoding="utf-8"?>
+<p:sld xmlns:a="http://schemas.openxmlformats.org/drawingml/2006/main" xmlns:p="http://schemas.openxmlformats.org/presentationml/2006/main" xmlns:r="http://schemas.openxmlformats.org/officeDocument/2006/relationships">
+  <p:cSld>
+    <p:spTree>
+      <p:nvGrpSpPr>
+        <p:cNvPr id="1" name=""/>
+        <p:cNvGrpSpPr/>
+        <p:nvPr/>
+      </p:nvGrpSpPr>
+      <p:grpSpPr/>
+      <p:sp>
+        <p:nvSpPr>
+          <p:cNvPr id="2" name="Rectangle 1"/>
+          <p:cNvSpPr/>
+          <p:nvPr/>
+        </p:nvSpPr>
+        <p:spPr>
+          <a:xfrm>
+            <a:off x="0" y="0"/>
+            <a:ext cx="12191695" cy="109728"/>
+          </a:xfrm>
+          <a:prstGeom prst="rect">
+            <a:avLst/>
+          </a:prstGeom>
+          <a:solidFill>
+            <a:srgbClr val="0B3C5D"/>
+          </a:solidFill>
+          <a:ln>
+            <a:noFill/>
+          </a:ln>
+          <a:effectLst/>
+        </p:spPr>
+        <p:style>
+          <a:lnRef idx="1">
+            <a:schemeClr val="accent1"/>
+          </a:lnRef>
+          <a:fillRef idx="3">
+            <a:schemeClr val="accent1"/>
+          </a:fillRef>
+          <a:effectRef idx="2">
+            <a:schemeClr val="accent1"/>
+          </a:effectRef>
+          <a:fontRef idx="minor">
+            <a:schemeClr val="lt1"/>
+          </a:fontRef>
+        </p:style>
+        <p:txBody>
+          <a:bodyPr rtlCol="0" anchor="ctr"/>
+          <a:lstStyle/>
+          <a:p>
+            <a:pPr algn="ctr"/>
+          </a:p>
+        </p:txBody>
+      </p:sp>
+      <p:sp>
+        <p:nvSpPr>
+          <p:cNvPr id="3" name="Rectangle 2"/>
+          <p:cNvSpPr/>
+          <p:nvPr/>
+        </p:nvSpPr>
+        <p:spPr>
+          <a:xfrm>
+            <a:off x="457200" y="411480"/>
+            <a:ext cx="82296" cy="566928"/>
+          </a:xfrm>
+          <a:prstGeom prst="rect">
+            <a:avLst/>
+          </a:prstGeom>
+          <a:solidFill>
+            <a:srgbClr val="0E9F8E"/>
+          </a:solidFill>
+          <a:ln>
+            <a:noFill/>
+          </a:ln>
+          <a:effectLst/>
+        </p:spPr>
+        <p:style>
+          <a:lnRef idx="1">
+            <a:schemeClr val="accent1"/>
+          </a:lnRef>
+          <a:fillRef idx="3">
+            <a:schemeClr val="accent1"/>
+          </a:fillRef>
+          <a:effectRef idx="2">
+            <a:schemeClr val="accent1"/>
+          </a:effectRef>
+          <a:fontRef idx="minor">
+            <a:schemeClr val="lt1"/>
+          </a:fontRef>
+        </p:style>
+        <p:txBody>
+          <a:bodyPr rtlCol="0" anchor="ctr"/>
+          <a:lstStyle/>
+          <a:p>
+            <a:pPr algn="ctr"/>
+          </a:p>
+        </p:txBody>
+      </p:sp>
+      <p:sp>
+        <p:nvSpPr>
+          <p:cNvPr id="4" name="TextBox 3"/>
+          <p:cNvSpPr txBox="1"/>
+          <p:nvPr/>
+        </p:nvSpPr>
+        <p:spPr>
+          <a:xfrm>
+            <a:off x="640080" y="320040"/>
+            <a:ext cx="10515600" cy="731520"/>
+          </a:xfrm>
+          <a:prstGeom prst="rect">
+            <a:avLst/>
+          </a:prstGeom>
+          <a:noFill/>
+        </p:spPr>
+        <p:txBody>
+          <a:bodyPr wrap="square" anchor="ctr" lIns="45720" rIns="45720">
+            <a:spAutoFit/>
+          </a:bodyPr>
+          <a:lstStyle/>
+          <a:p>
+            <a:pPr algn="l"/>
+            <a:r>
+              <a:rPr sz="3000" b="1">
+                <a:solidFill>
+                  <a:srgbClr val="0B3C5D"/>
+                </a:solidFill>
+                <a:latin typeface="Calibri"/>
+              </a:rPr>
+              <a:t>Seguridad</a:t>
+            </a:r>
+          </a:p>
+        </p:txBody>
+      </p:sp>
+      <p:sp>
+        <p:nvSpPr>
+          <p:cNvPr id="5" name="TextBox 4"/>
+          <p:cNvSpPr txBox="1"/>
+          <p:nvPr/>
+        </p:nvSpPr>
+        <p:spPr>
+          <a:xfrm>
+            <a:off x="658368" y="987552"/>
+            <a:ext cx="10789920" cy="457200"/>
+          </a:xfrm>
+          <a:prstGeom prst="rect">
+            <a:avLst/>
+          </a:prstGeom>
+          <a:noFill/>
+        </p:spPr>
+        <p:txBody>
+          <a:bodyPr wrap="square" anchor="t" lIns="45720" rIns="45720">
+            <a:spAutoFit/>
+          </a:bodyPr>
+          <a:lstStyle/>
+          <a:p>
+            <a:pPr algn="l"/>
+            <a:r>
+              <a:rPr sz="1500" b="0">
+                <a:solidFill>
+                  <a:srgbClr val="595959"/>
+                </a:solidFill>
+                <a:latin typeface="Calibri"/>
+              </a:rPr>
+              <a:t>Autenticación centralizada y protección de datos clínicos</a:t>
+            </a:r>
+          </a:p>
+        </p:txBody>
+      </p:sp>
+      <p:sp>
+        <p:nvSpPr>
+          <p:cNvPr id="6" name="TextBox 5"/>
+          <p:cNvSpPr txBox="1"/>
+          <p:nvPr/>
+        </p:nvSpPr>
+        <p:spPr>
+          <a:xfrm>
+            <a:off x="457200" y="6446520"/>
+            <a:ext cx="7315200" cy="320040"/>
+          </a:xfrm>
+          <a:prstGeom prst="rect">
+            <a:avLst/>
+          </a:prstGeom>
+          <a:noFill/>
+        </p:spPr>
+        <p:txBody>
+          <a:bodyPr wrap="square" anchor="t" lIns="45720" rIns="45720">
+            <a:spAutoFit/>
+          </a:bodyPr>
+          <a:lstStyle/>
+          <a:p>
+            <a:pPr algn="l"/>
+            <a:r>
+              <a:rPr sz="1000" b="0">
+                <a:solidFill>
+                  <a:srgbClr val="595959"/>
+                </a:solidFill>
+                <a:latin typeface="Calibri"/>
+              </a:rPr>
+              <a:t>Plataforma de Atención de Enfermería · Hospital Medical Health</a:t>
+            </a:r>
+          </a:p>
+        </p:txBody>
+      </p:sp>
+      <p:sp>
+        <p:nvSpPr>
+          <p:cNvPr id="7" name="TextBox 6"/>
+          <p:cNvSpPr txBox="1"/>
+          <p:nvPr/>
+        </p:nvSpPr>
+        <p:spPr>
+          <a:xfrm>
+            <a:off x="10972800" y="6446520"/>
+            <a:ext cx="822960" cy="320040"/>
+          </a:xfrm>
+          <a:prstGeom prst="rect">
+            <a:avLst/>
+          </a:prstGeom>
+          <a:noFill/>
+        </p:spPr>
+        <p:txBody>
+          <a:bodyPr wrap="square" anchor="t" lIns="45720" rIns="45720">
+            <a:spAutoFit/>
+          </a:bodyPr>
+          <a:lstStyle/>
+          <a:p>
+            <a:pPr algn="r"/>
+            <a:r>
+              <a:rPr sz="1000" b="0">
+                <a:solidFill>
+                  <a:srgbClr val="595959"/>
+                </a:solidFill>
+                <a:latin typeface="Calibri"/>
+              </a:rPr>
+              <a:t>15</a:t>
+            </a:r>
+          </a:p>
+        </p:txBody>
+      </p:sp>
+      <p:sp>
+        <p:nvSpPr>
+          <p:cNvPr id="8" name="Rounded Rectangle 7"/>
+          <p:cNvSpPr/>
+          <p:nvPr/>
+        </p:nvSpPr>
+        <p:spPr>
+          <a:xfrm>
+            <a:off x="548640" y="1600200"/>
+            <a:ext cx="1874519" cy="1051560"/>
+          </a:xfrm>
+          <a:prstGeom prst="roundRect">
+            <a:avLst/>
+          </a:prstGeom>
+          <a:solidFill>
+            <a:srgbClr val="1168BD"/>
+          </a:solidFill>
+          <a:ln>
+            <a:noFill/>
+          </a:ln>
+          <a:effectLst/>
+        </p:spPr>
+        <p:style>
+          <a:lnRef idx="1">
+            <a:schemeClr val="accent1"/>
+          </a:lnRef>
+          <a:fillRef idx="3">
+            <a:schemeClr val="accent1"/>
+          </a:fillRef>
+          <a:effectRef idx="2">
+            <a:schemeClr val="accent1"/>
+          </a:effectRef>
+          <a:fontRef idx="minor">
+            <a:schemeClr val="lt1"/>
+          </a:fontRef>
+        </p:style>
+        <p:txBody>
+          <a:bodyPr rtlCol="0" anchor="ctr"/>
+          <a:lstStyle/>
+          <a:p>
+            <a:pPr algn="ctr"/>
+          </a:p>
+        </p:txBody>
+      </p:sp>
+      <p:sp>
+        <p:nvSpPr>
+          <p:cNvPr id="9" name="TextBox 8"/>
+          <p:cNvSpPr txBox="1"/>
+          <p:nvPr/>
+        </p:nvSpPr>
+        <p:spPr>
+          <a:xfrm>
+            <a:off x="621792" y="1600200"/>
+            <a:ext cx="1728216" cy="1051560"/>
+          </a:xfrm>
+          <a:prstGeom prst="rect">
+            <a:avLst/>
+          </a:prstGeom>
+          <a:noFill/>
+        </p:spPr>
+        <p:txBody>
+          <a:bodyPr wrap="square" anchor="ctr" lIns="45720" rIns="45720">
+            <a:spAutoFit/>
+          </a:bodyPr>
+          <a:lstStyle/>
+          <a:p>
+            <a:pPr algn="ctr"/>
+            <a:r>
+              <a:rPr sz="1400" b="1">
+                <a:solidFill>
+                  <a:srgbClr val="FFFFFF"/>
+                </a:solidFill>
+                <a:latin typeface="Calibri"/>
+              </a:rPr>
+              <a:t>Enfermera abre la app</a:t>
+            </a:r>
+          </a:p>
+        </p:txBody>
+      </p:sp>
+      <p:sp>
+        <p:nvSpPr>
+          <p:cNvPr id="10" name="Right Arrow 9"/>
+          <p:cNvSpPr/>
+          <p:nvPr/>
+        </p:nvSpPr>
+        <p:spPr>
+          <a:xfrm>
+            <a:off x="2468880" y="1984248"/>
+            <a:ext cx="329184" cy="292608"/>
+          </a:xfrm>
+          <a:prstGeom prst="rightArrow">
+            <a:avLst/>
+          </a:prstGeom>
+          <a:solidFill>
+            <a:srgbClr val="595959"/>
+          </a:solidFill>
+          <a:ln>
+            <a:noFill/>
+          </a:ln>
+          <a:effectLst/>
+        </p:spPr>
+        <p:style>
+          <a:lnRef idx="1">
+            <a:schemeClr val="accent1"/>
+          </a:lnRef>
+          <a:fillRef idx="3">
+            <a:schemeClr val="accent1"/>
+          </a:fillRef>
+          <a:effectRef idx="2">
+            <a:schemeClr val="accent1"/>
+          </a:effectRef>
+          <a:fontRef idx="minor">
+            <a:schemeClr val="lt1"/>
+          </a:fontRef>
+        </p:style>
+        <p:txBody>
+          <a:bodyPr rtlCol="0" anchor="ctr"/>
+          <a:lstStyle/>
+          <a:p>
+            <a:pPr algn="ctr"/>
+          </a:p>
+        </p:txBody>
+      </p:sp>
+      <p:sp>
+        <p:nvSpPr>
+          <p:cNvPr id="11" name="Rounded Rectangle 10"/>
+          <p:cNvSpPr/>
+          <p:nvPr/>
+        </p:nvSpPr>
+        <p:spPr>
+          <a:xfrm>
+            <a:off x="2834640" y="1600200"/>
+            <a:ext cx="1874519" cy="1051560"/>
+          </a:xfrm>
+          <a:prstGeom prst="roundRect">
+            <a:avLst/>
+          </a:prstGeom>
+          <a:solidFill>
+            <a:srgbClr val="0E9F8E"/>
+          </a:solidFill>
+          <a:ln>
+            <a:noFill/>
+          </a:ln>
+          <a:effectLst/>
+        </p:spPr>
+        <p:style>
+          <a:lnRef idx="1">
+            <a:schemeClr val="accent1"/>
+          </a:lnRef>
+          <a:fillRef idx="3">
+            <a:schemeClr val="accent1"/>
+          </a:fillRef>
+          <a:effectRef idx="2">
+            <a:schemeClr val="accent1"/>
+          </a:effectRef>
+          <a:fontRef idx="minor">
+            <a:schemeClr val="lt1"/>
+          </a:fontRef>
+        </p:style>
+        <p:txBody>
+          <a:bodyPr rtlCol="0" anchor="ctr"/>
+          <a:lstStyle/>
+          <a:p>
+            <a:pPr algn="ctr"/>
+          </a:p>
+        </p:txBody>
+      </p:sp>
+      <p:sp>
+        <p:nvSpPr>
+          <p:cNvPr id="12" name="TextBox 11"/>
+          <p:cNvSpPr txBox="1"/>
+          <p:nvPr/>
+        </p:nvSpPr>
+        <p:spPr>
+          <a:xfrm>
+            <a:off x="2907792" y="1600200"/>
+            <a:ext cx="1728216" cy="1051560"/>
+          </a:xfrm>
+          <a:prstGeom prst="rect">
+            <a:avLst/>
+          </a:prstGeom>
+          <a:noFill/>
+        </p:spPr>
+        <p:txBody>
+          <a:bodyPr wrap="square" anchor="ctr" lIns="45720" rIns="45720">
+            <a:spAutoFit/>
+          </a:bodyPr>
+          <a:lstStyle/>
+          <a:p>
+            <a:pPr algn="ctr"/>
+            <a:r>
+              <a:rPr sz="1400" b="1">
+                <a:solidFill>
+                  <a:srgbClr val="FFFFFF"/>
+                </a:solidFill>
+                <a:latin typeface="Calibri"/>
+              </a:rPr>
+              <a:t>Redirección a Entra ID</a:t>
+            </a:r>
+          </a:p>
+        </p:txBody>
+      </p:sp>
+      <p:sp>
+        <p:nvSpPr>
+          <p:cNvPr id="13" name="Right Arrow 12"/>
+          <p:cNvSpPr/>
+          <p:nvPr/>
+        </p:nvSpPr>
+        <p:spPr>
+          <a:xfrm>
+            <a:off x="4754880" y="1984248"/>
+            <a:ext cx="329184" cy="292608"/>
+          </a:xfrm>
+          <a:prstGeom prst="rightArrow">
+            <a:avLst/>
+          </a:prstGeom>
+          <a:solidFill>
+            <a:srgbClr val="595959"/>
+          </a:solidFill>
+          <a:ln>
+            <a:noFill/>
+          </a:ln>
+          <a:effectLst/>
+        </p:spPr>
+        <p:style>
+          <a:lnRef idx="1">
+            <a:schemeClr val="accent1"/>
+          </a:lnRef>
+          <a:fillRef idx="3">
+            <a:schemeClr val="accent1"/>
+          </a:fillRef>
+          <a:effectRef idx="2">
+            <a:schemeClr val="accent1"/>
+          </a:effectRef>
+          <a:fontRef idx="minor">
+            <a:schemeClr val="lt1"/>
+          </a:fontRef>
+        </p:style>
+        <p:txBody>
+          <a:bodyPr rtlCol="0" anchor="ctr"/>
+          <a:lstStyle/>
+          <a:p>
+            <a:pPr algn="ctr"/>
+          </a:p>
+        </p:txBody>
+      </p:sp>
+      <p:sp>
+        <p:nvSpPr>
+          <p:cNvPr id="14" name="Rounded Rectangle 13"/>
+          <p:cNvSpPr/>
+          <p:nvPr/>
+        </p:nvSpPr>
+        <p:spPr>
+          <a:xfrm>
+            <a:off x="5120640" y="1600200"/>
+            <a:ext cx="1874519" cy="1051560"/>
+          </a:xfrm>
+          <a:prstGeom prst="roundRect">
+            <a:avLst/>
+          </a:prstGeom>
+          <a:solidFill>
+            <a:srgbClr val="1168BD"/>
+          </a:solidFill>
+          <a:ln>
+            <a:noFill/>
+          </a:ln>
+          <a:effectLst/>
+        </p:spPr>
+        <p:style>
+          <a:lnRef idx="1">
+            <a:schemeClr val="accent1"/>
+          </a:lnRef>
+          <a:fillRef idx="3">
+            <a:schemeClr val="accent1"/>
+          </a:fillRef>
+          <a:effectRef idx="2">
+            <a:schemeClr val="accent1"/>
+          </a:effectRef>
+          <a:fontRef idx="minor">
+            <a:schemeClr val="lt1"/>
+          </a:fontRef>
+        </p:style>
+        <p:txBody>
+          <a:bodyPr rtlCol="0" anchor="ctr"/>
+          <a:lstStyle/>
+          <a:p>
+            <a:pPr algn="ctr"/>
+          </a:p>
+        </p:txBody>
+      </p:sp>
+      <p:sp>
+        <p:nvSpPr>
+          <p:cNvPr id="15" name="TextBox 14"/>
+          <p:cNvSpPr txBox="1"/>
+          <p:nvPr/>
+        </p:nvSpPr>
+        <p:spPr>
+          <a:xfrm>
+            <a:off x="5193792" y="1600200"/>
+            <a:ext cx="1728216" cy="1051560"/>
+          </a:xfrm>
+          <a:prstGeom prst="rect">
+            <a:avLst/>
+          </a:prstGeom>
+          <a:noFill/>
+        </p:spPr>
+        <p:txBody>
+          <a:bodyPr wrap="square" anchor="ctr" lIns="45720" rIns="45720">
+            <a:spAutoFit/>
+          </a:bodyPr>
+          <a:lstStyle/>
+          <a:p>
+            <a:pPr algn="ctr"/>
+            <a:r>
+              <a:rPr sz="1400" b="1">
+                <a:solidFill>
+                  <a:srgbClr val="FFFFFF"/>
+                </a:solidFill>
+                <a:latin typeface="Calibri"/>
+              </a:rPr>
+              <a:t>Login en el sistema corporativo + MFA</a:t>
+            </a:r>
+          </a:p>
+        </p:txBody>
+      </p:sp>
+      <p:sp>
+        <p:nvSpPr>
+          <p:cNvPr id="16" name="Right Arrow 15"/>
+          <p:cNvSpPr/>
+          <p:nvPr/>
+        </p:nvSpPr>
+        <p:spPr>
+          <a:xfrm>
+            <a:off x="7040880" y="1984248"/>
+            <a:ext cx="329184" cy="292608"/>
+          </a:xfrm>
+          <a:prstGeom prst="rightArrow">
+            <a:avLst/>
+          </a:prstGeom>
+          <a:solidFill>
+            <a:srgbClr val="595959"/>
+          </a:solidFill>
+          <a:ln>
+            <a:noFill/>
+          </a:ln>
+          <a:effectLst/>
+        </p:spPr>
+        <p:style>
+          <a:lnRef idx="1">
+            <a:schemeClr val="accent1"/>
+          </a:lnRef>
+          <a:fillRef idx="3">
+            <a:schemeClr val="accent1"/>
+          </a:fillRef>
+          <a:effectRef idx="2">
+            <a:schemeClr val="accent1"/>
+          </a:effectRef>
+          <a:fontRef idx="minor">
+            <a:schemeClr val="lt1"/>
+          </a:fontRef>
+        </p:style>
+        <p:txBody>
+          <a:bodyPr rtlCol="0" anchor="ctr"/>
+          <a:lstStyle/>
+          <a:p>
+            <a:pPr algn="ctr"/>
+          </a:p>
+        </p:txBody>
+      </p:sp>
+      <p:sp>
+        <p:nvSpPr>
+          <p:cNvPr id="17" name="Rounded Rectangle 16"/>
+          <p:cNvSpPr/>
+          <p:nvPr/>
+        </p:nvSpPr>
+        <p:spPr>
+          <a:xfrm>
+            <a:off x="7406640" y="1600200"/>
+            <a:ext cx="1874519" cy="1051560"/>
+          </a:xfrm>
+          <a:prstGeom prst="roundRect">
+            <a:avLst/>
+          </a:prstGeom>
+          <a:solidFill>
+            <a:srgbClr val="0E9F8E"/>
+          </a:solidFill>
+          <a:ln>
+            <a:noFill/>
+          </a:ln>
+          <a:effectLst/>
+        </p:spPr>
+        <p:style>
+          <a:lnRef idx="1">
+            <a:schemeClr val="accent1"/>
+          </a:lnRef>
+          <a:fillRef idx="3">
+            <a:schemeClr val="accent1"/>
+          </a:fillRef>
+          <a:effectRef idx="2">
+            <a:schemeClr val="accent1"/>
+          </a:effectRef>
+          <a:fontRef idx="minor">
+            <a:schemeClr val="lt1"/>
+          </a:fontRef>
+        </p:style>
+        <p:txBody>
+          <a:bodyPr rtlCol="0" anchor="ctr"/>
+          <a:lstStyle/>
+          <a:p>
+            <a:pPr algn="ctr"/>
+          </a:p>
+        </p:txBody>
+      </p:sp>
+      <p:sp>
+        <p:nvSpPr>
+          <p:cNvPr id="18" name="TextBox 17"/>
+          <p:cNvSpPr txBox="1"/>
+          <p:nvPr/>
+        </p:nvSpPr>
+        <p:spPr>
+          <a:xfrm>
+            <a:off x="7479792" y="1600200"/>
+            <a:ext cx="1728216" cy="1051560"/>
+          </a:xfrm>
+          <a:prstGeom prst="rect">
+            <a:avLst/>
+          </a:prstGeom>
+          <a:noFill/>
+        </p:spPr>
+        <p:txBody>
+          <a:bodyPr wrap="square" anchor="ctr" lIns="45720" rIns="45720">
+            <a:spAutoFit/>
+          </a:bodyPr>
+          <a:lstStyle/>
+          <a:p>
+            <a:pPr algn="ctr"/>
+            <a:r>
+              <a:rPr sz="1400" b="1">
+                <a:solidFill>
+                  <a:srgbClr val="FFFFFF"/>
+                </a:solidFill>
+                <a:latin typeface="Calibri"/>
+              </a:rPr>
+              <a:t>Token JWT con rol</a:t>
+            </a:r>
+          </a:p>
+        </p:txBody>
+      </p:sp>
+      <p:sp>
+        <p:nvSpPr>
+          <p:cNvPr id="19" name="Right Arrow 18"/>
+          <p:cNvSpPr/>
+          <p:nvPr/>
+        </p:nvSpPr>
+        <p:spPr>
+          <a:xfrm>
+            <a:off x="9326880" y="1984248"/>
+            <a:ext cx="329184" cy="292608"/>
+          </a:xfrm>
+          <a:prstGeom prst="rightArrow">
+            <a:avLst/>
+          </a:prstGeom>
+          <a:solidFill>
+            <a:srgbClr val="595959"/>
+          </a:solidFill>
+          <a:ln>
+            <a:noFill/>
+          </a:ln>
+          <a:effectLst/>
+        </p:spPr>
+        <p:style>
+          <a:lnRef idx="1">
+            <a:schemeClr val="accent1"/>
+          </a:lnRef>
+          <a:fillRef idx="3">
+            <a:schemeClr val="accent1"/>
+          </a:fillRef>
+          <a:effectRef idx="2">
+            <a:schemeClr val="accent1"/>
+          </a:effectRef>
+          <a:fontRef idx="minor">
+            <a:schemeClr val="lt1"/>
+          </a:fontRef>
+        </p:style>
+        <p:txBody>
+          <a:bodyPr rtlCol="0" anchor="ctr"/>
+          <a:lstStyle/>
+          <a:p>
+            <a:pPr algn="ctr"/>
+          </a:p>
+        </p:txBody>
+      </p:sp>
+      <p:sp>
+        <p:nvSpPr>
+          <p:cNvPr id="20" name="Rounded Rectangle 19"/>
+          <p:cNvSpPr/>
+          <p:nvPr/>
+        </p:nvSpPr>
+        <p:spPr>
+          <a:xfrm>
+            <a:off x="9692640" y="1600200"/>
+            <a:ext cx="1874519" cy="1051560"/>
+          </a:xfrm>
+          <a:prstGeom prst="roundRect">
+            <a:avLst/>
+          </a:prstGeom>
+          <a:solidFill>
+            <a:srgbClr val="1168BD"/>
+          </a:solidFill>
+          <a:ln>
+            <a:noFill/>
+          </a:ln>
+          <a:effectLst/>
+        </p:spPr>
+        <p:style>
+          <a:lnRef idx="1">
+            <a:schemeClr val="accent1"/>
+          </a:lnRef>
+          <a:fillRef idx="3">
+            <a:schemeClr val="accent1"/>
+          </a:fillRef>
+          <a:effectRef idx="2">
+            <a:schemeClr val="accent1"/>
+          </a:effectRef>
+          <a:fontRef idx="minor">
+            <a:schemeClr val="lt1"/>
+          </a:fontRef>
+        </p:style>
+        <p:txBody>
+          <a:bodyPr rtlCol="0" anchor="ctr"/>
+          <a:lstStyle/>
+          <a:p>
+            <a:pPr algn="ctr"/>
+          </a:p>
+        </p:txBody>
+      </p:sp>
+      <p:sp>
+        <p:nvSpPr>
+          <p:cNvPr id="21" name="TextBox 20"/>
+          <p:cNvSpPr txBox="1"/>
+          <p:nvPr/>
+        </p:nvSpPr>
+        <p:spPr>
+          <a:xfrm>
+            <a:off x="9765792" y="1600200"/>
+            <a:ext cx="1728216" cy="1051560"/>
+          </a:xfrm>
+          <a:prstGeom prst="rect">
+            <a:avLst/>
+          </a:prstGeom>
+          <a:noFill/>
+        </p:spPr>
+        <p:txBody>
+          <a:bodyPr wrap="square" anchor="ctr" lIns="45720" rIns="45720">
+            <a:spAutoFit/>
+          </a:bodyPr>
+          <a:lstStyle/>
+          <a:p>
+            <a:pPr algn="ctr"/>
+            <a:r>
+              <a:rPr sz="1400" b="1">
+                <a:solidFill>
+                  <a:srgbClr val="FFFFFF"/>
+                </a:solidFill>
+                <a:latin typeface="Calibri"/>
+              </a:rPr>
+              <a:t>API Management valida el token</a:t>
+            </a:r>
+          </a:p>
+        </p:txBody>
+      </p:sp>
+      <p:sp>
+        <p:nvSpPr>
+          <p:cNvPr id="22" name="TextBox 21"/>
+          <p:cNvSpPr txBox="1"/>
+          <p:nvPr/>
+        </p:nvSpPr>
+        <p:spPr>
+          <a:xfrm>
+            <a:off x="548640" y="2743200"/>
+            <a:ext cx="10972800" cy="365760"/>
+          </a:xfrm>
+          <a:prstGeom prst="rect">
+            <a:avLst/>
+          </a:prstGeom>
+          <a:noFill/>
+        </p:spPr>
+        <p:txBody>
+          <a:bodyPr wrap="square" anchor="t" lIns="45720" rIns="45720">
+            <a:spAutoFit/>
+          </a:bodyPr>
+          <a:lstStyle/>
+          <a:p>
+            <a:pPr algn="ctr"/>
+            <a:r>
+              <a:rPr sz="1400" b="0">
+                <a:solidFill>
+                  <a:srgbClr val="595959"/>
+                </a:solidFill>
+                <a:latin typeface="Calibri"/>
+              </a:rPr>
+              <a:t>OpenID Connect + OAuth 2.0 con PKCE · la aplicación nunca maneja contraseñas</a:t>
+            </a:r>
+          </a:p>
+        </p:txBody>
+      </p:sp>
+      <p:sp>
+        <p:nvSpPr>
+          <p:cNvPr id="23" name="TextBox 22"/>
+          <p:cNvSpPr txBox="1"/>
+          <p:nvPr/>
+        </p:nvSpPr>
+        <p:spPr>
+          <a:xfrm>
+            <a:off x="731520" y="3291840"/>
+            <a:ext cx="5303520" cy="3017520"/>
+          </a:xfrm>
+          <a:prstGeom prst="rect">
+            <a:avLst/>
+          </a:prstGeom>
+          <a:noFill/>
+        </p:spPr>
+        <p:txBody>
+          <a:bodyPr wrap="square">
+            <a:spAutoFit/>
+          </a:bodyPr>
+          <a:lstStyle/>
+          <a:p>
+            <a:pPr>
+              <a:spcAft>
+                <a:spcPts val="800"/>
+              </a:spcAft>
+            </a:pPr>
+            <a:r>
+              <a:rPr sz="1600">
+                <a:solidFill>
+                  <a:srgbClr val="262626"/>
+                </a:solidFill>
+                <a:latin typeface="Calibri"/>
+              </a:rPr>
+              <a:t>▸ Cifrado TLS 1.2+ en tránsito y cifrado en reposo con llaves en Key Vault.</a:t>
+            </a:r>
+          </a:p>
+          <a:p>
+            <a:pPr>
+              <a:spcAft>
+                <a:spcPts val="800"/>
+              </a:spcAft>
+            </a:pPr>
+            <a:r>
+              <a:rPr sz="1600">
+                <a:solidFill>
+                  <a:srgbClr val="262626"/>
+                </a:solidFill>
+                <a:latin typeface="Calibri"/>
+              </a:rPr>
+              <a:t>▸ Bases de datos, FHIR y mensajería solo por red privada.</a:t>
+            </a:r>
+          </a:p>
+          <a:p>
+            <a:pPr>
+              <a:spcAft>
+                <a:spcPts val="800"/>
+              </a:spcAft>
+            </a:pPr>
+            <a:r>
+              <a:rPr sz="1600">
+                <a:solidFill>
+                  <a:srgbClr val="262626"/>
+                </a:solidFill>
+                <a:latin typeface="Calibri"/>
+              </a:rPr>
+              <a:t>▸ WAF con reglas OWASP en Front Door.</a:t>
+            </a:r>
+          </a:p>
+        </p:txBody>
+      </p:sp>
+      <p:sp>
+        <p:nvSpPr>
+          <p:cNvPr id="24" name="TextBox 23"/>
+          <p:cNvSpPr txBox="1"/>
+          <p:nvPr/>
+        </p:nvSpPr>
+        <p:spPr>
+          <a:xfrm>
+            <a:off x="6309360" y="3291840"/>
+            <a:ext cx="5394960" cy="3017520"/>
+          </a:xfrm>
+          <a:prstGeom prst="rect">
+            <a:avLst/>
+          </a:prstGeom>
+          <a:noFill/>
+        </p:spPr>
+        <p:txBody>
+          <a:bodyPr wrap="square">
+            <a:spAutoFit/>
+          </a:bodyPr>
+          <a:lstStyle/>
+          <a:p>
+            <a:pPr>
+              <a:spcAft>
+                <a:spcPts val="800"/>
+              </a:spcAft>
+            </a:pPr>
+            <a:r>
+              <a:rPr sz="1600">
+                <a:solidFill>
+                  <a:srgbClr val="262626"/>
+                </a:solidFill>
+                <a:latin typeface="Calibri"/>
+              </a:rPr>
+              <a:t>▸ Roles: enfermera, supervisora y administrador.</a:t>
+            </a:r>
+          </a:p>
+          <a:p>
+            <a:pPr>
+              <a:spcAft>
+                <a:spcPts val="800"/>
+              </a:spcAft>
+            </a:pPr>
+            <a:r>
+              <a:rPr sz="1600">
+                <a:solidFill>
+                  <a:srgbClr val="262626"/>
+                </a:solidFill>
+                <a:latin typeface="Calibri"/>
+              </a:rPr>
+              <a:t>▸ Auditoría de cada acceso a una historia clínica.</a:t>
+            </a:r>
+          </a:p>
+          <a:p>
+            <a:pPr>
+              <a:spcAft>
+                <a:spcPts val="800"/>
+              </a:spcAft>
+            </a:pPr>
+            <a:r>
+              <a:rPr sz="1600">
+                <a:solidFill>
+                  <a:srgbClr val="262626"/>
+                </a:solidFill>
+                <a:latin typeface="Calibri"/>
+              </a:rPr>
+              <a:t>▸ Cumplimiento HIPAA (BAA), ISO 27001 y normativa local de datos de salud.</a:t>
+            </a:r>
+          </a:p>
+        </p:txBody>
+      </p:sp>
+    </p:spTree>
+  </p:cSld>
+  <p:clrMapOvr>
+    <a:masterClrMapping/>
+  </p:clrMapOvr>
+</p:sld>
+</file>
+
+<file path=ppt/slides/slide16.xml><?xml version="1.0" encoding="utf-8"?>
+<p:sld xmlns:a="http://schemas.openxmlformats.org/drawingml/2006/main" xmlns:p="http://schemas.openxmlformats.org/presentationml/2006/main" xmlns:r="http://schemas.openxmlformats.org/officeDocument/2006/relationships">
+  <p:cSld>
+    <p:spTree>
+      <p:nvGrpSpPr>
+        <p:cNvPr id="1" name=""/>
+        <p:cNvGrpSpPr/>
+        <p:nvPr/>
+      </p:nvGrpSpPr>
+      <p:grpSpPr/>
+      <p:sp>
+        <p:nvSpPr>
+          <p:cNvPr id="2" name="Rectangle 1"/>
+          <p:cNvSpPr/>
+          <p:nvPr/>
+        </p:nvSpPr>
+        <p:spPr>
+          <a:xfrm>
+            <a:off x="0" y="0"/>
+            <a:ext cx="12191695" cy="109728"/>
+          </a:xfrm>
+          <a:prstGeom prst="rect">
+            <a:avLst/>
+          </a:prstGeom>
+          <a:solidFill>
+            <a:srgbClr val="0B3C5D"/>
+          </a:solidFill>
+          <a:ln>
+            <a:noFill/>
+          </a:ln>
+          <a:effectLst/>
+        </p:spPr>
+        <p:style>
+          <a:lnRef idx="1">
+            <a:schemeClr val="accent1"/>
+          </a:lnRef>
+          <a:fillRef idx="3">
+            <a:schemeClr val="accent1"/>
+          </a:fillRef>
+          <a:effectRef idx="2">
+            <a:schemeClr val="accent1"/>
+          </a:effectRef>
+          <a:fontRef idx="minor">
+            <a:schemeClr val="lt1"/>
+          </a:fontRef>
+        </p:style>
+        <p:txBody>
+          <a:bodyPr rtlCol="0" anchor="ctr"/>
+          <a:lstStyle/>
+          <a:p>
+            <a:pPr algn="ctr"/>
+          </a:p>
+        </p:txBody>
+      </p:sp>
+      <p:sp>
+        <p:nvSpPr>
+          <p:cNvPr id="3" name="Rectangle 2"/>
+          <p:cNvSpPr/>
+          <p:nvPr/>
+        </p:nvSpPr>
+        <p:spPr>
+          <a:xfrm>
+            <a:off x="457200" y="411480"/>
+            <a:ext cx="82296" cy="566928"/>
+          </a:xfrm>
+          <a:prstGeom prst="rect">
+            <a:avLst/>
+          </a:prstGeom>
+          <a:solidFill>
+            <a:srgbClr val="0E9F8E"/>
+          </a:solidFill>
+          <a:ln>
+            <a:noFill/>
+          </a:ln>
+          <a:effectLst/>
+        </p:spPr>
+        <p:style>
+          <a:lnRef idx="1">
+            <a:schemeClr val="accent1"/>
+          </a:lnRef>
+          <a:fillRef idx="3">
+            <a:schemeClr val="accent1"/>
+          </a:fillRef>
+          <a:effectRef idx="2">
+            <a:schemeClr val="accent1"/>
+          </a:effectRef>
+          <a:fontRef idx="minor">
+            <a:schemeClr val="lt1"/>
+          </a:fontRef>
+        </p:style>
+        <p:txBody>
+          <a:bodyPr rtlCol="0" anchor="ctr"/>
+          <a:lstStyle/>
+          <a:p>
+            <a:pPr algn="ctr"/>
+          </a:p>
+        </p:txBody>
+      </p:sp>
+      <p:sp>
+        <p:nvSpPr>
+          <p:cNvPr id="4" name="TextBox 3"/>
+          <p:cNvSpPr txBox="1"/>
+          <p:nvPr/>
+        </p:nvSpPr>
+        <p:spPr>
+          <a:xfrm>
+            <a:off x="640080" y="320040"/>
+            <a:ext cx="10515600" cy="731520"/>
+          </a:xfrm>
+          <a:prstGeom prst="rect">
+            <a:avLst/>
+          </a:prstGeom>
+          <a:noFill/>
+        </p:spPr>
+        <p:txBody>
+          <a:bodyPr wrap="square" anchor="ctr" lIns="45720" rIns="45720">
+            <a:spAutoFit/>
+          </a:bodyPr>
+          <a:lstStyle/>
+          <a:p>
+            <a:pPr algn="l"/>
+            <a:r>
+              <a:rPr sz="3000" b="1">
+                <a:solidFill>
+                  <a:srgbClr val="0B3C5D"/>
+                </a:solidFill>
+                <a:latin typeface="Calibri"/>
+              </a:rPr>
+              <a:t>Alta disponibilidad y monitoreo</a:t>
+            </a:r>
+          </a:p>
+        </p:txBody>
+      </p:sp>
+      <p:sp>
+        <p:nvSpPr>
+          <p:cNvPr id="5" name="TextBox 4"/>
+          <p:cNvSpPr txBox="1"/>
+          <p:nvPr/>
+        </p:nvSpPr>
+        <p:spPr>
+          <a:xfrm>
+            <a:off x="457200" y="6446520"/>
+            <a:ext cx="7315200" cy="320040"/>
+          </a:xfrm>
+          <a:prstGeom prst="rect">
+            <a:avLst/>
+          </a:prstGeom>
+          <a:noFill/>
+        </p:spPr>
+        <p:txBody>
+          <a:bodyPr wrap="square" anchor="t" lIns="45720" rIns="45720">
+            <a:spAutoFit/>
+          </a:bodyPr>
+          <a:lstStyle/>
+          <a:p>
+            <a:pPr algn="l"/>
+            <a:r>
+              <a:rPr sz="1000" b="0">
+                <a:solidFill>
+                  <a:srgbClr val="595959"/>
+                </a:solidFill>
+                <a:latin typeface="Calibri"/>
+              </a:rPr>
+              <a:t>Plataforma de Atención de Enfermería · Hospital Medical Health</a:t>
+            </a:r>
+          </a:p>
+        </p:txBody>
+      </p:sp>
+      <p:sp>
+        <p:nvSpPr>
+          <p:cNvPr id="6" name="TextBox 5"/>
+          <p:cNvSpPr txBox="1"/>
+          <p:nvPr/>
+        </p:nvSpPr>
+        <p:spPr>
+          <a:xfrm>
+            <a:off x="10972800" y="6446520"/>
+            <a:ext cx="822960" cy="320040"/>
+          </a:xfrm>
+          <a:prstGeom prst="rect">
+            <a:avLst/>
+          </a:prstGeom>
+          <a:noFill/>
+        </p:spPr>
+        <p:txBody>
+          <a:bodyPr wrap="square" anchor="t" lIns="45720" rIns="45720">
+            <a:spAutoFit/>
+          </a:bodyPr>
+          <a:lstStyle/>
+          <a:p>
+            <a:pPr algn="r"/>
+            <a:r>
+              <a:rPr sz="1000" b="0">
+                <a:solidFill>
+                  <a:srgbClr val="595959"/>
+                </a:solidFill>
+                <a:latin typeface="Calibri"/>
+              </a:rPr>
+              <a:t>16</a:t>
             </a:r>
           </a:p>
         </p:txBody>
@@ -8855,7 +11300,7 @@
 </p:sld>
 </file>
 
-<file path=ppt/slides/slide15.xml><?xml version="1.0" encoding="utf-8"?>
+<file path=ppt/slides/slide17.xml><?xml version="1.0" encoding="utf-8"?>
 <p:sld xmlns:a="http://schemas.openxmlformats.org/drawingml/2006/main" xmlns:p="http://schemas.openxmlformats.org/presentationml/2006/main" xmlns:r="http://schemas.openxmlformats.org/officeDocument/2006/relationships">
   <p:cSld>
     <p:spTree>
@@ -9088,7 +11533,7 @@
                 </a:solidFill>
                 <a:latin typeface="Calibri"/>
               </a:rPr>
-              <a:t>15</a:t>
+              <a:t>17</a:t>
             </a:r>
           </a:p>
         </p:txBody>
@@ -9527,7 +11972,7 @@
 </p:sld>
 </file>
 
-<file path=ppt/slides/slide16.xml><?xml version="1.0" encoding="utf-8"?>
+<file path=ppt/slides/slide18.xml><?xml version="1.0" encoding="utf-8"?>
 <p:sld xmlns:a="http://schemas.openxmlformats.org/drawingml/2006/main" xmlns:p="http://schemas.openxmlformats.org/presentationml/2006/main" xmlns:r="http://schemas.openxmlformats.org/officeDocument/2006/relationships">
   <p:cSld>
     <p:spTree>
@@ -9760,7 +12205,7 @@
                 </a:solidFill>
                 <a:latin typeface="Calibri"/>
               </a:rPr>
-              <a:t>16</a:t>
+              <a:t>18</a:t>
             </a:r>
           </a:p>
         </p:txBody>
@@ -10868,7 +13313,7 @@
 </p:sld>
 </file>
 
-<file path=ppt/slides/slide17.xml><?xml version="1.0" encoding="utf-8"?>
+<file path=ppt/slides/slide19.xml><?xml version="1.0" encoding="utf-8"?>
 <p:sld xmlns:a="http://schemas.openxmlformats.org/drawingml/2006/main" xmlns:p="http://schemas.openxmlformats.org/presentationml/2006/main" xmlns:r="http://schemas.openxmlformats.org/officeDocument/2006/relationships">
   <p:cSld>
     <p:spTree>
@@ -11031,7 +13476,7 @@
                 </a:solidFill>
                 <a:latin typeface="Calibri"/>
               </a:rPr>
-              <a:t>Precios de lista en USD, pago por uso, consultados en octubre de 2026</a:t>
+              <a:t>Millones de pesos colombianos (COP) · pago por uso · TRM $3.273,49 (oct. 2026)</a:t>
             </a:r>
           </a:p>
         </p:txBody>
@@ -11101,7 +13546,7 @@
                 </a:solidFill>
                 <a:latin typeface="Calibri"/>
               </a:rPr>
-              <a:t>17</a:t>
+              <a:t>19</a:t>
             </a:r>
           </a:p>
         </p:txBody>
@@ -11192,13 +13637,13 @@
           <a:p>
             <a:pPr algn="l"/>
             <a:r>
-              <a:rPr sz="1400" b="0">
+              <a:rPr sz="1500" b="0">
                 <a:solidFill>
                   <a:srgbClr val="595959"/>
                 </a:solidFill>
                 <a:latin typeface="Calibri"/>
               </a:rPr>
-              <a:t>Azure / mes</a:t>
+              <a:t>Azure al mes</a:t>
             </a:r>
           </a:p>
         </p:txBody>
@@ -11227,13 +13672,13 @@
           <a:p>
             <a:pPr algn="l"/>
             <a:r>
-              <a:rPr sz="3000" b="1">
+              <a:rPr sz="3200" b="1">
                 <a:solidFill>
                   <a:srgbClr val="1168BD"/>
                 </a:solidFill>
                 <a:latin typeface="Calibri"/>
               </a:rPr>
-              <a:t>$7.923</a:t>
+              <a:t>$25,9 M</a:t>
             </a:r>
           </a:p>
         </p:txBody>
@@ -11306,13 +13751,13 @@
           <a:p>
             <a:pPr algn="l"/>
             <a:r>
-              <a:rPr sz="1400" b="0">
+              <a:rPr sz="1500" b="0">
                 <a:solidFill>
                   <a:srgbClr val="595959"/>
                 </a:solidFill>
                 <a:latin typeface="Calibri"/>
               </a:rPr>
-              <a:t>AWS / mes</a:t>
+              <a:t>AWS al mes</a:t>
             </a:r>
           </a:p>
         </p:txBody>
@@ -11341,13 +13786,13 @@
           <a:p>
             <a:pPr algn="l"/>
             <a:r>
-              <a:rPr sz="3000" b="1">
+              <a:rPr sz="3200" b="1">
                 <a:solidFill>
                   <a:srgbClr val="D86C1F"/>
                 </a:solidFill>
                 <a:latin typeface="Calibri"/>
               </a:rPr>
-              <a:t>$5.121</a:t>
+              <a:t>$16,8 M</a:t>
             </a:r>
           </a:p>
         </p:txBody>
@@ -11420,13 +13865,13 @@
           <a:p>
             <a:pPr algn="l"/>
             <a:r>
-              <a:rPr sz="1400" b="0">
+              <a:rPr sz="1500" b="0">
                 <a:solidFill>
                   <a:srgbClr val="595959"/>
                 </a:solidFill>
                 <a:latin typeface="Calibri"/>
               </a:rPr>
-              <a:t>Azure / año</a:t>
+              <a:t>Azure al año</a:t>
             </a:r>
           </a:p>
         </p:txBody>
@@ -11455,13 +13900,13 @@
           <a:p>
             <a:pPr algn="l"/>
             <a:r>
-              <a:rPr sz="3000" b="1">
+              <a:rPr sz="3200" b="1">
                 <a:solidFill>
                   <a:srgbClr val="0B3C5D"/>
                 </a:solidFill>
                 <a:latin typeface="Calibri"/>
               </a:rPr>
-              <a:t>$95.071</a:t>
+              <a:t>$311,2 M</a:t>
             </a:r>
           </a:p>
         </p:txBody>
@@ -11490,965 +13935,25 @@
           <a:p>
             <a:pPr algn="l"/>
             <a:r>
-              <a:rPr sz="1200" b="0">
+              <a:rPr sz="1400" b="0">
                 <a:solidFill>
                   <a:srgbClr val="595959"/>
                 </a:solidFill>
                 <a:latin typeface="Calibri"/>
               </a:rPr>
+              <a:t>M = millones de pesos.</a:t>
+            </a:r>
+          </a:p>
+          <a:p>
+            <a:pPr algn="l"/>
+            <a:r>
+              <a:rPr sz="1400" b="0">
+                <a:solidFill>
+                  <a:srgbClr val="595959"/>
+                </a:solidFill>
+                <a:latin typeface="Calibri"/>
+              </a:rPr>
               <a:t>Incluye producción en 2 regiones y ambiente de desarrollo.</a:t>
-            </a:r>
-          </a:p>
-          <a:p>
-            <a:pPr algn="l"/>
-            <a:r>
-              <a:rPr sz="1200" b="0">
-                <a:solidFill>
-                  <a:srgbClr val="595959"/>
-                </a:solidFill>
-                <a:latin typeface="Calibri"/>
-              </a:rPr>
-              <a:t>Detalle y fuentes: Estimacion_Costos_Medical_Health.xlsx</a:t>
-            </a:r>
-          </a:p>
-        </p:txBody>
-      </p:sp>
-    </p:spTree>
-  </p:cSld>
-  <p:clrMapOvr>
-    <a:masterClrMapping/>
-  </p:clrMapOvr>
-</p:sld>
-</file>
-
-<file path=ppt/slides/slide18.xml><?xml version="1.0" encoding="utf-8"?>
-<p:sld xmlns:a="http://schemas.openxmlformats.org/drawingml/2006/main" xmlns:p="http://schemas.openxmlformats.org/presentationml/2006/main" xmlns:r="http://schemas.openxmlformats.org/officeDocument/2006/relationships">
-  <p:cSld>
-    <p:spTree>
-      <p:nvGrpSpPr>
-        <p:cNvPr id="1" name=""/>
-        <p:cNvGrpSpPr/>
-        <p:nvPr/>
-      </p:nvGrpSpPr>
-      <p:grpSpPr/>
-      <p:sp>
-        <p:nvSpPr>
-          <p:cNvPr id="2" name="Rectangle 1"/>
-          <p:cNvSpPr/>
-          <p:nvPr/>
-        </p:nvSpPr>
-        <p:spPr>
-          <a:xfrm>
-            <a:off x="0" y="0"/>
-            <a:ext cx="12191695" cy="109728"/>
-          </a:xfrm>
-          <a:prstGeom prst="rect">
-            <a:avLst/>
-          </a:prstGeom>
-          <a:solidFill>
-            <a:srgbClr val="0B3C5D"/>
-          </a:solidFill>
-          <a:ln>
-            <a:noFill/>
-          </a:ln>
-          <a:effectLst/>
-        </p:spPr>
-        <p:style>
-          <a:lnRef idx="1">
-            <a:schemeClr val="accent1"/>
-          </a:lnRef>
-          <a:fillRef idx="3">
-            <a:schemeClr val="accent1"/>
-          </a:fillRef>
-          <a:effectRef idx="2">
-            <a:schemeClr val="accent1"/>
-          </a:effectRef>
-          <a:fontRef idx="minor">
-            <a:schemeClr val="lt1"/>
-          </a:fontRef>
-        </p:style>
-        <p:txBody>
-          <a:bodyPr rtlCol="0" anchor="ctr"/>
-          <a:lstStyle/>
-          <a:p>
-            <a:pPr algn="ctr"/>
-          </a:p>
-        </p:txBody>
-      </p:sp>
-      <p:sp>
-        <p:nvSpPr>
-          <p:cNvPr id="3" name="Rectangle 2"/>
-          <p:cNvSpPr/>
-          <p:nvPr/>
-        </p:nvSpPr>
-        <p:spPr>
-          <a:xfrm>
-            <a:off x="457200" y="411480"/>
-            <a:ext cx="82296" cy="566928"/>
-          </a:xfrm>
-          <a:prstGeom prst="rect">
-            <a:avLst/>
-          </a:prstGeom>
-          <a:solidFill>
-            <a:srgbClr val="0E9F8E"/>
-          </a:solidFill>
-          <a:ln>
-            <a:noFill/>
-          </a:ln>
-          <a:effectLst/>
-        </p:spPr>
-        <p:style>
-          <a:lnRef idx="1">
-            <a:schemeClr val="accent1"/>
-          </a:lnRef>
-          <a:fillRef idx="3">
-            <a:schemeClr val="accent1"/>
-          </a:fillRef>
-          <a:effectRef idx="2">
-            <a:schemeClr val="accent1"/>
-          </a:effectRef>
-          <a:fontRef idx="minor">
-            <a:schemeClr val="lt1"/>
-          </a:fontRef>
-        </p:style>
-        <p:txBody>
-          <a:bodyPr rtlCol="0" anchor="ctr"/>
-          <a:lstStyle/>
-          <a:p>
-            <a:pPr algn="ctr"/>
-          </a:p>
-        </p:txBody>
-      </p:sp>
-      <p:sp>
-        <p:nvSpPr>
-          <p:cNvPr id="4" name="TextBox 3"/>
-          <p:cNvSpPr txBox="1"/>
-          <p:nvPr/>
-        </p:nvSpPr>
-        <p:spPr>
-          <a:xfrm>
-            <a:off x="640080" y="320040"/>
-            <a:ext cx="10515600" cy="731520"/>
-          </a:xfrm>
-          <a:prstGeom prst="rect">
-            <a:avLst/>
-          </a:prstGeom>
-          <a:noFill/>
-        </p:spPr>
-        <p:txBody>
-          <a:bodyPr wrap="square" anchor="ctr" lIns="45720" rIns="45720">
-            <a:spAutoFit/>
-          </a:bodyPr>
-          <a:lstStyle/>
-          <a:p>
-            <a:pPr algn="l"/>
-            <a:r>
-              <a:rPr sz="3000" b="1">
-                <a:solidFill>
-                  <a:srgbClr val="0B3C5D"/>
-                </a:solidFill>
-                <a:latin typeface="Calibri"/>
-              </a:rPr>
-              <a:t>Optimización de costos</a:t>
-            </a:r>
-          </a:p>
-        </p:txBody>
-      </p:sp>
-      <p:sp>
-        <p:nvSpPr>
-          <p:cNvPr id="5" name="TextBox 4"/>
-          <p:cNvSpPr txBox="1"/>
-          <p:nvPr/>
-        </p:nvSpPr>
-        <p:spPr>
-          <a:xfrm>
-            <a:off x="658368" y="987552"/>
-            <a:ext cx="10789920" cy="457200"/>
-          </a:xfrm>
-          <a:prstGeom prst="rect">
-            <a:avLst/>
-          </a:prstGeom>
-          <a:noFill/>
-        </p:spPr>
-        <p:txBody>
-          <a:bodyPr wrap="square" anchor="t" lIns="45720" rIns="45720">
-            <a:spAutoFit/>
-          </a:bodyPr>
-          <a:lstStyle/>
-          <a:p>
-            <a:pPr algn="l"/>
-            <a:r>
-              <a:rPr sz="1500" b="0">
-                <a:solidFill>
-                  <a:srgbClr val="595959"/>
-                </a:solidFill>
-                <a:latin typeface="Calibri"/>
-              </a:rPr>
-              <a:t>Cómo bajar la factura sin perder disponibilidad</a:t>
-            </a:r>
-          </a:p>
-        </p:txBody>
-      </p:sp>
-      <p:sp>
-        <p:nvSpPr>
-          <p:cNvPr id="6" name="TextBox 5"/>
-          <p:cNvSpPr txBox="1"/>
-          <p:nvPr/>
-        </p:nvSpPr>
-        <p:spPr>
-          <a:xfrm>
-            <a:off x="457200" y="6446520"/>
-            <a:ext cx="7315200" cy="320040"/>
-          </a:xfrm>
-          <a:prstGeom prst="rect">
-            <a:avLst/>
-          </a:prstGeom>
-          <a:noFill/>
-        </p:spPr>
-        <p:txBody>
-          <a:bodyPr wrap="square" anchor="t" lIns="45720" rIns="45720">
-            <a:spAutoFit/>
-          </a:bodyPr>
-          <a:lstStyle/>
-          <a:p>
-            <a:pPr algn="l"/>
-            <a:r>
-              <a:rPr sz="1000" b="0">
-                <a:solidFill>
-                  <a:srgbClr val="595959"/>
-                </a:solidFill>
-                <a:latin typeface="Calibri"/>
-              </a:rPr>
-              <a:t>Plataforma de Atención de Enfermería · Hospital Medical Health</a:t>
-            </a:r>
-          </a:p>
-        </p:txBody>
-      </p:sp>
-      <p:sp>
-        <p:nvSpPr>
-          <p:cNvPr id="7" name="TextBox 6"/>
-          <p:cNvSpPr txBox="1"/>
-          <p:nvPr/>
-        </p:nvSpPr>
-        <p:spPr>
-          <a:xfrm>
-            <a:off x="10972800" y="6446520"/>
-            <a:ext cx="822960" cy="320040"/>
-          </a:xfrm>
-          <a:prstGeom prst="rect">
-            <a:avLst/>
-          </a:prstGeom>
-          <a:noFill/>
-        </p:spPr>
-        <p:txBody>
-          <a:bodyPr wrap="square" anchor="t" lIns="45720" rIns="45720">
-            <a:spAutoFit/>
-          </a:bodyPr>
-          <a:lstStyle/>
-          <a:p>
-            <a:pPr algn="r"/>
-            <a:r>
-              <a:rPr sz="1000" b="0">
-                <a:solidFill>
-                  <a:srgbClr val="595959"/>
-                </a:solidFill>
-                <a:latin typeface="Calibri"/>
-              </a:rPr>
-              <a:t>18</a:t>
-            </a:r>
-          </a:p>
-        </p:txBody>
-      </p:sp>
-      <p:graphicFrame>
-        <p:nvGraphicFramePr>
-          <p:cNvPr id="8" name="Chart 7"/>
-          <p:cNvGraphicFramePr>
-            <a:graphicFrameLocks noGrp="1"/>
-          </p:cNvGraphicFramePr>
-          <p:nvPr/>
-        </p:nvGraphicFramePr>
-        <p:xfrm>
-          <a:off x="457200" y="1463040"/>
-          <a:ext cx="5486400" cy="4754880"/>
-        </p:xfrm>
-        <a:graphic>
-          <a:graphicData uri="http://schemas.openxmlformats.org/drawingml/2006/chart">
-            <c:chart xmlns:c="http://schemas.openxmlformats.org/drawingml/2006/chart" r:id="rId2"/>
-          </a:graphicData>
-        </a:graphic>
-      </p:graphicFrame>
-      <p:sp>
-        <p:nvSpPr>
-          <p:cNvPr id="9" name="TextBox 8"/>
-          <p:cNvSpPr txBox="1"/>
-          <p:nvPr/>
-        </p:nvSpPr>
-        <p:spPr>
-          <a:xfrm>
-            <a:off x="6309360" y="1554480"/>
-            <a:ext cx="5486400" cy="4754880"/>
-          </a:xfrm>
-          <a:prstGeom prst="rect">
-            <a:avLst/>
-          </a:prstGeom>
-          <a:noFill/>
-        </p:spPr>
-        <p:txBody>
-          <a:bodyPr wrap="square">
-            <a:spAutoFit/>
-          </a:bodyPr>
-          <a:lstStyle/>
-          <a:p>
-            <a:pPr>
-              <a:spcAft>
-                <a:spcPts val="800"/>
-              </a:spcAft>
-            </a:pPr>
-            <a:r>
-              <a:rPr b="1" sz="1500">
-                <a:solidFill>
-                  <a:srgbClr val="0B3C5D"/>
-                </a:solidFill>
-                <a:latin typeface="Calibri"/>
-              </a:rPr>
-              <a:t>▸ Instancias reservadas: </a:t>
-            </a:r>
-            <a:r>
-              <a:rPr sz="1500">
-                <a:solidFill>
-                  <a:srgbClr val="262626"/>
-                </a:solidFill>
-                <a:latin typeface="Calibri"/>
-              </a:rPr>
-              <a:t>nodos AKS hasta −60% a 3 años</a:t>
-            </a:r>
-          </a:p>
-          <a:p>
-            <a:pPr>
-              <a:spcAft>
-                <a:spcPts val="800"/>
-              </a:spcAft>
-            </a:pPr>
-            <a:r>
-              <a:rPr b="1" sz="1500">
-                <a:solidFill>
-                  <a:srgbClr val="0B3C5D"/>
-                </a:solidFill>
-                <a:latin typeface="Calibri"/>
-              </a:rPr>
-              <a:t>▸ Capacidad reservada: </a:t>
-            </a:r>
-            <a:r>
-              <a:rPr sz="1500">
-                <a:solidFill>
-                  <a:srgbClr val="262626"/>
-                </a:solidFill>
-                <a:latin typeface="Calibri"/>
-              </a:rPr>
-              <a:t>PostgreSQL hasta −60% a 3 años</a:t>
-            </a:r>
-          </a:p>
-          <a:p>
-            <a:pPr>
-              <a:spcAft>
-                <a:spcPts val="800"/>
-              </a:spcAft>
-            </a:pPr>
-            <a:r>
-              <a:rPr b="1" sz="1500">
-                <a:solidFill>
-                  <a:srgbClr val="0B3C5D"/>
-                </a:solidFill>
-                <a:latin typeface="Calibri"/>
-              </a:rPr>
-              <a:t>▸ Basic Logs: </a:t>
-            </a:r>
-            <a:r>
-              <a:rPr sz="1500">
-                <a:solidFill>
-                  <a:srgbClr val="262626"/>
-                </a:solidFill>
-                <a:latin typeface="Calibri"/>
-              </a:rPr>
-              <a:t>logs de depuración más baratos (−40%)</a:t>
-            </a:r>
-          </a:p>
-          <a:p>
-            <a:pPr>
-              <a:spcAft>
-                <a:spcPts val="800"/>
-              </a:spcAft>
-            </a:pPr>
-            <a:r>
-              <a:rPr b="1" sz="1500">
-                <a:solidFill>
-                  <a:srgbClr val="0B3C5D"/>
-                </a:solidFill>
-                <a:latin typeface="Calibri"/>
-              </a:rPr>
-              <a:t>▸ Dev/Test: </a:t>
-            </a:r>
-            <a:r>
-              <a:rPr sz="1500">
-                <a:solidFill>
-                  <a:srgbClr val="262626"/>
-                </a:solidFill>
-                <a:latin typeface="Calibri"/>
-              </a:rPr>
-              <a:t>apagado automático noches y fines de semana</a:t>
-            </a:r>
-          </a:p>
-          <a:p>
-            <a:pPr>
-              <a:spcAft>
-                <a:spcPts val="800"/>
-              </a:spcAft>
-            </a:pPr>
-            <a:r>
-              <a:rPr b="1" sz="1500">
-                <a:solidFill>
-                  <a:srgbClr val="0B3C5D"/>
-                </a:solidFill>
-                <a:latin typeface="Calibri"/>
-              </a:rPr>
-              <a:t>▸ Autoescalado: </a:t>
-            </a:r>
-            <a:r>
-              <a:rPr sz="1500">
-                <a:solidFill>
-                  <a:srgbClr val="262626"/>
-                </a:solidFill>
-                <a:latin typeface="Calibri"/>
-              </a:rPr>
-              <a:t>3 nodos en horas valle, 12 en picos</a:t>
-            </a:r>
-          </a:p>
-          <a:p>
-            <a:pPr>
-              <a:spcAft>
-                <a:spcPts val="800"/>
-              </a:spcAft>
-            </a:pPr>
-            <a:r>
-              <a:rPr b="1" sz="1500">
-                <a:solidFill>
-                  <a:srgbClr val="0B3C5D"/>
-                </a:solidFill>
-                <a:latin typeface="Calibri"/>
-              </a:rPr>
-              <a:t>▸ Cost Management: </a:t>
-            </a:r>
-            <a:r>
-              <a:rPr sz="1500">
-                <a:solidFill>
-                  <a:srgbClr val="262626"/>
-                </a:solidFill>
-                <a:latin typeface="Calibri"/>
-              </a:rPr>
-              <a:t>presupuestos y alertas al 90%</a:t>
-            </a:r>
-          </a:p>
-        </p:txBody>
-      </p:sp>
-      <p:sp>
-        <p:nvSpPr>
-          <p:cNvPr id="10" name="TextBox 9"/>
-          <p:cNvSpPr txBox="1"/>
-          <p:nvPr/>
-        </p:nvSpPr>
-        <p:spPr>
-          <a:xfrm>
-            <a:off x="6309360" y="5669280"/>
-            <a:ext cx="5486400" cy="548640"/>
-          </a:xfrm>
-          <a:prstGeom prst="rect">
-            <a:avLst/>
-          </a:prstGeom>
-          <a:noFill/>
-        </p:spPr>
-        <p:txBody>
-          <a:bodyPr wrap="square" anchor="t" lIns="45720" rIns="45720">
-            <a:spAutoFit/>
-          </a:bodyPr>
-          <a:lstStyle/>
-          <a:p>
-            <a:pPr algn="l"/>
-            <a:r>
-              <a:rPr sz="1500" b="1">
-                <a:solidFill>
-                  <a:srgbClr val="0B3C5D"/>
-                </a:solidFill>
-                <a:latin typeface="Calibri"/>
-              </a:rPr>
-              <a:t>Ahorro: 16% a 1 año · 21% a 3 años · ≈ $27 por enfermera al mes</a:t>
-            </a:r>
-          </a:p>
-        </p:txBody>
-      </p:sp>
-    </p:spTree>
-  </p:cSld>
-  <p:clrMapOvr>
-    <a:masterClrMapping/>
-  </p:clrMapOvr>
-</p:sld>
-</file>
-
-<file path=ppt/slides/slide19.xml><?xml version="1.0" encoding="utf-8"?>
-<p:sld xmlns:a="http://schemas.openxmlformats.org/drawingml/2006/main" xmlns:p="http://schemas.openxmlformats.org/presentationml/2006/main" xmlns:r="http://schemas.openxmlformats.org/officeDocument/2006/relationships">
-  <p:cSld>
-    <p:spTree>
-      <p:nvGrpSpPr>
-        <p:cNvPr id="1" name=""/>
-        <p:cNvGrpSpPr/>
-        <p:nvPr/>
-      </p:nvGrpSpPr>
-      <p:grpSpPr/>
-      <p:sp>
-        <p:nvSpPr>
-          <p:cNvPr id="2" name="Rectangle 1"/>
-          <p:cNvSpPr/>
-          <p:nvPr/>
-        </p:nvSpPr>
-        <p:spPr>
-          <a:xfrm>
-            <a:off x="0" y="0"/>
-            <a:ext cx="12191695" cy="109728"/>
-          </a:xfrm>
-          <a:prstGeom prst="rect">
-            <a:avLst/>
-          </a:prstGeom>
-          <a:solidFill>
-            <a:srgbClr val="0B3C5D"/>
-          </a:solidFill>
-          <a:ln>
-            <a:noFill/>
-          </a:ln>
-          <a:effectLst/>
-        </p:spPr>
-        <p:style>
-          <a:lnRef idx="1">
-            <a:schemeClr val="accent1"/>
-          </a:lnRef>
-          <a:fillRef idx="3">
-            <a:schemeClr val="accent1"/>
-          </a:fillRef>
-          <a:effectRef idx="2">
-            <a:schemeClr val="accent1"/>
-          </a:effectRef>
-          <a:fontRef idx="minor">
-            <a:schemeClr val="lt1"/>
-          </a:fontRef>
-        </p:style>
-        <p:txBody>
-          <a:bodyPr rtlCol="0" anchor="ctr"/>
-          <a:lstStyle/>
-          <a:p>
-            <a:pPr algn="ctr"/>
-          </a:p>
-        </p:txBody>
-      </p:sp>
-      <p:sp>
-        <p:nvSpPr>
-          <p:cNvPr id="3" name="Rectangle 2"/>
-          <p:cNvSpPr/>
-          <p:nvPr/>
-        </p:nvSpPr>
-        <p:spPr>
-          <a:xfrm>
-            <a:off x="457200" y="411480"/>
-            <a:ext cx="82296" cy="566928"/>
-          </a:xfrm>
-          <a:prstGeom prst="rect">
-            <a:avLst/>
-          </a:prstGeom>
-          <a:solidFill>
-            <a:srgbClr val="0E9F8E"/>
-          </a:solidFill>
-          <a:ln>
-            <a:noFill/>
-          </a:ln>
-          <a:effectLst/>
-        </p:spPr>
-        <p:style>
-          <a:lnRef idx="1">
-            <a:schemeClr val="accent1"/>
-          </a:lnRef>
-          <a:fillRef idx="3">
-            <a:schemeClr val="accent1"/>
-          </a:fillRef>
-          <a:effectRef idx="2">
-            <a:schemeClr val="accent1"/>
-          </a:effectRef>
-          <a:fontRef idx="minor">
-            <a:schemeClr val="lt1"/>
-          </a:fontRef>
-        </p:style>
-        <p:txBody>
-          <a:bodyPr rtlCol="0" anchor="ctr"/>
-          <a:lstStyle/>
-          <a:p>
-            <a:pPr algn="ctr"/>
-          </a:p>
-        </p:txBody>
-      </p:sp>
-      <p:sp>
-        <p:nvSpPr>
-          <p:cNvPr id="4" name="TextBox 3"/>
-          <p:cNvSpPr txBox="1"/>
-          <p:nvPr/>
-        </p:nvSpPr>
-        <p:spPr>
-          <a:xfrm>
-            <a:off x="640080" y="320040"/>
-            <a:ext cx="10515600" cy="731520"/>
-          </a:xfrm>
-          <a:prstGeom prst="rect">
-            <a:avLst/>
-          </a:prstGeom>
-          <a:noFill/>
-        </p:spPr>
-        <p:txBody>
-          <a:bodyPr wrap="square" anchor="ctr" lIns="45720" rIns="45720">
-            <a:spAutoFit/>
-          </a:bodyPr>
-          <a:lstStyle/>
-          <a:p>
-            <a:pPr algn="l"/>
-            <a:r>
-              <a:rPr sz="3000" b="1">
-                <a:solidFill>
-                  <a:srgbClr val="0B3C5D"/>
-                </a:solidFill>
-                <a:latin typeface="Calibri"/>
-              </a:rPr>
-              <a:t>Plan de implementación</a:t>
-            </a:r>
-          </a:p>
-        </p:txBody>
-      </p:sp>
-      <p:sp>
-        <p:nvSpPr>
-          <p:cNvPr id="5" name="TextBox 4"/>
-          <p:cNvSpPr txBox="1"/>
-          <p:nvPr/>
-        </p:nvSpPr>
-        <p:spPr>
-          <a:xfrm>
-            <a:off x="658368" y="987552"/>
-            <a:ext cx="10789920" cy="457200"/>
-          </a:xfrm>
-          <a:prstGeom prst="rect">
-            <a:avLst/>
-          </a:prstGeom>
-          <a:noFill/>
-        </p:spPr>
-        <p:txBody>
-          <a:bodyPr wrap="square" anchor="t" lIns="45720" rIns="45720">
-            <a:spAutoFit/>
-          </a:bodyPr>
-          <a:lstStyle/>
-          <a:p>
-            <a:pPr algn="l"/>
-            <a:r>
-              <a:rPr sz="1500" b="0">
-                <a:solidFill>
-                  <a:srgbClr val="595959"/>
-                </a:solidFill>
-                <a:latin typeface="Calibri"/>
-              </a:rPr>
-              <a:t>26 semanas, de la preparación al despliegue para 250 enfermeras</a:t>
-            </a:r>
-          </a:p>
-        </p:txBody>
-      </p:sp>
-      <p:sp>
-        <p:nvSpPr>
-          <p:cNvPr id="6" name="TextBox 5"/>
-          <p:cNvSpPr txBox="1"/>
-          <p:nvPr/>
-        </p:nvSpPr>
-        <p:spPr>
-          <a:xfrm>
-            <a:off x="457200" y="6446520"/>
-            <a:ext cx="7315200" cy="320040"/>
-          </a:xfrm>
-          <a:prstGeom prst="rect">
-            <a:avLst/>
-          </a:prstGeom>
-          <a:noFill/>
-        </p:spPr>
-        <p:txBody>
-          <a:bodyPr wrap="square" anchor="t" lIns="45720" rIns="45720">
-            <a:spAutoFit/>
-          </a:bodyPr>
-          <a:lstStyle/>
-          <a:p>
-            <a:pPr algn="l"/>
-            <a:r>
-              <a:rPr sz="1000" b="0">
-                <a:solidFill>
-                  <a:srgbClr val="595959"/>
-                </a:solidFill>
-                <a:latin typeface="Calibri"/>
-              </a:rPr>
-              <a:t>Plataforma de Atención de Enfermería · Hospital Medical Health</a:t>
-            </a:r>
-          </a:p>
-        </p:txBody>
-      </p:sp>
-      <p:sp>
-        <p:nvSpPr>
-          <p:cNvPr id="7" name="TextBox 6"/>
-          <p:cNvSpPr txBox="1"/>
-          <p:nvPr/>
-        </p:nvSpPr>
-        <p:spPr>
-          <a:xfrm>
-            <a:off x="10972800" y="6446520"/>
-            <a:ext cx="822960" cy="320040"/>
-          </a:xfrm>
-          <a:prstGeom prst="rect">
-            <a:avLst/>
-          </a:prstGeom>
-          <a:noFill/>
-        </p:spPr>
-        <p:txBody>
-          <a:bodyPr wrap="square" anchor="t" lIns="45720" rIns="45720">
-            <a:spAutoFit/>
-          </a:bodyPr>
-          <a:lstStyle/>
-          <a:p>
-            <a:pPr algn="r"/>
-            <a:r>
-              <a:rPr sz="1000" b="0">
-                <a:solidFill>
-                  <a:srgbClr val="595959"/>
-                </a:solidFill>
-                <a:latin typeface="Calibri"/>
-              </a:rPr>
-              <a:t>19</a:t>
-            </a:r>
-          </a:p>
-        </p:txBody>
-      </p:sp>
-      <p:pic>
-        <p:nvPicPr>
-          <p:cNvPr id="8" name="Picture 7" descr="07-cronograma.png"/>
-          <p:cNvPicPr>
-            <a:picLocks noChangeAspect="1"/>
-          </p:cNvPicPr>
-          <p:nvPr/>
-        </p:nvPicPr>
-        <p:blipFill>
-          <a:blip r:embed="rId2"/>
-          <a:stretch>
-            <a:fillRect/>
-          </a:stretch>
-        </p:blipFill>
-        <p:spPr>
-          <a:xfrm>
-            <a:off x="715754" y="1371600"/>
-            <a:ext cx="6798091" cy="5029200"/>
-          </a:xfrm>
-          <a:prstGeom prst="rect">
-            <a:avLst/>
-          </a:prstGeom>
-        </p:spPr>
-      </p:pic>
-      <p:sp>
-        <p:nvSpPr>
-          <p:cNvPr id="9" name="TextBox 8"/>
-          <p:cNvSpPr txBox="1"/>
-          <p:nvPr/>
-        </p:nvSpPr>
-        <p:spPr>
-          <a:xfrm>
-            <a:off x="8046720" y="1554480"/>
-            <a:ext cx="3840480" cy="4846320"/>
-          </a:xfrm>
-          <a:prstGeom prst="rect">
-            <a:avLst/>
-          </a:prstGeom>
-          <a:noFill/>
-        </p:spPr>
-        <p:txBody>
-          <a:bodyPr wrap="square">
-            <a:spAutoFit/>
-          </a:bodyPr>
-          <a:lstStyle/>
-          <a:p>
-            <a:pPr>
-              <a:spcAft>
-                <a:spcPts val="500"/>
-              </a:spcAft>
-            </a:pPr>
-            <a:r>
-              <a:rPr b="1" sz="1400">
-                <a:solidFill>
-                  <a:srgbClr val="0B3C5D"/>
-                </a:solidFill>
-                <a:latin typeface="Calibri"/>
-              </a:rPr>
-              <a:t>▸ Sem 1-2: </a:t>
-            </a:r>
-            <a:r>
-              <a:rPr sz="1400">
-                <a:solidFill>
-                  <a:srgbClr val="262626"/>
-                </a:solidFill>
-                <a:latin typeface="Calibri"/>
-              </a:rPr>
-              <a:t>landing zone, IaC y CI/CD</a:t>
-            </a:r>
-          </a:p>
-          <a:p>
-            <a:pPr>
-              <a:spcAft>
-                <a:spcPts val="500"/>
-              </a:spcAft>
-            </a:pPr>
-            <a:r>
-              <a:rPr b="1" sz="1400">
-                <a:solidFill>
-                  <a:srgbClr val="0B3C5D"/>
-                </a:solidFill>
-                <a:latin typeface="Calibri"/>
-              </a:rPr>
-              <a:t>▸ Sem 3-8: </a:t>
-            </a:r>
-            <a:r>
-              <a:rPr sz="1400">
-                <a:solidFill>
-                  <a:srgbClr val="262626"/>
-                </a:solidFill>
-                <a:latin typeface="Calibri"/>
-              </a:rPr>
-              <a:t>plataforma base y seguridad</a:t>
-            </a:r>
-          </a:p>
-          <a:p>
-            <a:pPr>
-              <a:spcAft>
-                <a:spcPts val="500"/>
-              </a:spcAft>
-            </a:pPr>
-            <a:r>
-              <a:rPr b="1" sz="1400">
-                <a:solidFill>
-                  <a:srgbClr val="0B3C5D"/>
-                </a:solidFill>
-                <a:latin typeface="Calibri"/>
-              </a:rPr>
-              <a:t>▸ Sem 9-13: </a:t>
-            </a:r>
-            <a:r>
-              <a:rPr sz="1400">
-                <a:solidFill>
-                  <a:srgbClr val="262626"/>
-                </a:solidFill>
-                <a:latin typeface="Calibri"/>
-              </a:rPr>
-              <a:t>HU01 y HU03</a:t>
-            </a:r>
-          </a:p>
-          <a:p>
-            <a:pPr>
-              <a:spcAft>
-                <a:spcPts val="500"/>
-              </a:spcAft>
-            </a:pPr>
-            <a:r>
-              <a:rPr b="1" sz="1400">
-                <a:solidFill>
-                  <a:srgbClr val="0B3C5D"/>
-                </a:solidFill>
-                <a:latin typeface="Calibri"/>
-              </a:rPr>
-              <a:t>▸ Sem 13-19: </a:t>
-            </a:r>
-            <a:r>
-              <a:rPr sz="1400">
-                <a:solidFill>
-                  <a:srgbClr val="262626"/>
-                </a:solidFill>
-                <a:latin typeface="Calibri"/>
-              </a:rPr>
-              <a:t>HU02 y HU04</a:t>
-            </a:r>
-          </a:p>
-          <a:p>
-            <a:pPr>
-              <a:spcAft>
-                <a:spcPts val="500"/>
-              </a:spcAft>
-            </a:pPr>
-            <a:r>
-              <a:rPr b="1" sz="1400">
-                <a:solidFill>
-                  <a:srgbClr val="0B3C5D"/>
-                </a:solidFill>
-                <a:latin typeface="Calibri"/>
-              </a:rPr>
-              <a:t>▸ Sem 19-23: </a:t>
-            </a:r>
-            <a:r>
-              <a:rPr sz="1400">
-                <a:solidFill>
-                  <a:srgbClr val="262626"/>
-                </a:solidFill>
-                <a:latin typeface="Calibri"/>
-              </a:rPr>
-              <a:t>pruebas y piloto con 25 enfermeras</a:t>
-            </a:r>
-          </a:p>
-          <a:p>
-            <a:pPr>
-              <a:spcAft>
-                <a:spcPts val="500"/>
-              </a:spcAft>
-            </a:pPr>
-            <a:r>
-              <a:rPr b="1" sz="1400">
-                <a:solidFill>
-                  <a:srgbClr val="0B3C5D"/>
-                </a:solidFill>
-                <a:latin typeface="Calibri"/>
-              </a:rPr>
-              <a:t>▸ Sem 24-26: </a:t>
-            </a:r>
-            <a:r>
-              <a:rPr sz="1400">
-                <a:solidFill>
-                  <a:srgbClr val="262626"/>
-                </a:solidFill>
-                <a:latin typeface="Calibri"/>
-              </a:rPr>
-              <a:t>salida gradual a 250 enfermeras</a:t>
-            </a:r>
-          </a:p>
-          <a:p>
-            <a:pPr>
-              <a:spcAft>
-                <a:spcPts val="500"/>
-              </a:spcAft>
-            </a:pPr>
-            <a:r>
-              <a:rPr b="1" sz="1400">
-                <a:solidFill>
-                  <a:srgbClr val="0B3C5D"/>
-                </a:solidFill>
-                <a:latin typeface="Calibri"/>
-              </a:rPr>
-              <a:t>▸ Fase 2: </a:t>
-            </a:r>
-            <a:r>
-              <a:rPr sz="1400">
-                <a:solidFill>
-                  <a:srgbClr val="262626"/>
-                </a:solidFill>
-                <a:latin typeface="Calibri"/>
-              </a:rPr>
-              <a:t>canal de pacientes</a:t>
             </a:r>
           </a:p>
         </p:txBody>
@@ -13712,7 +15217,7 @@
                 </a:solidFill>
                 <a:latin typeface="Calibri"/>
               </a:rPr>
-              <a:t>Riesgos y mitigaciones</a:t>
+              <a:t>Optimización de costos</a:t>
             </a:r>
           </a:p>
         </p:txBody>
@@ -13720,6 +15225,41 @@
       <p:sp>
         <p:nvSpPr>
           <p:cNvPr id="5" name="TextBox 4"/>
+          <p:cNvSpPr txBox="1"/>
+          <p:nvPr/>
+        </p:nvSpPr>
+        <p:spPr>
+          <a:xfrm>
+            <a:off x="658368" y="987552"/>
+            <a:ext cx="10789920" cy="457200"/>
+          </a:xfrm>
+          <a:prstGeom prst="rect">
+            <a:avLst/>
+          </a:prstGeom>
+          <a:noFill/>
+        </p:spPr>
+        <p:txBody>
+          <a:bodyPr wrap="square" anchor="t" lIns="45720" rIns="45720">
+            <a:spAutoFit/>
+          </a:bodyPr>
+          <a:lstStyle/>
+          <a:p>
+            <a:pPr algn="l"/>
+            <a:r>
+              <a:rPr sz="1500" b="0">
+                <a:solidFill>
+                  <a:srgbClr val="595959"/>
+                </a:solidFill>
+                <a:latin typeface="Calibri"/>
+              </a:rPr>
+              <a:t>Cómo bajar la factura sin perder disponibilidad</a:t>
+            </a:r>
+          </a:p>
+        </p:txBody>
+      </p:sp>
+      <p:sp>
+        <p:nvSpPr>
+          <p:cNvPr id="6" name="TextBox 5"/>
           <p:cNvSpPr txBox="1"/>
           <p:nvPr/>
         </p:nvSpPr>
@@ -13754,7 +15294,7 @@
       </p:sp>
       <p:sp>
         <p:nvSpPr>
-          <p:cNvPr id="6" name="TextBox 5"/>
+          <p:cNvPr id="7" name="TextBox 6"/>
           <p:cNvSpPr txBox="1"/>
           <p:nvPr/>
         </p:nvSpPr>
@@ -13783,6 +15323,2358 @@
                 <a:latin typeface="Calibri"/>
               </a:rPr>
               <a:t>20</a:t>
+            </a:r>
+          </a:p>
+        </p:txBody>
+      </p:sp>
+      <p:graphicFrame>
+        <p:nvGraphicFramePr>
+          <p:cNvPr id="8" name="Chart 7"/>
+          <p:cNvGraphicFramePr>
+            <a:graphicFrameLocks noGrp="1"/>
+          </p:cNvGraphicFramePr>
+          <p:nvPr/>
+        </p:nvGraphicFramePr>
+        <p:xfrm>
+          <a:off x="457200" y="1463040"/>
+          <a:ext cx="5486400" cy="4754880"/>
+        </p:xfrm>
+        <a:graphic>
+          <a:graphicData uri="http://schemas.openxmlformats.org/drawingml/2006/chart">
+            <c:chart xmlns:c="http://schemas.openxmlformats.org/drawingml/2006/chart" r:id="rId2"/>
+          </a:graphicData>
+        </a:graphic>
+      </p:graphicFrame>
+      <p:sp>
+        <p:nvSpPr>
+          <p:cNvPr id="9" name="TextBox 8"/>
+          <p:cNvSpPr txBox="1"/>
+          <p:nvPr/>
+        </p:nvSpPr>
+        <p:spPr>
+          <a:xfrm>
+            <a:off x="6309360" y="1554480"/>
+            <a:ext cx="5486400" cy="4023360"/>
+          </a:xfrm>
+          <a:prstGeom prst="rect">
+            <a:avLst/>
+          </a:prstGeom>
+          <a:noFill/>
+        </p:spPr>
+        <p:txBody>
+          <a:bodyPr wrap="square">
+            <a:spAutoFit/>
+          </a:bodyPr>
+          <a:lstStyle/>
+          <a:p>
+            <a:pPr>
+              <a:spcAft>
+                <a:spcPts val="800"/>
+              </a:spcAft>
+            </a:pPr>
+            <a:r>
+              <a:rPr b="1" sz="1600">
+                <a:solidFill>
+                  <a:srgbClr val="0B3C5D"/>
+                </a:solidFill>
+                <a:latin typeface="Calibri"/>
+              </a:rPr>
+              <a:t>▸ Instancias reservadas: </a:t>
+            </a:r>
+            <a:r>
+              <a:rPr sz="1600">
+                <a:solidFill>
+                  <a:srgbClr val="262626"/>
+                </a:solidFill>
+                <a:latin typeface="Calibri"/>
+              </a:rPr>
+              <a:t>nodos AKS hasta −60% a 3 años</a:t>
+            </a:r>
+          </a:p>
+          <a:p>
+            <a:pPr>
+              <a:spcAft>
+                <a:spcPts val="800"/>
+              </a:spcAft>
+            </a:pPr>
+            <a:r>
+              <a:rPr b="1" sz="1600">
+                <a:solidFill>
+                  <a:srgbClr val="0B3C5D"/>
+                </a:solidFill>
+                <a:latin typeface="Calibri"/>
+              </a:rPr>
+              <a:t>▸ Capacidad reservada: </a:t>
+            </a:r>
+            <a:r>
+              <a:rPr sz="1600">
+                <a:solidFill>
+                  <a:srgbClr val="262626"/>
+                </a:solidFill>
+                <a:latin typeface="Calibri"/>
+              </a:rPr>
+              <a:t>PostgreSQL hasta −60% a 3 años</a:t>
+            </a:r>
+          </a:p>
+          <a:p>
+            <a:pPr>
+              <a:spcAft>
+                <a:spcPts val="800"/>
+              </a:spcAft>
+            </a:pPr>
+            <a:r>
+              <a:rPr b="1" sz="1600">
+                <a:solidFill>
+                  <a:srgbClr val="0B3C5D"/>
+                </a:solidFill>
+                <a:latin typeface="Calibri"/>
+              </a:rPr>
+              <a:t>▸ Basic Logs: </a:t>
+            </a:r>
+            <a:r>
+              <a:rPr sz="1600">
+                <a:solidFill>
+                  <a:srgbClr val="262626"/>
+                </a:solidFill>
+                <a:latin typeface="Calibri"/>
+              </a:rPr>
+              <a:t>logs de depuración más baratos (−40%)</a:t>
+            </a:r>
+          </a:p>
+          <a:p>
+            <a:pPr>
+              <a:spcAft>
+                <a:spcPts val="800"/>
+              </a:spcAft>
+            </a:pPr>
+            <a:r>
+              <a:rPr b="1" sz="1600">
+                <a:solidFill>
+                  <a:srgbClr val="0B3C5D"/>
+                </a:solidFill>
+                <a:latin typeface="Calibri"/>
+              </a:rPr>
+              <a:t>▸ Dev/Test: </a:t>
+            </a:r>
+            <a:r>
+              <a:rPr sz="1600">
+                <a:solidFill>
+                  <a:srgbClr val="262626"/>
+                </a:solidFill>
+                <a:latin typeface="Calibri"/>
+              </a:rPr>
+              <a:t>apagado automático noches y fines de semana</a:t>
+            </a:r>
+          </a:p>
+          <a:p>
+            <a:pPr>
+              <a:spcAft>
+                <a:spcPts val="800"/>
+              </a:spcAft>
+            </a:pPr>
+            <a:r>
+              <a:rPr b="1" sz="1600">
+                <a:solidFill>
+                  <a:srgbClr val="0B3C5D"/>
+                </a:solidFill>
+                <a:latin typeface="Calibri"/>
+              </a:rPr>
+              <a:t>▸ Autoescalado: </a:t>
+            </a:r>
+            <a:r>
+              <a:rPr sz="1600">
+                <a:solidFill>
+                  <a:srgbClr val="262626"/>
+                </a:solidFill>
+                <a:latin typeface="Calibri"/>
+              </a:rPr>
+              <a:t>3 nodos en horas valle, 12 en picos</a:t>
+            </a:r>
+          </a:p>
+          <a:p>
+            <a:pPr>
+              <a:spcAft>
+                <a:spcPts val="800"/>
+              </a:spcAft>
+            </a:pPr>
+            <a:r>
+              <a:rPr b="1" sz="1600">
+                <a:solidFill>
+                  <a:srgbClr val="0B3C5D"/>
+                </a:solidFill>
+                <a:latin typeface="Calibri"/>
+              </a:rPr>
+              <a:t>▸ Cost Management: </a:t>
+            </a:r>
+            <a:r>
+              <a:rPr sz="1600">
+                <a:solidFill>
+                  <a:srgbClr val="262626"/>
+                </a:solidFill>
+                <a:latin typeface="Calibri"/>
+              </a:rPr>
+              <a:t>presupuestos y alertas al 90%</a:t>
+            </a:r>
+          </a:p>
+        </p:txBody>
+      </p:sp>
+      <p:sp>
+        <p:nvSpPr>
+          <p:cNvPr id="10" name="Rectangle 9"/>
+          <p:cNvSpPr/>
+          <p:nvPr/>
+        </p:nvSpPr>
+        <p:spPr>
+          <a:xfrm>
+            <a:off x="6309360" y="5349240"/>
+            <a:ext cx="5394960" cy="914400"/>
+          </a:xfrm>
+          <a:prstGeom prst="rect">
+            <a:avLst/>
+          </a:prstGeom>
+          <a:solidFill>
+            <a:srgbClr val="0B3C5D"/>
+          </a:solidFill>
+          <a:ln>
+            <a:noFill/>
+          </a:ln>
+          <a:effectLst/>
+        </p:spPr>
+        <p:style>
+          <a:lnRef idx="1">
+            <a:schemeClr val="accent1"/>
+          </a:lnRef>
+          <a:fillRef idx="3">
+            <a:schemeClr val="accent1"/>
+          </a:fillRef>
+          <a:effectRef idx="2">
+            <a:schemeClr val="accent1"/>
+          </a:effectRef>
+          <a:fontRef idx="minor">
+            <a:schemeClr val="lt1"/>
+          </a:fontRef>
+        </p:style>
+        <p:txBody>
+          <a:bodyPr rtlCol="0" anchor="ctr"/>
+          <a:lstStyle/>
+          <a:p>
+            <a:pPr algn="ctr"/>
+          </a:p>
+        </p:txBody>
+      </p:sp>
+      <p:sp>
+        <p:nvSpPr>
+          <p:cNvPr id="11" name="TextBox 10"/>
+          <p:cNvSpPr txBox="1"/>
+          <p:nvPr/>
+        </p:nvSpPr>
+        <p:spPr>
+          <a:xfrm>
+            <a:off x="6400800" y="5349240"/>
+            <a:ext cx="5212080" cy="914400"/>
+          </a:xfrm>
+          <a:prstGeom prst="rect">
+            <a:avLst/>
+          </a:prstGeom>
+          <a:noFill/>
+        </p:spPr>
+        <p:txBody>
+          <a:bodyPr wrap="square" anchor="ctr" lIns="45720" rIns="45720">
+            <a:spAutoFit/>
+          </a:bodyPr>
+          <a:lstStyle/>
+          <a:p>
+            <a:pPr algn="ctr"/>
+            <a:r>
+              <a:rPr sz="1700" b="1">
+                <a:solidFill>
+                  <a:srgbClr val="FFFFFF"/>
+                </a:solidFill>
+                <a:latin typeface="Calibri"/>
+              </a:rPr>
+              <a:t>Ahorro: 16% a 1 año · 21% a 3 años</a:t>
+            </a:r>
+          </a:p>
+          <a:p>
+            <a:pPr algn="ctr"/>
+            <a:r>
+              <a:rPr sz="1700" b="1">
+                <a:solidFill>
+                  <a:srgbClr val="FFFFFF"/>
+                </a:solidFill>
+                <a:latin typeface="Calibri"/>
+              </a:rPr>
+              <a:t>≈ $87.324 COP por enfermera al mes</a:t>
+            </a:r>
+          </a:p>
+        </p:txBody>
+      </p:sp>
+    </p:spTree>
+  </p:cSld>
+  <p:clrMapOvr>
+    <a:masterClrMapping/>
+  </p:clrMapOvr>
+</p:sld>
+</file>
+
+<file path=ppt/slides/slide21.xml><?xml version="1.0" encoding="utf-8"?>
+<p:sld xmlns:a="http://schemas.openxmlformats.org/drawingml/2006/main" xmlns:p="http://schemas.openxmlformats.org/presentationml/2006/main" xmlns:r="http://schemas.openxmlformats.org/officeDocument/2006/relationships">
+  <p:cSld>
+    <p:spTree>
+      <p:nvGrpSpPr>
+        <p:cNvPr id="1" name=""/>
+        <p:cNvGrpSpPr/>
+        <p:nvPr/>
+      </p:nvGrpSpPr>
+      <p:grpSpPr/>
+      <p:sp>
+        <p:nvSpPr>
+          <p:cNvPr id="2" name="Rectangle 1"/>
+          <p:cNvSpPr/>
+          <p:nvPr/>
+        </p:nvSpPr>
+        <p:spPr>
+          <a:xfrm>
+            <a:off x="0" y="0"/>
+            <a:ext cx="12191695" cy="109728"/>
+          </a:xfrm>
+          <a:prstGeom prst="rect">
+            <a:avLst/>
+          </a:prstGeom>
+          <a:solidFill>
+            <a:srgbClr val="0B3C5D"/>
+          </a:solidFill>
+          <a:ln>
+            <a:noFill/>
+          </a:ln>
+          <a:effectLst/>
+        </p:spPr>
+        <p:style>
+          <a:lnRef idx="1">
+            <a:schemeClr val="accent1"/>
+          </a:lnRef>
+          <a:fillRef idx="3">
+            <a:schemeClr val="accent1"/>
+          </a:fillRef>
+          <a:effectRef idx="2">
+            <a:schemeClr val="accent1"/>
+          </a:effectRef>
+          <a:fontRef idx="minor">
+            <a:schemeClr val="lt1"/>
+          </a:fontRef>
+        </p:style>
+        <p:txBody>
+          <a:bodyPr rtlCol="0" anchor="ctr"/>
+          <a:lstStyle/>
+          <a:p>
+            <a:pPr algn="ctr"/>
+          </a:p>
+        </p:txBody>
+      </p:sp>
+      <p:sp>
+        <p:nvSpPr>
+          <p:cNvPr id="3" name="Rectangle 2"/>
+          <p:cNvSpPr/>
+          <p:nvPr/>
+        </p:nvSpPr>
+        <p:spPr>
+          <a:xfrm>
+            <a:off x="457200" y="411480"/>
+            <a:ext cx="82296" cy="566928"/>
+          </a:xfrm>
+          <a:prstGeom prst="rect">
+            <a:avLst/>
+          </a:prstGeom>
+          <a:solidFill>
+            <a:srgbClr val="0E9F8E"/>
+          </a:solidFill>
+          <a:ln>
+            <a:noFill/>
+          </a:ln>
+          <a:effectLst/>
+        </p:spPr>
+        <p:style>
+          <a:lnRef idx="1">
+            <a:schemeClr val="accent1"/>
+          </a:lnRef>
+          <a:fillRef idx="3">
+            <a:schemeClr val="accent1"/>
+          </a:fillRef>
+          <a:effectRef idx="2">
+            <a:schemeClr val="accent1"/>
+          </a:effectRef>
+          <a:fontRef idx="minor">
+            <a:schemeClr val="lt1"/>
+          </a:fontRef>
+        </p:style>
+        <p:txBody>
+          <a:bodyPr rtlCol="0" anchor="ctr"/>
+          <a:lstStyle/>
+          <a:p>
+            <a:pPr algn="ctr"/>
+          </a:p>
+        </p:txBody>
+      </p:sp>
+      <p:sp>
+        <p:nvSpPr>
+          <p:cNvPr id="4" name="TextBox 3"/>
+          <p:cNvSpPr txBox="1"/>
+          <p:nvPr/>
+        </p:nvSpPr>
+        <p:spPr>
+          <a:xfrm>
+            <a:off x="640080" y="320040"/>
+            <a:ext cx="10515600" cy="731520"/>
+          </a:xfrm>
+          <a:prstGeom prst="rect">
+            <a:avLst/>
+          </a:prstGeom>
+          <a:noFill/>
+        </p:spPr>
+        <p:txBody>
+          <a:bodyPr wrap="square" anchor="ctr" lIns="45720" rIns="45720">
+            <a:spAutoFit/>
+          </a:bodyPr>
+          <a:lstStyle/>
+          <a:p>
+            <a:pPr algn="l"/>
+            <a:r>
+              <a:rPr sz="3000" b="1">
+                <a:solidFill>
+                  <a:srgbClr val="0B3C5D"/>
+                </a:solidFill>
+                <a:latin typeface="Calibri"/>
+              </a:rPr>
+              <a:t>Plan de implementación</a:t>
+            </a:r>
+          </a:p>
+        </p:txBody>
+      </p:sp>
+      <p:sp>
+        <p:nvSpPr>
+          <p:cNvPr id="5" name="TextBox 4"/>
+          <p:cNvSpPr txBox="1"/>
+          <p:nvPr/>
+        </p:nvSpPr>
+        <p:spPr>
+          <a:xfrm>
+            <a:off x="658368" y="987552"/>
+            <a:ext cx="10789920" cy="457200"/>
+          </a:xfrm>
+          <a:prstGeom prst="rect">
+            <a:avLst/>
+          </a:prstGeom>
+          <a:noFill/>
+        </p:spPr>
+        <p:txBody>
+          <a:bodyPr wrap="square" anchor="t" lIns="45720" rIns="45720">
+            <a:spAutoFit/>
+          </a:bodyPr>
+          <a:lstStyle/>
+          <a:p>
+            <a:pPr algn="l"/>
+            <a:r>
+              <a:rPr sz="1500" b="0">
+                <a:solidFill>
+                  <a:srgbClr val="595959"/>
+                </a:solidFill>
+                <a:latin typeface="Calibri"/>
+              </a:rPr>
+              <a:t>26 semanas hasta llegar a las 250 enfermeras · después: canal de pacientes (fase 2)</a:t>
+            </a:r>
+          </a:p>
+        </p:txBody>
+      </p:sp>
+      <p:sp>
+        <p:nvSpPr>
+          <p:cNvPr id="6" name="TextBox 5"/>
+          <p:cNvSpPr txBox="1"/>
+          <p:nvPr/>
+        </p:nvSpPr>
+        <p:spPr>
+          <a:xfrm>
+            <a:off x="457200" y="6446520"/>
+            <a:ext cx="7315200" cy="320040"/>
+          </a:xfrm>
+          <a:prstGeom prst="rect">
+            <a:avLst/>
+          </a:prstGeom>
+          <a:noFill/>
+        </p:spPr>
+        <p:txBody>
+          <a:bodyPr wrap="square" anchor="t" lIns="45720" rIns="45720">
+            <a:spAutoFit/>
+          </a:bodyPr>
+          <a:lstStyle/>
+          <a:p>
+            <a:pPr algn="l"/>
+            <a:r>
+              <a:rPr sz="1000" b="0">
+                <a:solidFill>
+                  <a:srgbClr val="595959"/>
+                </a:solidFill>
+                <a:latin typeface="Calibri"/>
+              </a:rPr>
+              <a:t>Plataforma de Atención de Enfermería · Hospital Medical Health</a:t>
+            </a:r>
+          </a:p>
+        </p:txBody>
+      </p:sp>
+      <p:sp>
+        <p:nvSpPr>
+          <p:cNvPr id="7" name="TextBox 6"/>
+          <p:cNvSpPr txBox="1"/>
+          <p:nvPr/>
+        </p:nvSpPr>
+        <p:spPr>
+          <a:xfrm>
+            <a:off x="10972800" y="6446520"/>
+            <a:ext cx="822960" cy="320040"/>
+          </a:xfrm>
+          <a:prstGeom prst="rect">
+            <a:avLst/>
+          </a:prstGeom>
+          <a:noFill/>
+        </p:spPr>
+        <p:txBody>
+          <a:bodyPr wrap="square" anchor="t" lIns="45720" rIns="45720">
+            <a:spAutoFit/>
+          </a:bodyPr>
+          <a:lstStyle/>
+          <a:p>
+            <a:pPr algn="r"/>
+            <a:r>
+              <a:rPr sz="1000" b="0">
+                <a:solidFill>
+                  <a:srgbClr val="595959"/>
+                </a:solidFill>
+                <a:latin typeface="Calibri"/>
+              </a:rPr>
+              <a:t>21</a:t>
+            </a:r>
+          </a:p>
+        </p:txBody>
+      </p:sp>
+      <p:sp>
+        <p:nvSpPr>
+          <p:cNvPr id="8" name="TextBox 7"/>
+          <p:cNvSpPr txBox="1"/>
+          <p:nvPr/>
+        </p:nvSpPr>
+        <p:spPr>
+          <a:xfrm>
+            <a:off x="4297680" y="1417320"/>
+            <a:ext cx="562707" cy="320040"/>
+          </a:xfrm>
+          <a:prstGeom prst="rect">
+            <a:avLst/>
+          </a:prstGeom>
+          <a:noFill/>
+        </p:spPr>
+        <p:txBody>
+          <a:bodyPr wrap="square" anchor="t" lIns="45720" rIns="45720">
+            <a:spAutoFit/>
+          </a:bodyPr>
+          <a:lstStyle/>
+          <a:p>
+            <a:pPr algn="l"/>
+            <a:r>
+              <a:rPr sz="1300" b="1">
+                <a:solidFill>
+                  <a:srgbClr val="595959"/>
+                </a:solidFill>
+                <a:latin typeface="Calibri"/>
+              </a:rPr>
+              <a:t>S1</a:t>
+            </a:r>
+          </a:p>
+        </p:txBody>
+      </p:sp>
+      <p:sp>
+        <p:nvSpPr>
+          <p:cNvPr id="9" name="TextBox 8"/>
+          <p:cNvSpPr txBox="1"/>
+          <p:nvPr/>
+        </p:nvSpPr>
+        <p:spPr>
+          <a:xfrm>
+            <a:off x="4860387" y="1417320"/>
+            <a:ext cx="562707" cy="320040"/>
+          </a:xfrm>
+          <a:prstGeom prst="rect">
+            <a:avLst/>
+          </a:prstGeom>
+          <a:noFill/>
+        </p:spPr>
+        <p:txBody>
+          <a:bodyPr wrap="square" anchor="t" lIns="45720" rIns="45720">
+            <a:spAutoFit/>
+          </a:bodyPr>
+          <a:lstStyle/>
+          <a:p>
+            <a:pPr algn="l"/>
+            <a:r>
+              <a:rPr sz="1300" b="1">
+                <a:solidFill>
+                  <a:srgbClr val="595959"/>
+                </a:solidFill>
+                <a:latin typeface="Calibri"/>
+              </a:rPr>
+              <a:t>S3</a:t>
+            </a:r>
+          </a:p>
+        </p:txBody>
+      </p:sp>
+      <p:sp>
+        <p:nvSpPr>
+          <p:cNvPr id="10" name="TextBox 9"/>
+          <p:cNvSpPr txBox="1"/>
+          <p:nvPr/>
+        </p:nvSpPr>
+        <p:spPr>
+          <a:xfrm>
+            <a:off x="5423095" y="1417320"/>
+            <a:ext cx="562707" cy="320040"/>
+          </a:xfrm>
+          <a:prstGeom prst="rect">
+            <a:avLst/>
+          </a:prstGeom>
+          <a:noFill/>
+        </p:spPr>
+        <p:txBody>
+          <a:bodyPr wrap="square" anchor="t" lIns="45720" rIns="45720">
+            <a:spAutoFit/>
+          </a:bodyPr>
+          <a:lstStyle/>
+          <a:p>
+            <a:pPr algn="l"/>
+            <a:r>
+              <a:rPr sz="1300" b="1">
+                <a:solidFill>
+                  <a:srgbClr val="595959"/>
+                </a:solidFill>
+                <a:latin typeface="Calibri"/>
+              </a:rPr>
+              <a:t>S5</a:t>
+            </a:r>
+          </a:p>
+        </p:txBody>
+      </p:sp>
+      <p:sp>
+        <p:nvSpPr>
+          <p:cNvPr id="11" name="TextBox 10"/>
+          <p:cNvSpPr txBox="1"/>
+          <p:nvPr/>
+        </p:nvSpPr>
+        <p:spPr>
+          <a:xfrm>
+            <a:off x="5985803" y="1417320"/>
+            <a:ext cx="562707" cy="320040"/>
+          </a:xfrm>
+          <a:prstGeom prst="rect">
+            <a:avLst/>
+          </a:prstGeom>
+          <a:noFill/>
+        </p:spPr>
+        <p:txBody>
+          <a:bodyPr wrap="square" anchor="t" lIns="45720" rIns="45720">
+            <a:spAutoFit/>
+          </a:bodyPr>
+          <a:lstStyle/>
+          <a:p>
+            <a:pPr algn="l"/>
+            <a:r>
+              <a:rPr sz="1300" b="1">
+                <a:solidFill>
+                  <a:srgbClr val="595959"/>
+                </a:solidFill>
+                <a:latin typeface="Calibri"/>
+              </a:rPr>
+              <a:t>S7</a:t>
+            </a:r>
+          </a:p>
+        </p:txBody>
+      </p:sp>
+      <p:sp>
+        <p:nvSpPr>
+          <p:cNvPr id="12" name="TextBox 11"/>
+          <p:cNvSpPr txBox="1"/>
+          <p:nvPr/>
+        </p:nvSpPr>
+        <p:spPr>
+          <a:xfrm>
+            <a:off x="6548510" y="1417320"/>
+            <a:ext cx="562707" cy="320040"/>
+          </a:xfrm>
+          <a:prstGeom prst="rect">
+            <a:avLst/>
+          </a:prstGeom>
+          <a:noFill/>
+        </p:spPr>
+        <p:txBody>
+          <a:bodyPr wrap="square" anchor="t" lIns="45720" rIns="45720">
+            <a:spAutoFit/>
+          </a:bodyPr>
+          <a:lstStyle/>
+          <a:p>
+            <a:pPr algn="l"/>
+            <a:r>
+              <a:rPr sz="1300" b="1">
+                <a:solidFill>
+                  <a:srgbClr val="595959"/>
+                </a:solidFill>
+                <a:latin typeface="Calibri"/>
+              </a:rPr>
+              <a:t>S9</a:t>
+            </a:r>
+          </a:p>
+        </p:txBody>
+      </p:sp>
+      <p:sp>
+        <p:nvSpPr>
+          <p:cNvPr id="13" name="TextBox 12"/>
+          <p:cNvSpPr txBox="1"/>
+          <p:nvPr/>
+        </p:nvSpPr>
+        <p:spPr>
+          <a:xfrm>
+            <a:off x="7111218" y="1417320"/>
+            <a:ext cx="562707" cy="320040"/>
+          </a:xfrm>
+          <a:prstGeom prst="rect">
+            <a:avLst/>
+          </a:prstGeom>
+          <a:noFill/>
+        </p:spPr>
+        <p:txBody>
+          <a:bodyPr wrap="square" anchor="t" lIns="45720" rIns="45720">
+            <a:spAutoFit/>
+          </a:bodyPr>
+          <a:lstStyle/>
+          <a:p>
+            <a:pPr algn="l"/>
+            <a:r>
+              <a:rPr sz="1300" b="1">
+                <a:solidFill>
+                  <a:srgbClr val="595959"/>
+                </a:solidFill>
+                <a:latin typeface="Calibri"/>
+              </a:rPr>
+              <a:t>S11</a:t>
+            </a:r>
+          </a:p>
+        </p:txBody>
+      </p:sp>
+      <p:sp>
+        <p:nvSpPr>
+          <p:cNvPr id="14" name="TextBox 13"/>
+          <p:cNvSpPr txBox="1"/>
+          <p:nvPr/>
+        </p:nvSpPr>
+        <p:spPr>
+          <a:xfrm>
+            <a:off x="7673926" y="1417320"/>
+            <a:ext cx="562707" cy="320040"/>
+          </a:xfrm>
+          <a:prstGeom prst="rect">
+            <a:avLst/>
+          </a:prstGeom>
+          <a:noFill/>
+        </p:spPr>
+        <p:txBody>
+          <a:bodyPr wrap="square" anchor="t" lIns="45720" rIns="45720">
+            <a:spAutoFit/>
+          </a:bodyPr>
+          <a:lstStyle/>
+          <a:p>
+            <a:pPr algn="l"/>
+            <a:r>
+              <a:rPr sz="1300" b="1">
+                <a:solidFill>
+                  <a:srgbClr val="595959"/>
+                </a:solidFill>
+                <a:latin typeface="Calibri"/>
+              </a:rPr>
+              <a:t>S13</a:t>
+            </a:r>
+          </a:p>
+        </p:txBody>
+      </p:sp>
+      <p:sp>
+        <p:nvSpPr>
+          <p:cNvPr id="15" name="TextBox 14"/>
+          <p:cNvSpPr txBox="1"/>
+          <p:nvPr/>
+        </p:nvSpPr>
+        <p:spPr>
+          <a:xfrm>
+            <a:off x="8236633" y="1417320"/>
+            <a:ext cx="562707" cy="320040"/>
+          </a:xfrm>
+          <a:prstGeom prst="rect">
+            <a:avLst/>
+          </a:prstGeom>
+          <a:noFill/>
+        </p:spPr>
+        <p:txBody>
+          <a:bodyPr wrap="square" anchor="t" lIns="45720" rIns="45720">
+            <a:spAutoFit/>
+          </a:bodyPr>
+          <a:lstStyle/>
+          <a:p>
+            <a:pPr algn="l"/>
+            <a:r>
+              <a:rPr sz="1300" b="1">
+                <a:solidFill>
+                  <a:srgbClr val="595959"/>
+                </a:solidFill>
+                <a:latin typeface="Calibri"/>
+              </a:rPr>
+              <a:t>S15</a:t>
+            </a:r>
+          </a:p>
+        </p:txBody>
+      </p:sp>
+      <p:sp>
+        <p:nvSpPr>
+          <p:cNvPr id="16" name="TextBox 15"/>
+          <p:cNvSpPr txBox="1"/>
+          <p:nvPr/>
+        </p:nvSpPr>
+        <p:spPr>
+          <a:xfrm>
+            <a:off x="8799341" y="1417320"/>
+            <a:ext cx="562707" cy="320040"/>
+          </a:xfrm>
+          <a:prstGeom prst="rect">
+            <a:avLst/>
+          </a:prstGeom>
+          <a:noFill/>
+        </p:spPr>
+        <p:txBody>
+          <a:bodyPr wrap="square" anchor="t" lIns="45720" rIns="45720">
+            <a:spAutoFit/>
+          </a:bodyPr>
+          <a:lstStyle/>
+          <a:p>
+            <a:pPr algn="l"/>
+            <a:r>
+              <a:rPr sz="1300" b="1">
+                <a:solidFill>
+                  <a:srgbClr val="595959"/>
+                </a:solidFill>
+                <a:latin typeface="Calibri"/>
+              </a:rPr>
+              <a:t>S17</a:t>
+            </a:r>
+          </a:p>
+        </p:txBody>
+      </p:sp>
+      <p:sp>
+        <p:nvSpPr>
+          <p:cNvPr id="17" name="TextBox 16"/>
+          <p:cNvSpPr txBox="1"/>
+          <p:nvPr/>
+        </p:nvSpPr>
+        <p:spPr>
+          <a:xfrm>
+            <a:off x="9362049" y="1417320"/>
+            <a:ext cx="562707" cy="320040"/>
+          </a:xfrm>
+          <a:prstGeom prst="rect">
+            <a:avLst/>
+          </a:prstGeom>
+          <a:noFill/>
+        </p:spPr>
+        <p:txBody>
+          <a:bodyPr wrap="square" anchor="t" lIns="45720" rIns="45720">
+            <a:spAutoFit/>
+          </a:bodyPr>
+          <a:lstStyle/>
+          <a:p>
+            <a:pPr algn="l"/>
+            <a:r>
+              <a:rPr sz="1300" b="1">
+                <a:solidFill>
+                  <a:srgbClr val="595959"/>
+                </a:solidFill>
+                <a:latin typeface="Calibri"/>
+              </a:rPr>
+              <a:t>S19</a:t>
+            </a:r>
+          </a:p>
+        </p:txBody>
+      </p:sp>
+      <p:sp>
+        <p:nvSpPr>
+          <p:cNvPr id="18" name="TextBox 17"/>
+          <p:cNvSpPr txBox="1"/>
+          <p:nvPr/>
+        </p:nvSpPr>
+        <p:spPr>
+          <a:xfrm>
+            <a:off x="9924756" y="1417320"/>
+            <a:ext cx="562707" cy="320040"/>
+          </a:xfrm>
+          <a:prstGeom prst="rect">
+            <a:avLst/>
+          </a:prstGeom>
+          <a:noFill/>
+        </p:spPr>
+        <p:txBody>
+          <a:bodyPr wrap="square" anchor="t" lIns="45720" rIns="45720">
+            <a:spAutoFit/>
+          </a:bodyPr>
+          <a:lstStyle/>
+          <a:p>
+            <a:pPr algn="l"/>
+            <a:r>
+              <a:rPr sz="1300" b="1">
+                <a:solidFill>
+                  <a:srgbClr val="595959"/>
+                </a:solidFill>
+                <a:latin typeface="Calibri"/>
+              </a:rPr>
+              <a:t>S21</a:t>
+            </a:r>
+          </a:p>
+        </p:txBody>
+      </p:sp>
+      <p:sp>
+        <p:nvSpPr>
+          <p:cNvPr id="19" name="TextBox 18"/>
+          <p:cNvSpPr txBox="1"/>
+          <p:nvPr/>
+        </p:nvSpPr>
+        <p:spPr>
+          <a:xfrm>
+            <a:off x="10487464" y="1417320"/>
+            <a:ext cx="562707" cy="320040"/>
+          </a:xfrm>
+          <a:prstGeom prst="rect">
+            <a:avLst/>
+          </a:prstGeom>
+          <a:noFill/>
+        </p:spPr>
+        <p:txBody>
+          <a:bodyPr wrap="square" anchor="t" lIns="45720" rIns="45720">
+            <a:spAutoFit/>
+          </a:bodyPr>
+          <a:lstStyle/>
+          <a:p>
+            <a:pPr algn="l"/>
+            <a:r>
+              <a:rPr sz="1300" b="1">
+                <a:solidFill>
+                  <a:srgbClr val="595959"/>
+                </a:solidFill>
+                <a:latin typeface="Calibri"/>
+              </a:rPr>
+              <a:t>S23</a:t>
+            </a:r>
+          </a:p>
+        </p:txBody>
+      </p:sp>
+      <p:sp>
+        <p:nvSpPr>
+          <p:cNvPr id="20" name="TextBox 19"/>
+          <p:cNvSpPr txBox="1"/>
+          <p:nvPr/>
+        </p:nvSpPr>
+        <p:spPr>
+          <a:xfrm>
+            <a:off x="11050172" y="1417320"/>
+            <a:ext cx="562707" cy="320040"/>
+          </a:xfrm>
+          <a:prstGeom prst="rect">
+            <a:avLst/>
+          </a:prstGeom>
+          <a:noFill/>
+        </p:spPr>
+        <p:txBody>
+          <a:bodyPr wrap="square" anchor="t" lIns="45720" rIns="45720">
+            <a:spAutoFit/>
+          </a:bodyPr>
+          <a:lstStyle/>
+          <a:p>
+            <a:pPr algn="l"/>
+            <a:r>
+              <a:rPr sz="1300" b="1">
+                <a:solidFill>
+                  <a:srgbClr val="595959"/>
+                </a:solidFill>
+                <a:latin typeface="Calibri"/>
+              </a:rPr>
+              <a:t>S25</a:t>
+            </a:r>
+          </a:p>
+        </p:txBody>
+      </p:sp>
+      <p:sp>
+        <p:nvSpPr>
+          <p:cNvPr id="21" name="Rectangle 20"/>
+          <p:cNvSpPr/>
+          <p:nvPr/>
+        </p:nvSpPr>
+        <p:spPr>
+          <a:xfrm>
+            <a:off x="548640" y="1783080"/>
+            <a:ext cx="11064240" cy="694944"/>
+          </a:xfrm>
+          <a:prstGeom prst="rect">
+            <a:avLst/>
+          </a:prstGeom>
+          <a:solidFill>
+            <a:srgbClr val="EAF2FB"/>
+          </a:solidFill>
+          <a:ln>
+            <a:noFill/>
+          </a:ln>
+          <a:effectLst/>
+        </p:spPr>
+        <p:style>
+          <a:lnRef idx="1">
+            <a:schemeClr val="accent1"/>
+          </a:lnRef>
+          <a:fillRef idx="3">
+            <a:schemeClr val="accent1"/>
+          </a:fillRef>
+          <a:effectRef idx="2">
+            <a:schemeClr val="accent1"/>
+          </a:effectRef>
+          <a:fontRef idx="minor">
+            <a:schemeClr val="lt1"/>
+          </a:fontRef>
+        </p:style>
+        <p:txBody>
+          <a:bodyPr rtlCol="0" anchor="ctr"/>
+          <a:lstStyle/>
+          <a:p>
+            <a:pPr algn="ctr"/>
+          </a:p>
+        </p:txBody>
+      </p:sp>
+      <p:sp>
+        <p:nvSpPr>
+          <p:cNvPr id="22" name="TextBox 21"/>
+          <p:cNvSpPr txBox="1"/>
+          <p:nvPr/>
+        </p:nvSpPr>
+        <p:spPr>
+          <a:xfrm>
+            <a:off x="640080" y="1801368"/>
+            <a:ext cx="3566160" cy="329184"/>
+          </a:xfrm>
+          <a:prstGeom prst="rect">
+            <a:avLst/>
+          </a:prstGeom>
+          <a:noFill/>
+        </p:spPr>
+        <p:txBody>
+          <a:bodyPr wrap="square" anchor="t" lIns="45720" rIns="45720">
+            <a:spAutoFit/>
+          </a:bodyPr>
+          <a:lstStyle/>
+          <a:p>
+            <a:pPr algn="l"/>
+            <a:r>
+              <a:rPr sz="1600" b="1">
+                <a:solidFill>
+                  <a:srgbClr val="0B3C5D"/>
+                </a:solidFill>
+                <a:latin typeface="Calibri"/>
+              </a:rPr>
+              <a:t>0. Preparación</a:t>
+            </a:r>
+          </a:p>
+        </p:txBody>
+      </p:sp>
+      <p:sp>
+        <p:nvSpPr>
+          <p:cNvPr id="23" name="TextBox 22"/>
+          <p:cNvSpPr txBox="1"/>
+          <p:nvPr/>
+        </p:nvSpPr>
+        <p:spPr>
+          <a:xfrm>
+            <a:off x="640080" y="2093976"/>
+            <a:ext cx="3566160" cy="411480"/>
+          </a:xfrm>
+          <a:prstGeom prst="rect">
+            <a:avLst/>
+          </a:prstGeom>
+          <a:noFill/>
+        </p:spPr>
+        <p:txBody>
+          <a:bodyPr wrap="square" anchor="t" lIns="45720" rIns="45720">
+            <a:spAutoFit/>
+          </a:bodyPr>
+          <a:lstStyle/>
+          <a:p>
+            <a:pPr algn="l"/>
+            <a:r>
+              <a:rPr sz="1050" b="0">
+                <a:solidFill>
+                  <a:srgbClr val="262626"/>
+                </a:solidFill>
+                <a:latin typeface="Calibri"/>
+              </a:rPr>
+              <a:t>Landing zone, redes, infraestructura como código y CI/CD</a:t>
+            </a:r>
+          </a:p>
+        </p:txBody>
+      </p:sp>
+      <p:sp>
+        <p:nvSpPr>
+          <p:cNvPr id="24" name="Rounded Rectangle 23"/>
+          <p:cNvSpPr/>
+          <p:nvPr/>
+        </p:nvSpPr>
+        <p:spPr>
+          <a:xfrm>
+            <a:off x="4297680" y="1892808"/>
+            <a:ext cx="562707" cy="475488"/>
+          </a:xfrm>
+          <a:prstGeom prst="roundRect">
+            <a:avLst/>
+          </a:prstGeom>
+          <a:solidFill>
+            <a:srgbClr val="0B3C5D"/>
+          </a:solidFill>
+          <a:ln>
+            <a:noFill/>
+          </a:ln>
+          <a:effectLst/>
+        </p:spPr>
+        <p:style>
+          <a:lnRef idx="1">
+            <a:schemeClr val="accent1"/>
+          </a:lnRef>
+          <a:fillRef idx="3">
+            <a:schemeClr val="accent1"/>
+          </a:fillRef>
+          <a:effectRef idx="2">
+            <a:schemeClr val="accent1"/>
+          </a:effectRef>
+          <a:fontRef idx="minor">
+            <a:schemeClr val="lt1"/>
+          </a:fontRef>
+        </p:style>
+        <p:txBody>
+          <a:bodyPr rtlCol="0" anchor="ctr"/>
+          <a:lstStyle/>
+          <a:p>
+            <a:pPr algn="ctr"/>
+          </a:p>
+        </p:txBody>
+      </p:sp>
+      <p:sp>
+        <p:nvSpPr>
+          <p:cNvPr id="25" name="TextBox 24"/>
+          <p:cNvSpPr txBox="1"/>
+          <p:nvPr/>
+        </p:nvSpPr>
+        <p:spPr>
+          <a:xfrm>
+            <a:off x="4297680" y="1892808"/>
+            <a:ext cx="562707" cy="475488"/>
+          </a:xfrm>
+          <a:prstGeom prst="rect">
+            <a:avLst/>
+          </a:prstGeom>
+          <a:noFill/>
+        </p:spPr>
+        <p:txBody>
+          <a:bodyPr wrap="square" anchor="ctr" lIns="45720" rIns="45720">
+            <a:spAutoFit/>
+          </a:bodyPr>
+          <a:lstStyle/>
+          <a:p>
+            <a:pPr algn="ctr"/>
+            <a:r>
+              <a:rPr sz="1300" b="1">
+                <a:solidFill>
+                  <a:srgbClr val="FFFFFF"/>
+                </a:solidFill>
+                <a:latin typeface="Calibri"/>
+              </a:rPr>
+              <a:t>1-2</a:t>
+            </a:r>
+          </a:p>
+        </p:txBody>
+      </p:sp>
+      <p:sp>
+        <p:nvSpPr>
+          <p:cNvPr id="26" name="Rectangle 25"/>
+          <p:cNvSpPr/>
+          <p:nvPr/>
+        </p:nvSpPr>
+        <p:spPr>
+          <a:xfrm>
+            <a:off x="548640" y="2551176"/>
+            <a:ext cx="11064240" cy="694944"/>
+          </a:xfrm>
+          <a:prstGeom prst="rect">
+            <a:avLst/>
+          </a:prstGeom>
+          <a:solidFill>
+            <a:srgbClr val="FFFFFF"/>
+          </a:solidFill>
+          <a:ln>
+            <a:noFill/>
+          </a:ln>
+          <a:effectLst/>
+        </p:spPr>
+        <p:style>
+          <a:lnRef idx="1">
+            <a:schemeClr val="accent1"/>
+          </a:lnRef>
+          <a:fillRef idx="3">
+            <a:schemeClr val="accent1"/>
+          </a:fillRef>
+          <a:effectRef idx="2">
+            <a:schemeClr val="accent1"/>
+          </a:effectRef>
+          <a:fontRef idx="minor">
+            <a:schemeClr val="lt1"/>
+          </a:fontRef>
+        </p:style>
+        <p:txBody>
+          <a:bodyPr rtlCol="0" anchor="ctr"/>
+          <a:lstStyle/>
+          <a:p>
+            <a:pPr algn="ctr"/>
+          </a:p>
+        </p:txBody>
+      </p:sp>
+      <p:sp>
+        <p:nvSpPr>
+          <p:cNvPr id="27" name="TextBox 26"/>
+          <p:cNvSpPr txBox="1"/>
+          <p:nvPr/>
+        </p:nvSpPr>
+        <p:spPr>
+          <a:xfrm>
+            <a:off x="640080" y="2569464"/>
+            <a:ext cx="3566160" cy="329184"/>
+          </a:xfrm>
+          <a:prstGeom prst="rect">
+            <a:avLst/>
+          </a:prstGeom>
+          <a:noFill/>
+        </p:spPr>
+        <p:txBody>
+          <a:bodyPr wrap="square" anchor="t" lIns="45720" rIns="45720">
+            <a:spAutoFit/>
+          </a:bodyPr>
+          <a:lstStyle/>
+          <a:p>
+            <a:pPr algn="l"/>
+            <a:r>
+              <a:rPr sz="1600" b="1">
+                <a:solidFill>
+                  <a:srgbClr val="0B3C5D"/>
+                </a:solidFill>
+                <a:latin typeface="Calibri"/>
+              </a:rPr>
+              <a:t>1. Plataforma base</a:t>
+            </a:r>
+          </a:p>
+        </p:txBody>
+      </p:sp>
+      <p:sp>
+        <p:nvSpPr>
+          <p:cNvPr id="28" name="TextBox 27"/>
+          <p:cNvSpPr txBox="1"/>
+          <p:nvPr/>
+        </p:nvSpPr>
+        <p:spPr>
+          <a:xfrm>
+            <a:off x="640080" y="2862072"/>
+            <a:ext cx="3566160" cy="411480"/>
+          </a:xfrm>
+          <a:prstGeom prst="rect">
+            <a:avLst/>
+          </a:prstGeom>
+          <a:noFill/>
+        </p:spPr>
+        <p:txBody>
+          <a:bodyPr wrap="square" anchor="t" lIns="45720" rIns="45720">
+            <a:spAutoFit/>
+          </a:bodyPr>
+          <a:lstStyle/>
+          <a:p>
+            <a:pPr algn="l"/>
+            <a:r>
+              <a:rPr sz="1050" b="0">
+                <a:solidFill>
+                  <a:srgbClr val="262626"/>
+                </a:solidFill>
+                <a:latin typeface="Calibri"/>
+              </a:rPr>
+              <a:t>AKS, API Management, Front Door, federación OIDC y monitoreo</a:t>
+            </a:r>
+          </a:p>
+        </p:txBody>
+      </p:sp>
+      <p:sp>
+        <p:nvSpPr>
+          <p:cNvPr id="29" name="Rounded Rectangle 28"/>
+          <p:cNvSpPr/>
+          <p:nvPr/>
+        </p:nvSpPr>
+        <p:spPr>
+          <a:xfrm>
+            <a:off x="4860387" y="2660904"/>
+            <a:ext cx="1688123" cy="475488"/>
+          </a:xfrm>
+          <a:prstGeom prst="roundRect">
+            <a:avLst/>
+          </a:prstGeom>
+          <a:solidFill>
+            <a:srgbClr val="1168BD"/>
+          </a:solidFill>
+          <a:ln>
+            <a:noFill/>
+          </a:ln>
+          <a:effectLst/>
+        </p:spPr>
+        <p:style>
+          <a:lnRef idx="1">
+            <a:schemeClr val="accent1"/>
+          </a:lnRef>
+          <a:fillRef idx="3">
+            <a:schemeClr val="accent1"/>
+          </a:fillRef>
+          <a:effectRef idx="2">
+            <a:schemeClr val="accent1"/>
+          </a:effectRef>
+          <a:fontRef idx="minor">
+            <a:schemeClr val="lt1"/>
+          </a:fontRef>
+        </p:style>
+        <p:txBody>
+          <a:bodyPr rtlCol="0" anchor="ctr"/>
+          <a:lstStyle/>
+          <a:p>
+            <a:pPr algn="ctr"/>
+          </a:p>
+        </p:txBody>
+      </p:sp>
+      <p:sp>
+        <p:nvSpPr>
+          <p:cNvPr id="30" name="TextBox 29"/>
+          <p:cNvSpPr txBox="1"/>
+          <p:nvPr/>
+        </p:nvSpPr>
+        <p:spPr>
+          <a:xfrm>
+            <a:off x="4860387" y="2660904"/>
+            <a:ext cx="1688123" cy="475488"/>
+          </a:xfrm>
+          <a:prstGeom prst="rect">
+            <a:avLst/>
+          </a:prstGeom>
+          <a:noFill/>
+        </p:spPr>
+        <p:txBody>
+          <a:bodyPr wrap="square" anchor="ctr" lIns="45720" rIns="45720">
+            <a:spAutoFit/>
+          </a:bodyPr>
+          <a:lstStyle/>
+          <a:p>
+            <a:pPr algn="ctr"/>
+            <a:r>
+              <a:rPr sz="1300" b="1">
+                <a:solidFill>
+                  <a:srgbClr val="FFFFFF"/>
+                </a:solidFill>
+                <a:latin typeface="Calibri"/>
+              </a:rPr>
+              <a:t>3-8</a:t>
+            </a:r>
+          </a:p>
+        </p:txBody>
+      </p:sp>
+      <p:sp>
+        <p:nvSpPr>
+          <p:cNvPr id="31" name="Rectangle 30"/>
+          <p:cNvSpPr/>
+          <p:nvPr/>
+        </p:nvSpPr>
+        <p:spPr>
+          <a:xfrm>
+            <a:off x="548640" y="3319272"/>
+            <a:ext cx="11064240" cy="694944"/>
+          </a:xfrm>
+          <a:prstGeom prst="rect">
+            <a:avLst/>
+          </a:prstGeom>
+          <a:solidFill>
+            <a:srgbClr val="EAF2FB"/>
+          </a:solidFill>
+          <a:ln>
+            <a:noFill/>
+          </a:ln>
+          <a:effectLst/>
+        </p:spPr>
+        <p:style>
+          <a:lnRef idx="1">
+            <a:schemeClr val="accent1"/>
+          </a:lnRef>
+          <a:fillRef idx="3">
+            <a:schemeClr val="accent1"/>
+          </a:fillRef>
+          <a:effectRef idx="2">
+            <a:schemeClr val="accent1"/>
+          </a:effectRef>
+          <a:fontRef idx="minor">
+            <a:schemeClr val="lt1"/>
+          </a:fontRef>
+        </p:style>
+        <p:txBody>
+          <a:bodyPr rtlCol="0" anchor="ctr"/>
+          <a:lstStyle/>
+          <a:p>
+            <a:pPr algn="ctr"/>
+          </a:p>
+        </p:txBody>
+      </p:sp>
+      <p:sp>
+        <p:nvSpPr>
+          <p:cNvPr id="32" name="TextBox 31"/>
+          <p:cNvSpPr txBox="1"/>
+          <p:nvPr/>
+        </p:nvSpPr>
+        <p:spPr>
+          <a:xfrm>
+            <a:off x="640080" y="3337560"/>
+            <a:ext cx="3566160" cy="329184"/>
+          </a:xfrm>
+          <a:prstGeom prst="rect">
+            <a:avLst/>
+          </a:prstGeom>
+          <a:noFill/>
+        </p:spPr>
+        <p:txBody>
+          <a:bodyPr wrap="square" anchor="t" lIns="45720" rIns="45720">
+            <a:spAutoFit/>
+          </a:bodyPr>
+          <a:lstStyle/>
+          <a:p>
+            <a:pPr algn="l"/>
+            <a:r>
+              <a:rPr sz="1600" b="1">
+                <a:solidFill>
+                  <a:srgbClr val="0B3C5D"/>
+                </a:solidFill>
+                <a:latin typeface="Calibri"/>
+              </a:rPr>
+              <a:t>2. HU01 y HU03</a:t>
+            </a:r>
+          </a:p>
+        </p:txBody>
+      </p:sp>
+      <p:sp>
+        <p:nvSpPr>
+          <p:cNvPr id="33" name="TextBox 32"/>
+          <p:cNvSpPr txBox="1"/>
+          <p:nvPr/>
+        </p:nvSpPr>
+        <p:spPr>
+          <a:xfrm>
+            <a:off x="640080" y="3630168"/>
+            <a:ext cx="3566160" cy="411480"/>
+          </a:xfrm>
+          <a:prstGeom prst="rect">
+            <a:avLst/>
+          </a:prstGeom>
+          <a:noFill/>
+        </p:spPr>
+        <p:txBody>
+          <a:bodyPr wrap="square" anchor="t" lIns="45720" rIns="45720">
+            <a:spAutoFit/>
+          </a:bodyPr>
+          <a:lstStyle/>
+          <a:p>
+            <a:pPr algn="l"/>
+            <a:r>
+              <a:rPr sz="1050" b="0">
+                <a:solidFill>
+                  <a:srgbClr val="262626"/>
+                </a:solidFill>
+                <a:latin typeface="Calibri"/>
+              </a:rPr>
+              <a:t>Historia clínica con FHIR y búsqueda de centros médicos</a:t>
+            </a:r>
+          </a:p>
+        </p:txBody>
+      </p:sp>
+      <p:sp>
+        <p:nvSpPr>
+          <p:cNvPr id="34" name="Rounded Rectangle 33"/>
+          <p:cNvSpPr/>
+          <p:nvPr/>
+        </p:nvSpPr>
+        <p:spPr>
+          <a:xfrm>
+            <a:off x="6548510" y="3429000"/>
+            <a:ext cx="1688123" cy="475488"/>
+          </a:xfrm>
+          <a:prstGeom prst="roundRect">
+            <a:avLst/>
+          </a:prstGeom>
+          <a:solidFill>
+            <a:srgbClr val="0E9F8E"/>
+          </a:solidFill>
+          <a:ln>
+            <a:noFill/>
+          </a:ln>
+          <a:effectLst/>
+        </p:spPr>
+        <p:style>
+          <a:lnRef idx="1">
+            <a:schemeClr val="accent1"/>
+          </a:lnRef>
+          <a:fillRef idx="3">
+            <a:schemeClr val="accent1"/>
+          </a:fillRef>
+          <a:effectRef idx="2">
+            <a:schemeClr val="accent1"/>
+          </a:effectRef>
+          <a:fontRef idx="minor">
+            <a:schemeClr val="lt1"/>
+          </a:fontRef>
+        </p:style>
+        <p:txBody>
+          <a:bodyPr rtlCol="0" anchor="ctr"/>
+          <a:lstStyle/>
+          <a:p>
+            <a:pPr algn="ctr"/>
+          </a:p>
+        </p:txBody>
+      </p:sp>
+      <p:sp>
+        <p:nvSpPr>
+          <p:cNvPr id="35" name="TextBox 34"/>
+          <p:cNvSpPr txBox="1"/>
+          <p:nvPr/>
+        </p:nvSpPr>
+        <p:spPr>
+          <a:xfrm>
+            <a:off x="6548510" y="3429000"/>
+            <a:ext cx="1688123" cy="475488"/>
+          </a:xfrm>
+          <a:prstGeom prst="rect">
+            <a:avLst/>
+          </a:prstGeom>
+          <a:noFill/>
+        </p:spPr>
+        <p:txBody>
+          <a:bodyPr wrap="square" anchor="ctr" lIns="45720" rIns="45720">
+            <a:spAutoFit/>
+          </a:bodyPr>
+          <a:lstStyle/>
+          <a:p>
+            <a:pPr algn="ctr"/>
+            <a:r>
+              <a:rPr sz="1300" b="1">
+                <a:solidFill>
+                  <a:srgbClr val="FFFFFF"/>
+                </a:solidFill>
+                <a:latin typeface="Calibri"/>
+              </a:rPr>
+              <a:t>9-14</a:t>
+            </a:r>
+          </a:p>
+        </p:txBody>
+      </p:sp>
+      <p:sp>
+        <p:nvSpPr>
+          <p:cNvPr id="36" name="Rectangle 35"/>
+          <p:cNvSpPr/>
+          <p:nvPr/>
+        </p:nvSpPr>
+        <p:spPr>
+          <a:xfrm>
+            <a:off x="548640" y="4087368"/>
+            <a:ext cx="11064240" cy="694944"/>
+          </a:xfrm>
+          <a:prstGeom prst="rect">
+            <a:avLst/>
+          </a:prstGeom>
+          <a:solidFill>
+            <a:srgbClr val="FFFFFF"/>
+          </a:solidFill>
+          <a:ln>
+            <a:noFill/>
+          </a:ln>
+          <a:effectLst/>
+        </p:spPr>
+        <p:style>
+          <a:lnRef idx="1">
+            <a:schemeClr val="accent1"/>
+          </a:lnRef>
+          <a:fillRef idx="3">
+            <a:schemeClr val="accent1"/>
+          </a:fillRef>
+          <a:effectRef idx="2">
+            <a:schemeClr val="accent1"/>
+          </a:effectRef>
+          <a:fontRef idx="minor">
+            <a:schemeClr val="lt1"/>
+          </a:fontRef>
+        </p:style>
+        <p:txBody>
+          <a:bodyPr rtlCol="0" anchor="ctr"/>
+          <a:lstStyle/>
+          <a:p>
+            <a:pPr algn="ctr"/>
+          </a:p>
+        </p:txBody>
+      </p:sp>
+      <p:sp>
+        <p:nvSpPr>
+          <p:cNvPr id="37" name="TextBox 36"/>
+          <p:cNvSpPr txBox="1"/>
+          <p:nvPr/>
+        </p:nvSpPr>
+        <p:spPr>
+          <a:xfrm>
+            <a:off x="640080" y="4105656"/>
+            <a:ext cx="3566160" cy="329184"/>
+          </a:xfrm>
+          <a:prstGeom prst="rect">
+            <a:avLst/>
+          </a:prstGeom>
+          <a:noFill/>
+        </p:spPr>
+        <p:txBody>
+          <a:bodyPr wrap="square" anchor="t" lIns="45720" rIns="45720">
+            <a:spAutoFit/>
+          </a:bodyPr>
+          <a:lstStyle/>
+          <a:p>
+            <a:pPr algn="l"/>
+            <a:r>
+              <a:rPr sz="1600" b="1">
+                <a:solidFill>
+                  <a:srgbClr val="0B3C5D"/>
+                </a:solidFill>
+                <a:latin typeface="Calibri"/>
+              </a:rPr>
+              <a:t>3. HU02 y HU04</a:t>
+            </a:r>
+          </a:p>
+        </p:txBody>
+      </p:sp>
+      <p:sp>
+        <p:nvSpPr>
+          <p:cNvPr id="38" name="TextBox 37"/>
+          <p:cNvSpPr txBox="1"/>
+          <p:nvPr/>
+        </p:nvSpPr>
+        <p:spPr>
+          <a:xfrm>
+            <a:off x="640080" y="4398264"/>
+            <a:ext cx="3566160" cy="411480"/>
+          </a:xfrm>
+          <a:prstGeom prst="rect">
+            <a:avLst/>
+          </a:prstGeom>
+          <a:noFill/>
+        </p:spPr>
+        <p:txBody>
+          <a:bodyPr wrap="square" anchor="t" lIns="45720" rIns="45720">
+            <a:spAutoFit/>
+          </a:bodyPr>
+          <a:lstStyle/>
+          <a:p>
+            <a:pPr algn="l"/>
+            <a:r>
+              <a:rPr sz="1050" b="0">
+                <a:solidFill>
+                  <a:srgbClr val="262626"/>
+                </a:solidFill>
+                <a:latin typeface="Calibri"/>
+              </a:rPr>
+              <a:t>Asistencia al diagnóstico validada por médicos, remisión y avisos</a:t>
+            </a:r>
+          </a:p>
+        </p:txBody>
+      </p:sp>
+      <p:sp>
+        <p:nvSpPr>
+          <p:cNvPr id="39" name="Rounded Rectangle 38"/>
+          <p:cNvSpPr/>
+          <p:nvPr/>
+        </p:nvSpPr>
+        <p:spPr>
+          <a:xfrm>
+            <a:off x="8236633" y="4197096"/>
+            <a:ext cx="1688123" cy="475488"/>
+          </a:xfrm>
+          <a:prstGeom prst="roundRect">
+            <a:avLst/>
+          </a:prstGeom>
+          <a:solidFill>
+            <a:srgbClr val="D86C1F"/>
+          </a:solidFill>
+          <a:ln>
+            <a:noFill/>
+          </a:ln>
+          <a:effectLst/>
+        </p:spPr>
+        <p:style>
+          <a:lnRef idx="1">
+            <a:schemeClr val="accent1"/>
+          </a:lnRef>
+          <a:fillRef idx="3">
+            <a:schemeClr val="accent1"/>
+          </a:fillRef>
+          <a:effectRef idx="2">
+            <a:schemeClr val="accent1"/>
+          </a:effectRef>
+          <a:fontRef idx="minor">
+            <a:schemeClr val="lt1"/>
+          </a:fontRef>
+        </p:style>
+        <p:txBody>
+          <a:bodyPr rtlCol="0" anchor="ctr"/>
+          <a:lstStyle/>
+          <a:p>
+            <a:pPr algn="ctr"/>
+          </a:p>
+        </p:txBody>
+      </p:sp>
+      <p:sp>
+        <p:nvSpPr>
+          <p:cNvPr id="40" name="TextBox 39"/>
+          <p:cNvSpPr txBox="1"/>
+          <p:nvPr/>
+        </p:nvSpPr>
+        <p:spPr>
+          <a:xfrm>
+            <a:off x="8236633" y="4197096"/>
+            <a:ext cx="1688123" cy="475488"/>
+          </a:xfrm>
+          <a:prstGeom prst="rect">
+            <a:avLst/>
+          </a:prstGeom>
+          <a:noFill/>
+        </p:spPr>
+        <p:txBody>
+          <a:bodyPr wrap="square" anchor="ctr" lIns="45720" rIns="45720">
+            <a:spAutoFit/>
+          </a:bodyPr>
+          <a:lstStyle/>
+          <a:p>
+            <a:pPr algn="ctr"/>
+            <a:r>
+              <a:rPr sz="1300" b="1">
+                <a:solidFill>
+                  <a:srgbClr val="FFFFFF"/>
+                </a:solidFill>
+                <a:latin typeface="Calibri"/>
+              </a:rPr>
+              <a:t>15-20</a:t>
+            </a:r>
+          </a:p>
+        </p:txBody>
+      </p:sp>
+      <p:sp>
+        <p:nvSpPr>
+          <p:cNvPr id="41" name="Rectangle 40"/>
+          <p:cNvSpPr/>
+          <p:nvPr/>
+        </p:nvSpPr>
+        <p:spPr>
+          <a:xfrm>
+            <a:off x="548640" y="4855464"/>
+            <a:ext cx="11064240" cy="694944"/>
+          </a:xfrm>
+          <a:prstGeom prst="rect">
+            <a:avLst/>
+          </a:prstGeom>
+          <a:solidFill>
+            <a:srgbClr val="EAF2FB"/>
+          </a:solidFill>
+          <a:ln>
+            <a:noFill/>
+          </a:ln>
+          <a:effectLst/>
+        </p:spPr>
+        <p:style>
+          <a:lnRef idx="1">
+            <a:schemeClr val="accent1"/>
+          </a:lnRef>
+          <a:fillRef idx="3">
+            <a:schemeClr val="accent1"/>
+          </a:fillRef>
+          <a:effectRef idx="2">
+            <a:schemeClr val="accent1"/>
+          </a:effectRef>
+          <a:fontRef idx="minor">
+            <a:schemeClr val="lt1"/>
+          </a:fontRef>
+        </p:style>
+        <p:txBody>
+          <a:bodyPr rtlCol="0" anchor="ctr"/>
+          <a:lstStyle/>
+          <a:p>
+            <a:pPr algn="ctr"/>
+          </a:p>
+        </p:txBody>
+      </p:sp>
+      <p:sp>
+        <p:nvSpPr>
+          <p:cNvPr id="42" name="TextBox 41"/>
+          <p:cNvSpPr txBox="1"/>
+          <p:nvPr/>
+        </p:nvSpPr>
+        <p:spPr>
+          <a:xfrm>
+            <a:off x="640080" y="4873752"/>
+            <a:ext cx="3566160" cy="329184"/>
+          </a:xfrm>
+          <a:prstGeom prst="rect">
+            <a:avLst/>
+          </a:prstGeom>
+          <a:noFill/>
+        </p:spPr>
+        <p:txBody>
+          <a:bodyPr wrap="square" anchor="t" lIns="45720" rIns="45720">
+            <a:spAutoFit/>
+          </a:bodyPr>
+          <a:lstStyle/>
+          <a:p>
+            <a:pPr algn="l"/>
+            <a:r>
+              <a:rPr sz="1600" b="1">
+                <a:solidFill>
+                  <a:srgbClr val="0B3C5D"/>
+                </a:solidFill>
+                <a:latin typeface="Calibri"/>
+              </a:rPr>
+              <a:t>4. Pruebas y piloto</a:t>
+            </a:r>
+          </a:p>
+        </p:txBody>
+      </p:sp>
+      <p:sp>
+        <p:nvSpPr>
+          <p:cNvPr id="43" name="TextBox 42"/>
+          <p:cNvSpPr txBox="1"/>
+          <p:nvPr/>
+        </p:nvSpPr>
+        <p:spPr>
+          <a:xfrm>
+            <a:off x="640080" y="5166360"/>
+            <a:ext cx="3566160" cy="411480"/>
+          </a:xfrm>
+          <a:prstGeom prst="rect">
+            <a:avLst/>
+          </a:prstGeom>
+          <a:noFill/>
+        </p:spPr>
+        <p:txBody>
+          <a:bodyPr wrap="square" anchor="t" lIns="45720" rIns="45720">
+            <a:spAutoFit/>
+          </a:bodyPr>
+          <a:lstStyle/>
+          <a:p>
+            <a:pPr algn="l"/>
+            <a:r>
+              <a:rPr sz="1050" b="0">
+                <a:solidFill>
+                  <a:srgbClr val="262626"/>
+                </a:solidFill>
+                <a:latin typeface="Calibri"/>
+              </a:rPr>
+              <a:t>Pruebas de carga y seguridad, simulacro de caída, piloto con 25 enfermeras</a:t>
+            </a:r>
+          </a:p>
+        </p:txBody>
+      </p:sp>
+      <p:sp>
+        <p:nvSpPr>
+          <p:cNvPr id="44" name="Rounded Rectangle 43"/>
+          <p:cNvSpPr/>
+          <p:nvPr/>
+        </p:nvSpPr>
+        <p:spPr>
+          <a:xfrm>
+            <a:off x="9924756" y="4965192"/>
+            <a:ext cx="1125415" cy="475488"/>
+          </a:xfrm>
+          <a:prstGeom prst="roundRect">
+            <a:avLst/>
+          </a:prstGeom>
+          <a:solidFill>
+            <a:srgbClr val="6B4FBB"/>
+          </a:solidFill>
+          <a:ln>
+            <a:noFill/>
+          </a:ln>
+          <a:effectLst/>
+        </p:spPr>
+        <p:style>
+          <a:lnRef idx="1">
+            <a:schemeClr val="accent1"/>
+          </a:lnRef>
+          <a:fillRef idx="3">
+            <a:schemeClr val="accent1"/>
+          </a:fillRef>
+          <a:effectRef idx="2">
+            <a:schemeClr val="accent1"/>
+          </a:effectRef>
+          <a:fontRef idx="minor">
+            <a:schemeClr val="lt1"/>
+          </a:fontRef>
+        </p:style>
+        <p:txBody>
+          <a:bodyPr rtlCol="0" anchor="ctr"/>
+          <a:lstStyle/>
+          <a:p>
+            <a:pPr algn="ctr"/>
+          </a:p>
+        </p:txBody>
+      </p:sp>
+      <p:sp>
+        <p:nvSpPr>
+          <p:cNvPr id="45" name="TextBox 44"/>
+          <p:cNvSpPr txBox="1"/>
+          <p:nvPr/>
+        </p:nvSpPr>
+        <p:spPr>
+          <a:xfrm>
+            <a:off x="9924756" y="4965192"/>
+            <a:ext cx="1125415" cy="475488"/>
+          </a:xfrm>
+          <a:prstGeom prst="rect">
+            <a:avLst/>
+          </a:prstGeom>
+          <a:noFill/>
+        </p:spPr>
+        <p:txBody>
+          <a:bodyPr wrap="square" anchor="ctr" lIns="45720" rIns="45720">
+            <a:spAutoFit/>
+          </a:bodyPr>
+          <a:lstStyle/>
+          <a:p>
+            <a:pPr algn="ctr"/>
+            <a:r>
+              <a:rPr sz="1300" b="1">
+                <a:solidFill>
+                  <a:srgbClr val="FFFFFF"/>
+                </a:solidFill>
+                <a:latin typeface="Calibri"/>
+              </a:rPr>
+              <a:t>21-24</a:t>
+            </a:r>
+          </a:p>
+        </p:txBody>
+      </p:sp>
+      <p:sp>
+        <p:nvSpPr>
+          <p:cNvPr id="46" name="Rectangle 45"/>
+          <p:cNvSpPr/>
+          <p:nvPr/>
+        </p:nvSpPr>
+        <p:spPr>
+          <a:xfrm>
+            <a:off x="548640" y="5623560"/>
+            <a:ext cx="11064240" cy="694944"/>
+          </a:xfrm>
+          <a:prstGeom prst="rect">
+            <a:avLst/>
+          </a:prstGeom>
+          <a:solidFill>
+            <a:srgbClr val="FFFFFF"/>
+          </a:solidFill>
+          <a:ln>
+            <a:noFill/>
+          </a:ln>
+          <a:effectLst/>
+        </p:spPr>
+        <p:style>
+          <a:lnRef idx="1">
+            <a:schemeClr val="accent1"/>
+          </a:lnRef>
+          <a:fillRef idx="3">
+            <a:schemeClr val="accent1"/>
+          </a:fillRef>
+          <a:effectRef idx="2">
+            <a:schemeClr val="accent1"/>
+          </a:effectRef>
+          <a:fontRef idx="minor">
+            <a:schemeClr val="lt1"/>
+          </a:fontRef>
+        </p:style>
+        <p:txBody>
+          <a:bodyPr rtlCol="0" anchor="ctr"/>
+          <a:lstStyle/>
+          <a:p>
+            <a:pPr algn="ctr"/>
+          </a:p>
+        </p:txBody>
+      </p:sp>
+      <p:sp>
+        <p:nvSpPr>
+          <p:cNvPr id="47" name="TextBox 46"/>
+          <p:cNvSpPr txBox="1"/>
+          <p:nvPr/>
+        </p:nvSpPr>
+        <p:spPr>
+          <a:xfrm>
+            <a:off x="640080" y="5641848"/>
+            <a:ext cx="3566160" cy="329184"/>
+          </a:xfrm>
+          <a:prstGeom prst="rect">
+            <a:avLst/>
+          </a:prstGeom>
+          <a:noFill/>
+        </p:spPr>
+        <p:txBody>
+          <a:bodyPr wrap="square" anchor="t" lIns="45720" rIns="45720">
+            <a:spAutoFit/>
+          </a:bodyPr>
+          <a:lstStyle/>
+          <a:p>
+            <a:pPr algn="l"/>
+            <a:r>
+              <a:rPr sz="1600" b="1">
+                <a:solidFill>
+                  <a:srgbClr val="0B3C5D"/>
+                </a:solidFill>
+                <a:latin typeface="Calibri"/>
+              </a:rPr>
+              <a:t>5. Salida</a:t>
+            </a:r>
+          </a:p>
+        </p:txBody>
+      </p:sp>
+      <p:sp>
+        <p:nvSpPr>
+          <p:cNvPr id="48" name="TextBox 47"/>
+          <p:cNvSpPr txBox="1"/>
+          <p:nvPr/>
+        </p:nvSpPr>
+        <p:spPr>
+          <a:xfrm>
+            <a:off x="640080" y="5934456"/>
+            <a:ext cx="3566160" cy="411480"/>
+          </a:xfrm>
+          <a:prstGeom prst="rect">
+            <a:avLst/>
+          </a:prstGeom>
+          <a:noFill/>
+        </p:spPr>
+        <p:txBody>
+          <a:bodyPr wrap="square" anchor="t" lIns="45720" rIns="45720">
+            <a:spAutoFit/>
+          </a:bodyPr>
+          <a:lstStyle/>
+          <a:p>
+            <a:pPr algn="l"/>
+            <a:r>
+              <a:rPr sz="1050" b="0">
+                <a:solidFill>
+                  <a:srgbClr val="262626"/>
+                </a:solidFill>
+                <a:latin typeface="Calibri"/>
+              </a:rPr>
+              <a:t>Despliegue gradual a 250 enfermeras y estabilización</a:t>
+            </a:r>
+          </a:p>
+        </p:txBody>
+      </p:sp>
+      <p:sp>
+        <p:nvSpPr>
+          <p:cNvPr id="49" name="Rounded Rectangle 48"/>
+          <p:cNvSpPr/>
+          <p:nvPr/>
+        </p:nvSpPr>
+        <p:spPr>
+          <a:xfrm>
+            <a:off x="11050172" y="5733288"/>
+            <a:ext cx="562707" cy="475488"/>
+          </a:xfrm>
+          <a:prstGeom prst="roundRect">
+            <a:avLst/>
+          </a:prstGeom>
+          <a:solidFill>
+            <a:srgbClr val="107C10"/>
+          </a:solidFill>
+          <a:ln>
+            <a:noFill/>
+          </a:ln>
+          <a:effectLst/>
+        </p:spPr>
+        <p:style>
+          <a:lnRef idx="1">
+            <a:schemeClr val="accent1"/>
+          </a:lnRef>
+          <a:fillRef idx="3">
+            <a:schemeClr val="accent1"/>
+          </a:fillRef>
+          <a:effectRef idx="2">
+            <a:schemeClr val="accent1"/>
+          </a:effectRef>
+          <a:fontRef idx="minor">
+            <a:schemeClr val="lt1"/>
+          </a:fontRef>
+        </p:style>
+        <p:txBody>
+          <a:bodyPr rtlCol="0" anchor="ctr"/>
+          <a:lstStyle/>
+          <a:p>
+            <a:pPr algn="ctr"/>
+          </a:p>
+        </p:txBody>
+      </p:sp>
+      <p:sp>
+        <p:nvSpPr>
+          <p:cNvPr id="50" name="TextBox 49"/>
+          <p:cNvSpPr txBox="1"/>
+          <p:nvPr/>
+        </p:nvSpPr>
+        <p:spPr>
+          <a:xfrm>
+            <a:off x="11050172" y="5733288"/>
+            <a:ext cx="562707" cy="475488"/>
+          </a:xfrm>
+          <a:prstGeom prst="rect">
+            <a:avLst/>
+          </a:prstGeom>
+          <a:noFill/>
+        </p:spPr>
+        <p:txBody>
+          <a:bodyPr wrap="square" anchor="ctr" lIns="45720" rIns="45720">
+            <a:spAutoFit/>
+          </a:bodyPr>
+          <a:lstStyle/>
+          <a:p>
+            <a:pPr algn="ctr"/>
+            <a:r>
+              <a:rPr sz="1300" b="1">
+                <a:solidFill>
+                  <a:srgbClr val="FFFFFF"/>
+                </a:solidFill>
+                <a:latin typeface="Calibri"/>
+              </a:rPr>
+              <a:t>25-26</a:t>
+            </a:r>
+          </a:p>
+        </p:txBody>
+      </p:sp>
+    </p:spTree>
+  </p:cSld>
+  <p:clrMapOvr>
+    <a:masterClrMapping/>
+  </p:clrMapOvr>
+</p:sld>
+</file>
+
+<file path=ppt/slides/slide22.xml><?xml version="1.0" encoding="utf-8"?>
+<p:sld xmlns:a="http://schemas.openxmlformats.org/drawingml/2006/main" xmlns:p="http://schemas.openxmlformats.org/presentationml/2006/main" xmlns:r="http://schemas.openxmlformats.org/officeDocument/2006/relationships">
+  <p:cSld>
+    <p:spTree>
+      <p:nvGrpSpPr>
+        <p:cNvPr id="1" name=""/>
+        <p:cNvGrpSpPr/>
+        <p:nvPr/>
+      </p:nvGrpSpPr>
+      <p:grpSpPr/>
+      <p:sp>
+        <p:nvSpPr>
+          <p:cNvPr id="2" name="Rectangle 1"/>
+          <p:cNvSpPr/>
+          <p:nvPr/>
+        </p:nvSpPr>
+        <p:spPr>
+          <a:xfrm>
+            <a:off x="0" y="0"/>
+            <a:ext cx="12191695" cy="109728"/>
+          </a:xfrm>
+          <a:prstGeom prst="rect">
+            <a:avLst/>
+          </a:prstGeom>
+          <a:solidFill>
+            <a:srgbClr val="0B3C5D"/>
+          </a:solidFill>
+          <a:ln>
+            <a:noFill/>
+          </a:ln>
+          <a:effectLst/>
+        </p:spPr>
+        <p:style>
+          <a:lnRef idx="1">
+            <a:schemeClr val="accent1"/>
+          </a:lnRef>
+          <a:fillRef idx="3">
+            <a:schemeClr val="accent1"/>
+          </a:fillRef>
+          <a:effectRef idx="2">
+            <a:schemeClr val="accent1"/>
+          </a:effectRef>
+          <a:fontRef idx="minor">
+            <a:schemeClr val="lt1"/>
+          </a:fontRef>
+        </p:style>
+        <p:txBody>
+          <a:bodyPr rtlCol="0" anchor="ctr"/>
+          <a:lstStyle/>
+          <a:p>
+            <a:pPr algn="ctr"/>
+          </a:p>
+        </p:txBody>
+      </p:sp>
+      <p:sp>
+        <p:nvSpPr>
+          <p:cNvPr id="3" name="Rectangle 2"/>
+          <p:cNvSpPr/>
+          <p:nvPr/>
+        </p:nvSpPr>
+        <p:spPr>
+          <a:xfrm>
+            <a:off x="457200" y="411480"/>
+            <a:ext cx="82296" cy="566928"/>
+          </a:xfrm>
+          <a:prstGeom prst="rect">
+            <a:avLst/>
+          </a:prstGeom>
+          <a:solidFill>
+            <a:srgbClr val="0E9F8E"/>
+          </a:solidFill>
+          <a:ln>
+            <a:noFill/>
+          </a:ln>
+          <a:effectLst/>
+        </p:spPr>
+        <p:style>
+          <a:lnRef idx="1">
+            <a:schemeClr val="accent1"/>
+          </a:lnRef>
+          <a:fillRef idx="3">
+            <a:schemeClr val="accent1"/>
+          </a:fillRef>
+          <a:effectRef idx="2">
+            <a:schemeClr val="accent1"/>
+          </a:effectRef>
+          <a:fontRef idx="minor">
+            <a:schemeClr val="lt1"/>
+          </a:fontRef>
+        </p:style>
+        <p:txBody>
+          <a:bodyPr rtlCol="0" anchor="ctr"/>
+          <a:lstStyle/>
+          <a:p>
+            <a:pPr algn="ctr"/>
+          </a:p>
+        </p:txBody>
+      </p:sp>
+      <p:sp>
+        <p:nvSpPr>
+          <p:cNvPr id="4" name="TextBox 3"/>
+          <p:cNvSpPr txBox="1"/>
+          <p:nvPr/>
+        </p:nvSpPr>
+        <p:spPr>
+          <a:xfrm>
+            <a:off x="640080" y="320040"/>
+            <a:ext cx="10515600" cy="731520"/>
+          </a:xfrm>
+          <a:prstGeom prst="rect">
+            <a:avLst/>
+          </a:prstGeom>
+          <a:noFill/>
+        </p:spPr>
+        <p:txBody>
+          <a:bodyPr wrap="square" anchor="ctr" lIns="45720" rIns="45720">
+            <a:spAutoFit/>
+          </a:bodyPr>
+          <a:lstStyle/>
+          <a:p>
+            <a:pPr algn="l"/>
+            <a:r>
+              <a:rPr sz="3000" b="1">
+                <a:solidFill>
+                  <a:srgbClr val="0B3C5D"/>
+                </a:solidFill>
+                <a:latin typeface="Calibri"/>
+              </a:rPr>
+              <a:t>Riesgos y mitigaciones</a:t>
+            </a:r>
+          </a:p>
+        </p:txBody>
+      </p:sp>
+      <p:sp>
+        <p:nvSpPr>
+          <p:cNvPr id="5" name="TextBox 4"/>
+          <p:cNvSpPr txBox="1"/>
+          <p:nvPr/>
+        </p:nvSpPr>
+        <p:spPr>
+          <a:xfrm>
+            <a:off x="457200" y="6446520"/>
+            <a:ext cx="7315200" cy="320040"/>
+          </a:xfrm>
+          <a:prstGeom prst="rect">
+            <a:avLst/>
+          </a:prstGeom>
+          <a:noFill/>
+        </p:spPr>
+        <p:txBody>
+          <a:bodyPr wrap="square" anchor="t" lIns="45720" rIns="45720">
+            <a:spAutoFit/>
+          </a:bodyPr>
+          <a:lstStyle/>
+          <a:p>
+            <a:pPr algn="l"/>
+            <a:r>
+              <a:rPr sz="1000" b="0">
+                <a:solidFill>
+                  <a:srgbClr val="595959"/>
+                </a:solidFill>
+                <a:latin typeface="Calibri"/>
+              </a:rPr>
+              <a:t>Plataforma de Atención de Enfermería · Hospital Medical Health</a:t>
+            </a:r>
+          </a:p>
+        </p:txBody>
+      </p:sp>
+      <p:sp>
+        <p:nvSpPr>
+          <p:cNvPr id="6" name="TextBox 5"/>
+          <p:cNvSpPr txBox="1"/>
+          <p:nvPr/>
+        </p:nvSpPr>
+        <p:spPr>
+          <a:xfrm>
+            <a:off x="10972800" y="6446520"/>
+            <a:ext cx="822960" cy="320040"/>
+          </a:xfrm>
+          <a:prstGeom prst="rect">
+            <a:avLst/>
+          </a:prstGeom>
+          <a:noFill/>
+        </p:spPr>
+        <p:txBody>
+          <a:bodyPr wrap="square" anchor="t" lIns="45720" rIns="45720">
+            <a:spAutoFit/>
+          </a:bodyPr>
+          <a:lstStyle/>
+          <a:p>
+            <a:pPr algn="r"/>
+            <a:r>
+              <a:rPr sz="1000" b="0">
+                <a:solidFill>
+                  <a:srgbClr val="595959"/>
+                </a:solidFill>
+                <a:latin typeface="Calibri"/>
+              </a:rPr>
+              <a:t>22</a:t>
             </a:r>
           </a:p>
         </p:txBody>
@@ -14340,7 +18232,7 @@
 </p:sld>
 </file>
 
-<file path=ppt/slides/slide21.xml><?xml version="1.0" encoding="utf-8"?>
+<file path=ppt/slides/slide23.xml><?xml version="1.0" encoding="utf-8"?>
 <p:sld xmlns:a="http://schemas.openxmlformats.org/drawingml/2006/main" xmlns:p="http://schemas.openxmlformats.org/presentationml/2006/main" xmlns:r="http://schemas.openxmlformats.org/officeDocument/2006/relationships">
   <p:cSld>
     <p:spTree>
@@ -14538,7 +18430,7 @@
                 </a:solidFill>
                 <a:latin typeface="Calibri"/>
               </a:rPr>
-              <a:t>21</a:t>
+              <a:t>23</a:t>
             </a:r>
           </a:p>
         </p:txBody>
@@ -15134,7 +19026,7 @@
                 </a:solidFill>
                 <a:latin typeface="Calibri"/>
               </a:rPr>
-              <a:t>desde $6.669 al mes con reservas a 1 año.</a:t>
+              <a:t>desde $21,8 millones de pesos al mes con reservas a 1 año.</a:t>
             </a:r>
           </a:p>
         </p:txBody>
@@ -15296,7 +19188,7 @@
 </p:sld>
 </file>
 
-<file path=ppt/slides/slide22.xml><?xml version="1.0" encoding="utf-8"?>
+<file path=ppt/slides/slide24.xml><?xml version="1.0" encoding="utf-8"?>
 <p:sld xmlns:a="http://schemas.openxmlformats.org/drawingml/2006/main" xmlns:p="http://schemas.openxmlformats.org/presentationml/2006/main" xmlns:r="http://schemas.openxmlformats.org/officeDocument/2006/relationships">
   <p:cSld>
     <p:spTree>
@@ -19845,7 +23737,7 @@
                 </a:solidFill>
                 <a:latin typeface="Calibri"/>
               </a:rPr>
-              <a:t>El sistema, sus usuarios y los sistemas externos</a:t>
+              <a:t>El sistema, quién lo usa y con qué sistemas externos se conecta</a:t>
             </a:r>
           </a:p>
         </p:txBody>
@@ -19936,8 +23828,8 @@
         </p:blipFill>
         <p:spPr>
           <a:xfrm>
-            <a:off x="1193040" y="1371600"/>
-            <a:ext cx="6209280" cy="5029200"/>
+            <a:off x="444437" y="1371600"/>
+            <a:ext cx="11272645" cy="4069080"/>
           </a:xfrm>
           <a:prstGeom prst="rect">
             <a:avLst/>
@@ -19946,71 +23838,237 @@
       </p:pic>
       <p:sp>
         <p:nvSpPr>
-          <p:cNvPr id="9" name="TextBox 8"/>
-          <p:cNvSpPr txBox="1"/>
-          <p:nvPr/>
-        </p:nvSpPr>
-        <p:spPr>
-          <a:xfrm>
-            <a:off x="8412480" y="1737360"/>
-            <a:ext cx="3474720" cy="4572000"/>
-          </a:xfrm>
-          <a:prstGeom prst="rect">
-            <a:avLst/>
-          </a:prstGeom>
-          <a:noFill/>
-        </p:spPr>
-        <p:txBody>
-          <a:bodyPr wrap="square">
-            <a:spAutoFit/>
-          </a:bodyPr>
-          <a:lstStyle/>
-          <a:p>
-            <a:pPr>
-              <a:spcAft>
-                <a:spcPts val="800"/>
-              </a:spcAft>
-            </a:pPr>
-            <a:r>
-              <a:rPr sz="1500">
-                <a:solidFill>
-                  <a:srgbClr val="262626"/>
-                </a:solidFill>
-                <a:latin typeface="Calibri"/>
-              </a:rPr>
-              <a:t>▸ 3 tipos de personas: paciente, enfermera y supervisora.</a:t>
-            </a:r>
-          </a:p>
-          <a:p>
-            <a:pPr>
-              <a:spcAft>
-                <a:spcPts val="800"/>
-              </a:spcAft>
-            </a:pPr>
-            <a:r>
-              <a:rPr sz="1500">
-                <a:solidFill>
-                  <a:srgbClr val="262626"/>
-                </a:solidFill>
-                <a:latin typeface="Calibri"/>
-              </a:rPr>
-              <a:t>▸ 6 sistemas externos: seguridad, historias, motor de diagnóstico, mapas, comunicaciones y centros médicos.</a:t>
-            </a:r>
-          </a:p>
-          <a:p>
-            <a:pPr>
-              <a:spcAft>
-                <a:spcPts val="800"/>
-              </a:spcAft>
-            </a:pPr>
-            <a:r>
-              <a:rPr sz="1500">
-                <a:solidFill>
-                  <a:srgbClr val="262626"/>
-                </a:solidFill>
-                <a:latin typeface="Calibri"/>
-              </a:rPr>
-              <a:t>▸ Toda comunicación va cifrada por HTTPS.</a:t>
+          <p:cNvPr id="9" name="Rectangle 8"/>
+          <p:cNvSpPr/>
+          <p:nvPr/>
+        </p:nvSpPr>
+        <p:spPr>
+          <a:xfrm>
+            <a:off x="594360" y="5577840"/>
+            <a:ext cx="3596640" cy="731520"/>
+          </a:xfrm>
+          <a:prstGeom prst="rect">
+            <a:avLst/>
+          </a:prstGeom>
+          <a:solidFill>
+            <a:srgbClr val="EAF2FB"/>
+          </a:solidFill>
+          <a:ln>
+            <a:noFill/>
+          </a:ln>
+          <a:effectLst/>
+        </p:spPr>
+        <p:style>
+          <a:lnRef idx="1">
+            <a:schemeClr val="accent1"/>
+          </a:lnRef>
+          <a:fillRef idx="3">
+            <a:schemeClr val="accent1"/>
+          </a:fillRef>
+          <a:effectRef idx="2">
+            <a:schemeClr val="accent1"/>
+          </a:effectRef>
+          <a:fontRef idx="minor">
+            <a:schemeClr val="lt1"/>
+          </a:fontRef>
+        </p:style>
+        <p:txBody>
+          <a:bodyPr rtlCol="0" anchor="ctr"/>
+          <a:lstStyle/>
+          <a:p>
+            <a:pPr algn="ctr"/>
+          </a:p>
+        </p:txBody>
+      </p:sp>
+      <p:sp>
+        <p:nvSpPr>
+          <p:cNvPr id="10" name="TextBox 9"/>
+          <p:cNvSpPr txBox="1"/>
+          <p:nvPr/>
+        </p:nvSpPr>
+        <p:spPr>
+          <a:xfrm>
+            <a:off x="685800" y="5577840"/>
+            <a:ext cx="3413760" cy="731520"/>
+          </a:xfrm>
+          <a:prstGeom prst="rect">
+            <a:avLst/>
+          </a:prstGeom>
+          <a:noFill/>
+        </p:spPr>
+        <p:txBody>
+          <a:bodyPr wrap="square" anchor="ctr" lIns="45720" rIns="45720">
+            <a:spAutoFit/>
+          </a:bodyPr>
+          <a:lstStyle/>
+          <a:p>
+            <a:pPr algn="ctr"/>
+            <a:r>
+              <a:rPr sz="1500" b="1">
+                <a:solidFill>
+                  <a:srgbClr val="0B3C5D"/>
+                </a:solidFill>
+                <a:latin typeface="Calibri"/>
+              </a:rPr>
+              <a:t>3 personas: paciente, enfermera, supervisora</a:t>
+            </a:r>
+          </a:p>
+        </p:txBody>
+      </p:sp>
+      <p:sp>
+        <p:nvSpPr>
+          <p:cNvPr id="11" name="Rectangle 10"/>
+          <p:cNvSpPr/>
+          <p:nvPr/>
+        </p:nvSpPr>
+        <p:spPr>
+          <a:xfrm>
+            <a:off x="4282440" y="5577840"/>
+            <a:ext cx="3596640" cy="731520"/>
+          </a:xfrm>
+          <a:prstGeom prst="rect">
+            <a:avLst/>
+          </a:prstGeom>
+          <a:solidFill>
+            <a:srgbClr val="EAF2FB"/>
+          </a:solidFill>
+          <a:ln>
+            <a:noFill/>
+          </a:ln>
+          <a:effectLst/>
+        </p:spPr>
+        <p:style>
+          <a:lnRef idx="1">
+            <a:schemeClr val="accent1"/>
+          </a:lnRef>
+          <a:fillRef idx="3">
+            <a:schemeClr val="accent1"/>
+          </a:fillRef>
+          <a:effectRef idx="2">
+            <a:schemeClr val="accent1"/>
+          </a:effectRef>
+          <a:fontRef idx="minor">
+            <a:schemeClr val="lt1"/>
+          </a:fontRef>
+        </p:style>
+        <p:txBody>
+          <a:bodyPr rtlCol="0" anchor="ctr"/>
+          <a:lstStyle/>
+          <a:p>
+            <a:pPr algn="ctr"/>
+          </a:p>
+        </p:txBody>
+      </p:sp>
+      <p:sp>
+        <p:nvSpPr>
+          <p:cNvPr id="12" name="TextBox 11"/>
+          <p:cNvSpPr txBox="1"/>
+          <p:nvPr/>
+        </p:nvSpPr>
+        <p:spPr>
+          <a:xfrm>
+            <a:off x="4373880" y="5577840"/>
+            <a:ext cx="3413760" cy="731520"/>
+          </a:xfrm>
+          <a:prstGeom prst="rect">
+            <a:avLst/>
+          </a:prstGeom>
+          <a:noFill/>
+        </p:spPr>
+        <p:txBody>
+          <a:bodyPr wrap="square" anchor="ctr" lIns="45720" rIns="45720">
+            <a:spAutoFit/>
+          </a:bodyPr>
+          <a:lstStyle/>
+          <a:p>
+            <a:pPr algn="ctr"/>
+            <a:r>
+              <a:rPr sz="1500" b="1">
+                <a:solidFill>
+                  <a:srgbClr val="0B3C5D"/>
+                </a:solidFill>
+                <a:latin typeface="Calibri"/>
+              </a:rPr>
+              <a:t>6 sistemas externos</a:t>
+            </a:r>
+          </a:p>
+        </p:txBody>
+      </p:sp>
+      <p:sp>
+        <p:nvSpPr>
+          <p:cNvPr id="13" name="Rectangle 12"/>
+          <p:cNvSpPr/>
+          <p:nvPr/>
+        </p:nvSpPr>
+        <p:spPr>
+          <a:xfrm>
+            <a:off x="7970519" y="5577840"/>
+            <a:ext cx="3596640" cy="731520"/>
+          </a:xfrm>
+          <a:prstGeom prst="rect">
+            <a:avLst/>
+          </a:prstGeom>
+          <a:solidFill>
+            <a:srgbClr val="EAF2FB"/>
+          </a:solidFill>
+          <a:ln>
+            <a:noFill/>
+          </a:ln>
+          <a:effectLst/>
+        </p:spPr>
+        <p:style>
+          <a:lnRef idx="1">
+            <a:schemeClr val="accent1"/>
+          </a:lnRef>
+          <a:fillRef idx="3">
+            <a:schemeClr val="accent1"/>
+          </a:fillRef>
+          <a:effectRef idx="2">
+            <a:schemeClr val="accent1"/>
+          </a:effectRef>
+          <a:fontRef idx="minor">
+            <a:schemeClr val="lt1"/>
+          </a:fontRef>
+        </p:style>
+        <p:txBody>
+          <a:bodyPr rtlCol="0" anchor="ctr"/>
+          <a:lstStyle/>
+          <a:p>
+            <a:pPr algn="ctr"/>
+          </a:p>
+        </p:txBody>
+      </p:sp>
+      <p:sp>
+        <p:nvSpPr>
+          <p:cNvPr id="14" name="TextBox 13"/>
+          <p:cNvSpPr txBox="1"/>
+          <p:nvPr/>
+        </p:nvSpPr>
+        <p:spPr>
+          <a:xfrm>
+            <a:off x="8061959" y="5577840"/>
+            <a:ext cx="3413760" cy="731520"/>
+          </a:xfrm>
+          <a:prstGeom prst="rect">
+            <a:avLst/>
+          </a:prstGeom>
+          <a:noFill/>
+        </p:spPr>
+        <p:txBody>
+          <a:bodyPr wrap="square" anchor="ctr" lIns="45720" rIns="45720">
+            <a:spAutoFit/>
+          </a:bodyPr>
+          <a:lstStyle/>
+          <a:p>
+            <a:pPr algn="ctr"/>
+            <a:r>
+              <a:rPr sz="1500" b="1">
+                <a:solidFill>
+                  <a:srgbClr val="0B3C5D"/>
+                </a:solidFill>
+                <a:latin typeface="Calibri"/>
+              </a:rPr>
+              <a:t>Todo cifrado por HTTPS</a:t>
             </a:r>
           </a:p>
         </p:txBody>
@@ -20186,7 +24244,7 @@
                 </a:solidFill>
                 <a:latin typeface="Calibri"/>
               </a:rPr>
-              <a:t>Aplicaciones, microservicios y almacenes de datos</a:t>
+              <a:t>Web + Electron → API Gateway → un microservicio por historia, cada uno con sus datos</a:t>
             </a:r>
           </a:p>
         </p:txBody>
@@ -20277,162 +24335,14 @@
         </p:blipFill>
         <p:spPr>
           <a:xfrm>
-            <a:off x="1729549" y="1371600"/>
-            <a:ext cx="4953382" cy="5029200"/>
+            <a:off x="600406" y="1325880"/>
+            <a:ext cx="10960708" cy="5074920"/>
           </a:xfrm>
           <a:prstGeom prst="rect">
             <a:avLst/>
           </a:prstGeom>
         </p:spPr>
       </p:pic>
-      <p:sp>
-        <p:nvSpPr>
-          <p:cNvPr id="9" name="TextBox 8"/>
-          <p:cNvSpPr txBox="1"/>
-          <p:nvPr/>
-        </p:nvSpPr>
-        <p:spPr>
-          <a:xfrm>
-            <a:off x="8229600" y="1645920"/>
-            <a:ext cx="3657600" cy="4754880"/>
-          </a:xfrm>
-          <a:prstGeom prst="rect">
-            <a:avLst/>
-          </a:prstGeom>
-          <a:noFill/>
-        </p:spPr>
-        <p:txBody>
-          <a:bodyPr wrap="square">
-            <a:spAutoFit/>
-          </a:bodyPr>
-          <a:lstStyle/>
-          <a:p>
-            <a:pPr>
-              <a:spcAft>
-                <a:spcPts val="800"/>
-              </a:spcAft>
-            </a:pPr>
-            <a:r>
-              <a:rPr b="1" sz="1500">
-                <a:solidFill>
-                  <a:srgbClr val="0B3C5D"/>
-                </a:solidFill>
-                <a:latin typeface="Calibri"/>
-              </a:rPr>
-              <a:t>▸ Clientes: </a:t>
-            </a:r>
-            <a:r>
-              <a:rPr sz="1500">
-                <a:solidFill>
-                  <a:srgbClr val="262626"/>
-                </a:solidFill>
-                <a:latin typeface="Calibri"/>
-              </a:rPr>
-              <a:t>React + Electron</a:t>
-            </a:r>
-          </a:p>
-          <a:p>
-            <a:pPr>
-              <a:spcAft>
-                <a:spcPts val="800"/>
-              </a:spcAft>
-            </a:pPr>
-            <a:r>
-              <a:rPr b="1" sz="1500">
-                <a:solidFill>
-                  <a:srgbClr val="0B3C5D"/>
-                </a:solidFill>
-                <a:latin typeface="Calibri"/>
-              </a:rPr>
-              <a:t>▸ Gateway: </a:t>
-            </a:r>
-            <a:r>
-              <a:rPr sz="1500">
-                <a:solidFill>
-                  <a:srgbClr val="262626"/>
-                </a:solidFill>
-                <a:latin typeface="Calibri"/>
-              </a:rPr>
-              <a:t>API Management valida el token JWT</a:t>
-            </a:r>
-          </a:p>
-          <a:p>
-            <a:pPr>
-              <a:spcAft>
-                <a:spcPts val="800"/>
-              </a:spcAft>
-            </a:pPr>
-            <a:r>
-              <a:rPr b="1" sz="1500">
-                <a:solidFill>
-                  <a:srgbClr val="0B3C5D"/>
-                </a:solidFill>
-                <a:latin typeface="Calibri"/>
-              </a:rPr>
-              <a:t>▸ 5 microservicios: </a:t>
-            </a:r>
-            <a:r>
-              <a:rPr sz="1500">
-                <a:solidFill>
-                  <a:srgbClr val="262626"/>
-                </a:solidFill>
-                <a:latin typeface="Calibri"/>
-              </a:rPr>
-              <a:t>uno por historia de usuario + casos</a:t>
-            </a:r>
-          </a:p>
-          <a:p>
-            <a:pPr>
-              <a:spcAft>
-                <a:spcPts val="800"/>
-              </a:spcAft>
-            </a:pPr>
-            <a:r>
-              <a:rPr b="1" sz="1500">
-                <a:solidFill>
-                  <a:srgbClr val="0B3C5D"/>
-                </a:solidFill>
-                <a:latin typeface="Calibri"/>
-              </a:rPr>
-              <a:t>▸ Datos propios: </a:t>
-            </a:r>
-            <a:r>
-              <a:rPr sz="1500">
-                <a:solidFill>
-                  <a:srgbClr val="262626"/>
-                </a:solidFill>
-                <a:latin typeface="Calibri"/>
-              </a:rPr>
-              <a:t>cada servicio tiene su almacén</a:t>
-            </a:r>
-          </a:p>
-          <a:p>
-            <a:pPr>
-              <a:spcAft>
-                <a:spcPts val="800"/>
-              </a:spcAft>
-            </a:pPr>
-            <a:r>
-              <a:rPr b="1" sz="1500">
-                <a:solidFill>
-                  <a:srgbClr val="0B3C5D"/>
-                </a:solidFill>
-                <a:latin typeface="Calibri"/>
-              </a:rPr>
-              <a:t>▸ Eventos: </a:t>
-            </a:r>
-            <a:r>
-              <a:rPr sz="1500">
-                <a:solidFill>
-                  <a:srgbClr val="262626"/>
-                </a:solidFill>
-                <a:latin typeface="Calibri"/>
-              </a:rPr>
-              <a:t>Service Bus desacopla la remisión</a:t>
-            </a:r>
-          </a:p>
-        </p:txBody>
-      </p:sp>
     </p:spTree>
   </p:cSld>
   <p:clrMapOvr>
@@ -20569,7 +24479,7 @@
                 </a:solidFill>
                 <a:latin typeface="Calibri"/>
               </a:rPr>
-              <a:t>C4 · Nivel 3: Componentes del Asistente de Diagnóstico</a:t>
+              <a:t>C4 · Nivel 3: Historia Clínica (HU01)</a:t>
             </a:r>
           </a:p>
         </p:txBody>
@@ -20604,7 +24514,7 @@
                 </a:solidFill>
                 <a:latin typeface="Calibri"/>
               </a:rPr>
-              <a:t>HU02 · Reglas clínicas + motor de apoyo, siempre con supervisión de la enfermera</a:t>
+              <a:t>Consultar la historia clínica del paciente</a:t>
             </a:r>
           </a:p>
         </p:txBody>
@@ -20681,7 +24591,7 @@
       </p:sp>
       <p:pic>
         <p:nvPicPr>
-          <p:cNvPr id="8" name="Picture 7" descr="03b-componentes-diagnostico.png"/>
+          <p:cNvPr id="8" name="Picture 7" descr="03a-componentes-historia-clinica.png"/>
           <p:cNvPicPr>
             <a:picLocks noChangeAspect="1"/>
           </p:cNvPicPr>
@@ -20695,8 +24605,8 @@
         </p:blipFill>
         <p:spPr>
           <a:xfrm>
-            <a:off x="1728073" y="1371600"/>
-            <a:ext cx="2944654" cy="5029200"/>
+            <a:off x="1827215" y="1371600"/>
+            <a:ext cx="8507089" cy="4069079"/>
           </a:xfrm>
           <a:prstGeom prst="rect">
             <a:avLst/>
@@ -20705,173 +24615,237 @@
       </p:pic>
       <p:sp>
         <p:nvSpPr>
-          <p:cNvPr id="9" name="TextBox 8"/>
-          <p:cNvSpPr txBox="1"/>
-          <p:nvPr/>
-        </p:nvSpPr>
-        <p:spPr>
-          <a:xfrm>
-            <a:off x="6309360" y="1737360"/>
-            <a:ext cx="5486400" cy="4572000"/>
-          </a:xfrm>
-          <a:prstGeom prst="rect">
-            <a:avLst/>
-          </a:prstGeom>
-          <a:noFill/>
-        </p:spPr>
-        <p:txBody>
-          <a:bodyPr wrap="square">
-            <a:spAutoFit/>
-          </a:bodyPr>
-          <a:lstStyle/>
-          <a:p>
-            <a:pPr>
-              <a:spcAft>
-                <a:spcPts val="800"/>
-              </a:spcAft>
-            </a:pPr>
-            <a:r>
-              <a:rPr b="1" sz="1500">
+          <p:cNvPr id="9" name="Rectangle 8"/>
+          <p:cNvSpPr/>
+          <p:nvPr/>
+        </p:nvSpPr>
+        <p:spPr>
+          <a:xfrm>
+            <a:off x="594360" y="5577840"/>
+            <a:ext cx="3596640" cy="731520"/>
+          </a:xfrm>
+          <a:prstGeom prst="rect">
+            <a:avLst/>
+          </a:prstGeom>
+          <a:solidFill>
+            <a:srgbClr val="EAF2FB"/>
+          </a:solidFill>
+          <a:ln>
+            <a:noFill/>
+          </a:ln>
+          <a:effectLst/>
+        </p:spPr>
+        <p:style>
+          <a:lnRef idx="1">
+            <a:schemeClr val="accent1"/>
+          </a:lnRef>
+          <a:fillRef idx="3">
+            <a:schemeClr val="accent1"/>
+          </a:fillRef>
+          <a:effectRef idx="2">
+            <a:schemeClr val="accent1"/>
+          </a:effectRef>
+          <a:fontRef idx="minor">
+            <a:schemeClr val="lt1"/>
+          </a:fontRef>
+        </p:style>
+        <p:txBody>
+          <a:bodyPr rtlCol="0" anchor="ctr"/>
+          <a:lstStyle/>
+          <a:p>
+            <a:pPr algn="ctr"/>
+          </a:p>
+        </p:txBody>
+      </p:sp>
+      <p:sp>
+        <p:nvSpPr>
+          <p:cNvPr id="10" name="TextBox 9"/>
+          <p:cNvSpPr txBox="1"/>
+          <p:nvPr/>
+        </p:nvSpPr>
+        <p:spPr>
+          <a:xfrm>
+            <a:off x="685800" y="5577840"/>
+            <a:ext cx="3413760" cy="731520"/>
+          </a:xfrm>
+          <a:prstGeom prst="rect">
+            <a:avLst/>
+          </a:prstGeom>
+          <a:noFill/>
+        </p:spPr>
+        <p:txBody>
+          <a:bodyPr wrap="square" anchor="ctr" lIns="45720" rIns="45720">
+            <a:spAutoFit/>
+          </a:bodyPr>
+          <a:lstStyle/>
+          <a:p>
+            <a:pPr algn="ctr"/>
+            <a:r>
+              <a:rPr sz="1500" b="1">
                 <a:solidFill>
                   <a:srgbClr val="0B3C5D"/>
                 </a:solidFill>
                 <a:latin typeface="Calibri"/>
               </a:rPr>
-              <a:t>▸ Validador: </a:t>
-            </a:r>
-            <a:r>
-              <a:rPr sz="1500">
-                <a:solidFill>
-                  <a:srgbClr val="262626"/>
-                </a:solidFill>
-                <a:latin typeface="Calibri"/>
-              </a:rPr>
-              <a:t>normaliza síntomas, edad y signos vitales.</a:t>
-            </a:r>
-          </a:p>
-          <a:p>
-            <a:pPr>
-              <a:spcAft>
-                <a:spcPts val="800"/>
-              </a:spcAft>
-            </a:pPr>
-            <a:r>
-              <a:rPr b="1" sz="1500">
+              <a:t>Valida el rol de la enfermera</a:t>
+            </a:r>
+          </a:p>
+        </p:txBody>
+      </p:sp>
+      <p:sp>
+        <p:nvSpPr>
+          <p:cNvPr id="11" name="Rectangle 10"/>
+          <p:cNvSpPr/>
+          <p:nvPr/>
+        </p:nvSpPr>
+        <p:spPr>
+          <a:xfrm>
+            <a:off x="4282440" y="5577840"/>
+            <a:ext cx="3596640" cy="731520"/>
+          </a:xfrm>
+          <a:prstGeom prst="rect">
+            <a:avLst/>
+          </a:prstGeom>
+          <a:solidFill>
+            <a:srgbClr val="EAF2FB"/>
+          </a:solidFill>
+          <a:ln>
+            <a:noFill/>
+          </a:ln>
+          <a:effectLst/>
+        </p:spPr>
+        <p:style>
+          <a:lnRef idx="1">
+            <a:schemeClr val="accent1"/>
+          </a:lnRef>
+          <a:fillRef idx="3">
+            <a:schemeClr val="accent1"/>
+          </a:fillRef>
+          <a:effectRef idx="2">
+            <a:schemeClr val="accent1"/>
+          </a:effectRef>
+          <a:fontRef idx="minor">
+            <a:schemeClr val="lt1"/>
+          </a:fontRef>
+        </p:style>
+        <p:txBody>
+          <a:bodyPr rtlCol="0" anchor="ctr"/>
+          <a:lstStyle/>
+          <a:p>
+            <a:pPr algn="ctr"/>
+          </a:p>
+        </p:txBody>
+      </p:sp>
+      <p:sp>
+        <p:nvSpPr>
+          <p:cNvPr id="12" name="TextBox 11"/>
+          <p:cNvSpPr txBox="1"/>
+          <p:nvPr/>
+        </p:nvSpPr>
+        <p:spPr>
+          <a:xfrm>
+            <a:off x="4373880" y="5577840"/>
+            <a:ext cx="3413760" cy="731520"/>
+          </a:xfrm>
+          <a:prstGeom prst="rect">
+            <a:avLst/>
+          </a:prstGeom>
+          <a:noFill/>
+        </p:spPr>
+        <p:txBody>
+          <a:bodyPr wrap="square" anchor="ctr" lIns="45720" rIns="45720">
+            <a:spAutoFit/>
+          </a:bodyPr>
+          <a:lstStyle/>
+          <a:p>
+            <a:pPr algn="ctr"/>
+            <a:r>
+              <a:rPr sz="1500" b="1">
                 <a:solidFill>
                   <a:srgbClr val="0B3C5D"/>
                 </a:solidFill>
                 <a:latin typeface="Calibri"/>
               </a:rPr>
-              <a:t>▸ Motor de reglas: </a:t>
-            </a:r>
-            <a:r>
-              <a:rPr sz="1500">
-                <a:solidFill>
-                  <a:srgbClr val="262626"/>
-                </a:solidFill>
-                <a:latin typeface="Calibri"/>
-              </a:rPr>
-              <a:t>detecta signos de alarma con protocolos clínicos validados.</a:t>
-            </a:r>
-          </a:p>
-          <a:p>
-            <a:pPr>
-              <a:spcAft>
-                <a:spcPts val="800"/>
-              </a:spcAft>
-            </a:pPr>
-            <a:r>
-              <a:rPr b="1" sz="1500">
+              <a:t>Resume la historia desde FHIR</a:t>
+            </a:r>
+          </a:p>
+        </p:txBody>
+      </p:sp>
+      <p:sp>
+        <p:nvSpPr>
+          <p:cNvPr id="13" name="Rectangle 12"/>
+          <p:cNvSpPr/>
+          <p:nvPr/>
+        </p:nvSpPr>
+        <p:spPr>
+          <a:xfrm>
+            <a:off x="7970519" y="5577840"/>
+            <a:ext cx="3596640" cy="731520"/>
+          </a:xfrm>
+          <a:prstGeom prst="rect">
+            <a:avLst/>
+          </a:prstGeom>
+          <a:solidFill>
+            <a:srgbClr val="EAF2FB"/>
+          </a:solidFill>
+          <a:ln>
+            <a:noFill/>
+          </a:ln>
+          <a:effectLst/>
+        </p:spPr>
+        <p:style>
+          <a:lnRef idx="1">
+            <a:schemeClr val="accent1"/>
+          </a:lnRef>
+          <a:fillRef idx="3">
+            <a:schemeClr val="accent1"/>
+          </a:fillRef>
+          <a:effectRef idx="2">
+            <a:schemeClr val="accent1"/>
+          </a:effectRef>
+          <a:fontRef idx="minor">
+            <a:schemeClr val="lt1"/>
+          </a:fontRef>
+        </p:style>
+        <p:txBody>
+          <a:bodyPr rtlCol="0" anchor="ctr"/>
+          <a:lstStyle/>
+          <a:p>
+            <a:pPr algn="ctr"/>
+          </a:p>
+        </p:txBody>
+      </p:sp>
+      <p:sp>
+        <p:nvSpPr>
+          <p:cNvPr id="14" name="TextBox 13"/>
+          <p:cNvSpPr txBox="1"/>
+          <p:nvPr/>
+        </p:nvSpPr>
+        <p:spPr>
+          <a:xfrm>
+            <a:off x="8061959" y="5577840"/>
+            <a:ext cx="3413760" cy="731520"/>
+          </a:xfrm>
+          <a:prstGeom prst="rect">
+            <a:avLst/>
+          </a:prstGeom>
+          <a:noFill/>
+        </p:spPr>
+        <p:txBody>
+          <a:bodyPr wrap="square" anchor="ctr" lIns="45720" rIns="45720">
+            <a:spAutoFit/>
+          </a:bodyPr>
+          <a:lstStyle/>
+          <a:p>
+            <a:pPr algn="ctr"/>
+            <a:r>
+              <a:rPr sz="1500" b="1">
                 <a:solidFill>
                   <a:srgbClr val="0B3C5D"/>
                 </a:solidFill>
                 <a:latin typeface="Calibri"/>
               </a:rPr>
-              <a:t>▸ Anonimizador: </a:t>
-            </a:r>
-            <a:r>
-              <a:rPr sz="1500">
-                <a:solidFill>
-                  <a:srgbClr val="262626"/>
-                </a:solidFill>
-                <a:latin typeface="Calibri"/>
-              </a:rPr>
-              <a:t>elimina nombre y documento antes de consultar el modelo.</a:t>
-            </a:r>
-          </a:p>
-          <a:p>
-            <a:pPr>
-              <a:spcAft>
-                <a:spcPts val="800"/>
-              </a:spcAft>
-            </a:pPr>
-            <a:r>
-              <a:rPr b="1" sz="1500">
-                <a:solidFill>
-                  <a:srgbClr val="0B3C5D"/>
-                </a:solidFill>
-                <a:latin typeface="Calibri"/>
-              </a:rPr>
-              <a:t>▸ Agregador: </a:t>
-            </a:r>
-            <a:r>
-              <a:rPr sz="1500">
-                <a:solidFill>
-                  <a:srgbClr val="262626"/>
-                </a:solidFill>
-                <a:latin typeface="Calibri"/>
-              </a:rPr>
-              <a:t>combina reglas y sugerencias en un nivel de urgencia.</a:t>
-            </a:r>
-          </a:p>
-          <a:p>
-            <a:pPr>
-              <a:spcAft>
-                <a:spcPts val="800"/>
-              </a:spcAft>
-            </a:pPr>
-            <a:r>
-              <a:rPr b="1" sz="1500">
-                <a:solidFill>
-                  <a:srgbClr val="0B3C5D"/>
-                </a:solidFill>
-                <a:latin typeface="Calibri"/>
-              </a:rPr>
-              <a:t>▸ Auditoría: </a:t>
-            </a:r>
-            <a:r>
-              <a:rPr sz="1500">
-                <a:solidFill>
-                  <a:srgbClr val="262626"/>
-                </a:solidFill>
-                <a:latin typeface="Calibri"/>
-              </a:rPr>
-              <a:t>registra cada sugerencia para revisión médica.</a:t>
-            </a:r>
-          </a:p>
-          <a:p>
-            <a:pPr>
-              <a:spcAft>
-                <a:spcPts val="800"/>
-              </a:spcAft>
-            </a:pPr>
-            <a:r>
-              <a:rPr b="1" sz="1500">
-                <a:solidFill>
-                  <a:srgbClr val="0B3C5D"/>
-                </a:solidFill>
-                <a:latin typeface="Calibri"/>
-              </a:rPr>
-              <a:t>▸ Decisión final: </a:t>
-            </a:r>
-            <a:r>
-              <a:rPr sz="1500">
-                <a:solidFill>
-                  <a:srgbClr val="262626"/>
-                </a:solidFill>
-                <a:latin typeface="Calibri"/>
-              </a:rPr>
-              <a:t>siempre la toma la enfermera.</a:t>
+              <a:t>Audita cada consulta</a:t>
             </a:r>
           </a:p>
         </p:txBody>
